--- a/Chapter 5 Fundamentals of machine learning.pptx
+++ b/Chapter 5 Fundamentals of machine learning.pptx
@@ -5,10 +5,10 @@
     <p:sldMasterId id="2147483660" r:id="rId1"/>
   </p:sldMasterIdLst>
   <p:notesMasterIdLst>
-    <p:notesMasterId r:id="rId16"/>
+    <p:notesMasterId r:id="rId17"/>
   </p:notesMasterIdLst>
   <p:handoutMasterIdLst>
-    <p:handoutMasterId r:id="rId17"/>
+    <p:handoutMasterId r:id="rId18"/>
   </p:handoutMasterIdLst>
   <p:sldIdLst>
     <p:sldId id="256" r:id="rId2"/>
@@ -20,11 +20,12 @@
     <p:sldId id="1149" r:id="rId8"/>
     <p:sldId id="1150" r:id="rId9"/>
     <p:sldId id="1151" r:id="rId10"/>
-    <p:sldId id="1155" r:id="rId11"/>
-    <p:sldId id="1157" r:id="rId12"/>
-    <p:sldId id="1158" r:id="rId13"/>
-    <p:sldId id="1152" r:id="rId14"/>
-    <p:sldId id="1156" r:id="rId15"/>
+    <p:sldId id="1152" r:id="rId11"/>
+    <p:sldId id="1155" r:id="rId12"/>
+    <p:sldId id="1157" r:id="rId13"/>
+    <p:sldId id="1158" r:id="rId14"/>
+    <p:sldId id="1159" r:id="rId15"/>
+    <p:sldId id="1156" r:id="rId16"/>
   </p:sldIdLst>
   <p:sldSz cx="12192000" cy="6858000"/>
   <p:notesSz cx="6858000" cy="9144000"/>
@@ -141,10 +142,11 @@
             <p14:sldId id="1149"/>
             <p14:sldId id="1150"/>
             <p14:sldId id="1151"/>
+            <p14:sldId id="1152"/>
             <p14:sldId id="1155"/>
             <p14:sldId id="1157"/>
             <p14:sldId id="1158"/>
-            <p14:sldId id="1152"/>
+            <p14:sldId id="1159"/>
             <p14:sldId id="1156"/>
           </p14:sldIdLst>
         </p14:section>
@@ -3041,6 +3043,414 @@
         <p:cNvPr id="1" name="">
           <a:extLst>
             <a:ext uri="{FF2B5EF4-FFF2-40B4-BE49-F238E27FC236}">
+              <a16:creationId xmlns:a16="http://schemas.microsoft.com/office/drawing/2014/main" id="{620CD20E-7318-3019-C1E6-3355EE6D62EF}"/>
+            </a:ext>
+          </a:extLst>
+        </p:cNvPr>
+        <p:cNvGrpSpPr/>
+        <p:nvPr/>
+      </p:nvGrpSpPr>
+      <p:grpSpPr>
+        <a:xfrm>
+          <a:off x="0" y="0"/>
+          <a:ext cx="0" cy="0"/>
+          <a:chOff x="0" y="0"/>
+          <a:chExt cx="0" cy="0"/>
+        </a:xfrm>
+      </p:grpSpPr>
+      <p:sp>
+        <p:nvSpPr>
+          <p:cNvPr id="4" name="슬라이드 번호 개체 틀 3">
+            <a:extLst>
+              <a:ext uri="{FF2B5EF4-FFF2-40B4-BE49-F238E27FC236}">
+                <a16:creationId xmlns:a16="http://schemas.microsoft.com/office/drawing/2014/main" id="{812AE0E6-0FEF-2F62-1B38-B53C84E3D217}"/>
+              </a:ext>
+            </a:extLst>
+          </p:cNvPr>
+          <p:cNvSpPr>
+            <a:spLocks noGrp="1"/>
+          </p:cNvSpPr>
+          <p:nvPr>
+            <p:ph type="sldNum" sz="quarter" idx="12"/>
+          </p:nvPr>
+        </p:nvSpPr>
+        <p:spPr>
+          <a:xfrm>
+            <a:off x="10514011" y="6036261"/>
+            <a:ext cx="753545" cy="365125"/>
+          </a:xfrm>
+        </p:spPr>
+        <p:txBody>
+          <a:bodyPr/>
+          <a:lstStyle/>
+          <a:p>
+            <a:fld id="{D57F1E4F-1CFF-5643-939E-217C01CDF565}" type="slidenum">
+              <a:rPr lang="en-US" smtClean="0"/>
+              <a:pPr/>
+              <a:t>10</a:t>
+            </a:fld>
+            <a:endParaRPr lang="en-US" dirty="0"/>
+          </a:p>
+        </p:txBody>
+      </p:sp>
+      <p:sp>
+        <p:nvSpPr>
+          <p:cNvPr id="3" name="제목 1">
+            <a:extLst>
+              <a:ext uri="{FF2B5EF4-FFF2-40B4-BE49-F238E27FC236}">
+                <a16:creationId xmlns:a16="http://schemas.microsoft.com/office/drawing/2014/main" id="{BA4953BE-3FAE-969C-3077-8CEA680822B3}"/>
+              </a:ext>
+            </a:extLst>
+          </p:cNvPr>
+          <p:cNvSpPr txBox="1">
+            <a:spLocks/>
+          </p:cNvSpPr>
+          <p:nvPr/>
+        </p:nvSpPr>
+        <p:spPr>
+          <a:xfrm>
+            <a:off x="475645" y="481983"/>
+            <a:ext cx="10353762" cy="766439"/>
+          </a:xfrm>
+          <a:prstGeom prst="rect">
+            <a:avLst/>
+          </a:prstGeom>
+        </p:spPr>
+        <p:txBody>
+          <a:bodyPr vert="horz" lIns="91440" tIns="45720" rIns="91440" bIns="45720" rtlCol="0" anchor="ctr">
+            <a:normAutofit/>
+          </a:bodyPr>
+          <a:lstStyle>
+            <a:lvl1pPr algn="ctr" defTabSz="914400" rtl="0" eaLnBrk="1" latinLnBrk="1" hangingPunct="1">
+              <a:lnSpc>
+                <a:spcPct val="90000"/>
+              </a:lnSpc>
+              <a:spcBef>
+                <a:spcPct val="0"/>
+              </a:spcBef>
+              <a:buNone/>
+              <a:defRPr sz="3200" kern="1200" cap="all" baseline="0">
+                <a:solidFill>
+                  <a:schemeClr val="tx1"/>
+                </a:solidFill>
+                <a:effectLst/>
+                <a:latin typeface="Batang" panose="02030600000101010101" pitchFamily="18" charset="-127"/>
+                <a:ea typeface="Batang" panose="02030600000101010101" pitchFamily="18" charset="-127"/>
+                <a:cs typeface="+mj-cs"/>
+              </a:defRPr>
+            </a:lvl1pPr>
+          </a:lstStyle>
+          <a:p>
+            <a:pPr algn="l"/>
+            <a:r>
+              <a:rPr lang="en-US" altLang="ko-KR" sz="2900" b="1" cap="none" dirty="0">
+                <a:latin typeface="Lora" pitchFamily="2" charset="0"/>
+              </a:rPr>
+              <a:t>Locally Linear</a:t>
+            </a:r>
+          </a:p>
+        </p:txBody>
+      </p:sp>
+      <p:pic>
+        <p:nvPicPr>
+          <p:cNvPr id="5" name="그림 4">
+            <a:extLst>
+              <a:ext uri="{FF2B5EF4-FFF2-40B4-BE49-F238E27FC236}">
+                <a16:creationId xmlns:a16="http://schemas.microsoft.com/office/drawing/2014/main" id="{D757B68B-0990-EAC0-574E-9010E6396A3E}"/>
+              </a:ext>
+            </a:extLst>
+          </p:cNvPr>
+          <p:cNvPicPr>
+            <a:picLocks noChangeAspect="1"/>
+          </p:cNvPicPr>
+          <p:nvPr/>
+        </p:nvPicPr>
+        <p:blipFill>
+          <a:blip r:embed="rId2"/>
+          <a:stretch>
+            <a:fillRect/>
+          </a:stretch>
+        </p:blipFill>
+        <p:spPr>
+          <a:xfrm>
+            <a:off x="2610876" y="2981940"/>
+            <a:ext cx="6083299" cy="3318163"/>
+          </a:xfrm>
+          <a:prstGeom prst="rect">
+            <a:avLst/>
+          </a:prstGeom>
+        </p:spPr>
+      </p:pic>
+      <p:sp>
+        <p:nvSpPr>
+          <p:cNvPr id="6" name="TextBox 5">
+            <a:extLst>
+              <a:ext uri="{FF2B5EF4-FFF2-40B4-BE49-F238E27FC236}">
+                <a16:creationId xmlns:a16="http://schemas.microsoft.com/office/drawing/2014/main" id="{BD54E0AD-D3C1-780E-7298-ED0075A3E1C2}"/>
+              </a:ext>
+            </a:extLst>
+          </p:cNvPr>
+          <p:cNvSpPr txBox="1"/>
+          <p:nvPr/>
+        </p:nvSpPr>
+        <p:spPr>
+          <a:xfrm>
+            <a:off x="475645" y="1243876"/>
+            <a:ext cx="11135330" cy="1573316"/>
+          </a:xfrm>
+          <a:prstGeom prst="rect">
+            <a:avLst/>
+          </a:prstGeom>
+          <a:noFill/>
+        </p:spPr>
+        <p:txBody>
+          <a:bodyPr wrap="square">
+            <a:spAutoFit/>
+          </a:bodyPr>
+          <a:lstStyle/>
+          <a:p>
+            <a:pPr marL="285750" indent="-285750">
+              <a:lnSpc>
+                <a:spcPct val="150000"/>
+              </a:lnSpc>
+              <a:buFont typeface="Wingdings" panose="05000000000000000000" pitchFamily="2" charset="2"/>
+              <a:buChar char="v"/>
+            </a:pPr>
+            <a:r>
+              <a:rPr lang="ko-KR" altLang="en-US" sz="1600" dirty="0">
+                <a:latin typeface="D2Coding" panose="020B0609020101020101" pitchFamily="49" charset="-127"/>
+                <a:ea typeface="D2Coding" panose="020B0609020101020101" pitchFamily="49" charset="-127"/>
+              </a:rPr>
+              <a:t>곡선을 확대하면 직선처럼 보이고</a:t>
+            </a:r>
+            <a:r>
+              <a:rPr lang="en-US" altLang="ko-KR" sz="1600" dirty="0">
+                <a:latin typeface="D2Coding" panose="020B0609020101020101" pitchFamily="49" charset="-127"/>
+                <a:ea typeface="D2Coding" panose="020B0609020101020101" pitchFamily="49" charset="-127"/>
+              </a:rPr>
+              <a:t>, </a:t>
+            </a:r>
+            <a:r>
+              <a:rPr lang="ko-KR" altLang="en-US" sz="1600" dirty="0">
+                <a:latin typeface="D2Coding" panose="020B0609020101020101" pitchFamily="49" charset="-127"/>
+                <a:ea typeface="D2Coding" panose="020B0609020101020101" pitchFamily="49" charset="-127"/>
+              </a:rPr>
+              <a:t>지구</a:t>
+            </a:r>
+            <a:r>
+              <a:rPr lang="en-US" altLang="ko-KR" sz="1600" dirty="0">
+                <a:latin typeface="D2Coding" panose="020B0609020101020101" pitchFamily="49" charset="-127"/>
+                <a:ea typeface="D2Coding" panose="020B0609020101020101" pitchFamily="49" charset="-127"/>
+              </a:rPr>
+              <a:t>(3</a:t>
+            </a:r>
+            <a:r>
+              <a:rPr lang="ko-KR" altLang="en-US" sz="1600" dirty="0">
+                <a:latin typeface="D2Coding" panose="020B0609020101020101" pitchFamily="49" charset="-127"/>
+                <a:ea typeface="D2Coding" panose="020B0609020101020101" pitchFamily="49" charset="-127"/>
+              </a:rPr>
+              <a:t>차원 구</a:t>
+            </a:r>
+            <a:r>
+              <a:rPr lang="en-US" altLang="ko-KR" sz="1600" dirty="0">
+                <a:latin typeface="D2Coding" panose="020B0609020101020101" pitchFamily="49" charset="-127"/>
+                <a:ea typeface="D2Coding" panose="020B0609020101020101" pitchFamily="49" charset="-127"/>
+              </a:rPr>
+              <a:t>)</a:t>
+            </a:r>
+            <a:r>
+              <a:rPr lang="ko-KR" altLang="en-US" sz="1600" dirty="0">
+                <a:latin typeface="D2Coding" panose="020B0609020101020101" pitchFamily="49" charset="-127"/>
+                <a:ea typeface="D2Coding" panose="020B0609020101020101" pitchFamily="49" charset="-127"/>
+              </a:rPr>
+              <a:t>를 아주 좁게 보면 평평한 땅</a:t>
+            </a:r>
+            <a:r>
+              <a:rPr lang="en-US" altLang="ko-KR" sz="1600" dirty="0">
+                <a:latin typeface="D2Coding" panose="020B0609020101020101" pitchFamily="49" charset="-127"/>
+                <a:ea typeface="D2Coding" panose="020B0609020101020101" pitchFamily="49" charset="-127"/>
+              </a:rPr>
+              <a:t>(2</a:t>
+            </a:r>
+            <a:r>
+              <a:rPr lang="ko-KR" altLang="en-US" sz="1600" dirty="0">
+                <a:latin typeface="D2Coding" panose="020B0609020101020101" pitchFamily="49" charset="-127"/>
+                <a:ea typeface="D2Coding" panose="020B0609020101020101" pitchFamily="49" charset="-127"/>
+              </a:rPr>
+              <a:t>차원</a:t>
+            </a:r>
+            <a:r>
+              <a:rPr lang="en-US" altLang="ko-KR" sz="1600" dirty="0">
+                <a:latin typeface="D2Coding" panose="020B0609020101020101" pitchFamily="49" charset="-127"/>
+                <a:ea typeface="D2Coding" panose="020B0609020101020101" pitchFamily="49" charset="-127"/>
+              </a:rPr>
+              <a:t>)</a:t>
+            </a:r>
+          </a:p>
+          <a:p>
+            <a:pPr marL="285750" indent="-285750">
+              <a:lnSpc>
+                <a:spcPct val="150000"/>
+              </a:lnSpc>
+              <a:buFont typeface="Wingdings" panose="05000000000000000000" pitchFamily="2" charset="2"/>
+              <a:buChar char="v"/>
+            </a:pPr>
+            <a:r>
+              <a:rPr lang="ko-KR" altLang="en-US" sz="1600" dirty="0">
+                <a:latin typeface="D2Coding" panose="020B0609020101020101" pitchFamily="49" charset="-127"/>
+                <a:ea typeface="D2Coding" panose="020B0609020101020101" pitchFamily="49" charset="-127"/>
+              </a:rPr>
+              <a:t>현실 세계의 데이터 공간이 전체적으로는 복잡하게 꼬여 있어도</a:t>
+            </a:r>
+            <a:r>
+              <a:rPr lang="en-US" altLang="ko-KR" sz="1600" dirty="0">
+                <a:latin typeface="D2Coding" panose="020B0609020101020101" pitchFamily="49" charset="-127"/>
+                <a:ea typeface="D2Coding" panose="020B0609020101020101" pitchFamily="49" charset="-127"/>
+              </a:rPr>
+              <a:t>, </a:t>
+            </a:r>
+            <a:r>
+              <a:rPr lang="ko-KR" altLang="en-US" sz="1600" dirty="0">
+                <a:latin typeface="D2Coding" panose="020B0609020101020101" pitchFamily="49" charset="-127"/>
+                <a:ea typeface="D2Coding" panose="020B0609020101020101" pitchFamily="49" charset="-127"/>
+              </a:rPr>
+              <a:t>가까운 유역</a:t>
+            </a:r>
+            <a:r>
+              <a:rPr lang="en-US" altLang="ko-KR" sz="1600" dirty="0">
+                <a:latin typeface="D2Coding" panose="020B0609020101020101" pitchFamily="49" charset="-127"/>
+                <a:ea typeface="D2Coding" panose="020B0609020101020101" pitchFamily="49" charset="-127"/>
+              </a:rPr>
+              <a:t>(</a:t>
+            </a:r>
+            <a:r>
+              <a:rPr lang="ko-KR" altLang="en-US" sz="1600" dirty="0">
+                <a:latin typeface="D2Coding" panose="020B0609020101020101" pitchFamily="49" charset="-127"/>
+                <a:ea typeface="D2Coding" panose="020B0609020101020101" pitchFamily="49" charset="-127"/>
+              </a:rPr>
+              <a:t>국소적 공간</a:t>
+            </a:r>
+            <a:r>
+              <a:rPr lang="en-US" altLang="ko-KR" sz="1600" dirty="0">
+                <a:latin typeface="D2Coding" panose="020B0609020101020101" pitchFamily="49" charset="-127"/>
+                <a:ea typeface="D2Coding" panose="020B0609020101020101" pitchFamily="49" charset="-127"/>
+              </a:rPr>
+              <a:t>)</a:t>
+            </a:r>
+            <a:r>
+              <a:rPr lang="ko-KR" altLang="en-US" sz="1600" dirty="0" err="1">
+                <a:latin typeface="D2Coding" panose="020B0609020101020101" pitchFamily="49" charset="-127"/>
+                <a:ea typeface="D2Coding" panose="020B0609020101020101" pitchFamily="49" charset="-127"/>
+              </a:rPr>
+              <a:t>끼리는</a:t>
+            </a:r>
+            <a:r>
+              <a:rPr lang="ko-KR" altLang="en-US" sz="1600" dirty="0">
+                <a:latin typeface="D2Coding" panose="020B0609020101020101" pitchFamily="49" charset="-127"/>
+                <a:ea typeface="D2Coding" panose="020B0609020101020101" pitchFamily="49" charset="-127"/>
+              </a:rPr>
+              <a:t> 수학적으로 다루기 쉬운 단순한 형태</a:t>
+            </a:r>
+            <a:r>
+              <a:rPr lang="en-US" altLang="ko-KR" sz="1600" dirty="0">
+                <a:latin typeface="D2Coding" panose="020B0609020101020101" pitchFamily="49" charset="-127"/>
+                <a:ea typeface="D2Coding" panose="020B0609020101020101" pitchFamily="49" charset="-127"/>
+              </a:rPr>
+              <a:t>(</a:t>
+            </a:r>
+            <a:r>
+              <a:rPr lang="ko-KR" altLang="en-US" sz="1600" dirty="0">
+                <a:latin typeface="D2Coding" panose="020B0609020101020101" pitchFamily="49" charset="-127"/>
+                <a:ea typeface="D2Coding" panose="020B0609020101020101" pitchFamily="49" charset="-127"/>
+              </a:rPr>
+              <a:t>선형 공간</a:t>
+            </a:r>
+            <a:r>
+              <a:rPr lang="en-US" altLang="ko-KR" sz="1600" dirty="0">
+                <a:latin typeface="D2Coding" panose="020B0609020101020101" pitchFamily="49" charset="-127"/>
+                <a:ea typeface="D2Coding" panose="020B0609020101020101" pitchFamily="49" charset="-127"/>
+              </a:rPr>
+              <a:t>)</a:t>
+            </a:r>
+            <a:r>
+              <a:rPr lang="ko-KR" altLang="en-US" sz="1600" dirty="0">
+                <a:latin typeface="D2Coding" panose="020B0609020101020101" pitchFamily="49" charset="-127"/>
+                <a:ea typeface="D2Coding" panose="020B0609020101020101" pitchFamily="49" charset="-127"/>
+              </a:rPr>
+              <a:t>를 띠고 있음</a:t>
+            </a:r>
+            <a:endParaRPr lang="en-US" altLang="ko-KR" sz="1600" dirty="0">
+              <a:latin typeface="D2Coding" panose="020B0609020101020101" pitchFamily="49" charset="-127"/>
+              <a:ea typeface="D2Coding" panose="020B0609020101020101" pitchFamily="49" charset="-127"/>
+            </a:endParaRPr>
+          </a:p>
+          <a:p>
+            <a:pPr marL="285750" indent="-285750">
+              <a:lnSpc>
+                <a:spcPct val="150000"/>
+              </a:lnSpc>
+              <a:buFont typeface="Wingdings" panose="05000000000000000000" pitchFamily="2" charset="2"/>
+              <a:buChar char="v"/>
+            </a:pPr>
+            <a:r>
+              <a:rPr lang="ko-KR" altLang="en-US" sz="1600" dirty="0">
+                <a:latin typeface="D2Coding" panose="020B0609020101020101" pitchFamily="49" charset="-127"/>
+                <a:ea typeface="D2Coding" panose="020B0609020101020101" pitchFamily="49" charset="-127"/>
+              </a:rPr>
+              <a:t>인공지능이 이 </a:t>
+            </a:r>
+            <a:r>
+              <a:rPr lang="en-US" altLang="ko-KR" sz="1600" dirty="0">
+                <a:latin typeface="D2Coding" panose="020B0609020101020101" pitchFamily="49" charset="-127"/>
+                <a:ea typeface="D2Coding" panose="020B0609020101020101" pitchFamily="49" charset="-127"/>
+              </a:rPr>
+              <a:t>Manifold </a:t>
+            </a:r>
+            <a:r>
+              <a:rPr lang="ko-KR" altLang="en-US" sz="1600" dirty="0">
+                <a:latin typeface="D2Coding" panose="020B0609020101020101" pitchFamily="49" charset="-127"/>
+                <a:ea typeface="D2Coding" panose="020B0609020101020101" pitchFamily="49" charset="-127"/>
+              </a:rPr>
+              <a:t>공간을 미분과 </a:t>
+            </a:r>
+            <a:r>
+              <a:rPr lang="ko-KR" altLang="en-US" sz="1600" dirty="0" err="1">
+                <a:latin typeface="D2Coding" panose="020B0609020101020101" pitchFamily="49" charset="-127"/>
+                <a:ea typeface="D2Coding" panose="020B0609020101020101" pitchFamily="49" charset="-127"/>
+              </a:rPr>
+              <a:t>경사하강법을</a:t>
+            </a:r>
+            <a:r>
+              <a:rPr lang="ko-KR" altLang="en-US" sz="1600" dirty="0">
+                <a:latin typeface="D2Coding" panose="020B0609020101020101" pitchFamily="49" charset="-127"/>
+                <a:ea typeface="D2Coding" panose="020B0609020101020101" pitchFamily="49" charset="-127"/>
+              </a:rPr>
+              <a:t> 사용해 길을 찾아낼 수 있음</a:t>
+            </a:r>
+          </a:p>
+        </p:txBody>
+      </p:sp>
+    </p:spTree>
+    <p:extLst>
+      <p:ext uri="{BB962C8B-B14F-4D97-AF65-F5344CB8AC3E}">
+        <p14:creationId xmlns:p14="http://schemas.microsoft.com/office/powerpoint/2010/main" val="2369409469"/>
+      </p:ext>
+    </p:extLst>
+  </p:cSld>
+  <p:clrMapOvr>
+    <a:masterClrMapping/>
+  </p:clrMapOvr>
+</p:sld>
+</file>
+
+<file path=ppt/slides/slide11.xml><?xml version="1.0" encoding="utf-8"?>
+<p:sld xmlns:a="http://schemas.openxmlformats.org/drawingml/2006/main" xmlns:r="http://schemas.openxmlformats.org/officeDocument/2006/relationships" xmlns:p="http://schemas.openxmlformats.org/presentationml/2006/main">
+  <p:cSld>
+    <p:spTree>
+      <p:nvGrpSpPr>
+        <p:cNvPr id="1" name="">
+          <a:extLst>
+            <a:ext uri="{FF2B5EF4-FFF2-40B4-BE49-F238E27FC236}">
               <a16:creationId xmlns:a16="http://schemas.microsoft.com/office/drawing/2014/main" id="{8F6E568E-BB0A-E6FA-390F-635191070F0D}"/>
             </a:ext>
           </a:extLst>
@@ -3085,7 +3495,7 @@
             <a:fld id="{D57F1E4F-1CFF-5643-939E-217C01CDF565}" type="slidenum">
               <a:rPr lang="en-US" smtClean="0"/>
               <a:pPr/>
-              <a:t>10</a:t>
+              <a:t>11</a:t>
             </a:fld>
             <a:endParaRPr lang="en-US" dirty="0"/>
           </a:p>
@@ -3245,7 +3655,7 @@
 </p:sld>
 </file>
 
-<file path=ppt/slides/slide11.xml><?xml version="1.0" encoding="utf-8"?>
+<file path=ppt/slides/slide12.xml><?xml version="1.0" encoding="utf-8"?>
 <p:sld xmlns:a="http://schemas.openxmlformats.org/drawingml/2006/main" xmlns:r="http://schemas.openxmlformats.org/officeDocument/2006/relationships" xmlns:p="http://schemas.openxmlformats.org/presentationml/2006/main">
   <p:cSld>
     <p:spTree>
@@ -3297,7 +3707,7 @@
             <a:fld id="{D57F1E4F-1CFF-5643-939E-217C01CDF565}" type="slidenum">
               <a:rPr lang="en-US" smtClean="0"/>
               <a:pPr/>
-              <a:t>11</a:t>
+              <a:t>12</a:t>
             </a:fld>
             <a:endParaRPr lang="en-US" dirty="0"/>
           </a:p>
@@ -3776,7 +4186,7 @@
 </p:sld>
 </file>
 
-<file path=ppt/slides/slide12.xml><?xml version="1.0" encoding="utf-8"?>
+<file path=ppt/slides/slide13.xml><?xml version="1.0" encoding="utf-8"?>
 <p:sld xmlns:a="http://schemas.openxmlformats.org/drawingml/2006/main" xmlns:r="http://schemas.openxmlformats.org/officeDocument/2006/relationships" xmlns:p="http://schemas.openxmlformats.org/presentationml/2006/main">
   <p:cSld>
     <p:spTree>
@@ -3828,7 +4238,7 @@
             <a:fld id="{D57F1E4F-1CFF-5643-939E-217C01CDF565}" type="slidenum">
               <a:rPr lang="en-US" smtClean="0"/>
               <a:pPr/>
-              <a:t>12</a:t>
+              <a:t>13</a:t>
             </a:fld>
             <a:endParaRPr lang="en-US" dirty="0"/>
           </a:p>
@@ -4860,7 +5270,7 @@
 </p:sld>
 </file>
 
-<file path=ppt/slides/slide13.xml><?xml version="1.0" encoding="utf-8"?>
+<file path=ppt/slides/slide14.xml><?xml version="1.0" encoding="utf-8"?>
 <p:sld xmlns:a="http://schemas.openxmlformats.org/drawingml/2006/main" xmlns:r="http://schemas.openxmlformats.org/officeDocument/2006/relationships" xmlns:p="http://schemas.openxmlformats.org/presentationml/2006/main">
   <p:cSld>
     <p:spTree>
@@ -4868,7 +5278,7 @@
         <p:cNvPr id="1" name="">
           <a:extLst>
             <a:ext uri="{FF2B5EF4-FFF2-40B4-BE49-F238E27FC236}">
-              <a16:creationId xmlns:a16="http://schemas.microsoft.com/office/drawing/2014/main" id="{620CD20E-7318-3019-C1E6-3355EE6D62EF}"/>
+              <a16:creationId xmlns:a16="http://schemas.microsoft.com/office/drawing/2014/main" id="{7645809B-9335-21D8-97B5-079EDF403283}"/>
             </a:ext>
           </a:extLst>
         </p:cNvPr>
@@ -4888,7 +5298,7 @@
           <p:cNvPr id="4" name="슬라이드 번호 개체 틀 3">
             <a:extLst>
               <a:ext uri="{FF2B5EF4-FFF2-40B4-BE49-F238E27FC236}">
-                <a16:creationId xmlns:a16="http://schemas.microsoft.com/office/drawing/2014/main" id="{812AE0E6-0FEF-2F62-1B38-B53C84E3D217}"/>
+                <a16:creationId xmlns:a16="http://schemas.microsoft.com/office/drawing/2014/main" id="{D001A6BB-E5C5-2222-1536-090F173408DB}"/>
               </a:ext>
             </a:extLst>
           </p:cNvPr>
@@ -4912,7 +5322,7 @@
             <a:fld id="{D57F1E4F-1CFF-5643-939E-217C01CDF565}" type="slidenum">
               <a:rPr lang="en-US" smtClean="0"/>
               <a:pPr/>
-              <a:t>13</a:t>
+              <a:t>14</a:t>
             </a:fld>
             <a:endParaRPr lang="en-US" dirty="0"/>
           </a:p>
@@ -4923,7 +5333,7 @@
           <p:cNvPr id="3" name="제목 1">
             <a:extLst>
               <a:ext uri="{FF2B5EF4-FFF2-40B4-BE49-F238E27FC236}">
-                <a16:creationId xmlns:a16="http://schemas.microsoft.com/office/drawing/2014/main" id="{BA4953BE-3FAE-969C-3077-8CEA680822B3}"/>
+                <a16:creationId xmlns:a16="http://schemas.microsoft.com/office/drawing/2014/main" id="{D46657AB-576E-4AEA-FBB3-A47E0FC9A1F8}"/>
               </a:ext>
             </a:extLst>
           </p:cNvPr>
@@ -4976,42 +5386,12 @@
           </a:p>
         </p:txBody>
       </p:sp>
-      <p:pic>
-        <p:nvPicPr>
-          <p:cNvPr id="5" name="그림 4">
-            <a:extLst>
-              <a:ext uri="{FF2B5EF4-FFF2-40B4-BE49-F238E27FC236}">
-                <a16:creationId xmlns:a16="http://schemas.microsoft.com/office/drawing/2014/main" id="{D757B68B-0990-EAC0-574E-9010E6396A3E}"/>
-              </a:ext>
-            </a:extLst>
-          </p:cNvPr>
-          <p:cNvPicPr>
-            <a:picLocks noChangeAspect="1"/>
-          </p:cNvPicPr>
-          <p:nvPr/>
-        </p:nvPicPr>
-        <p:blipFill>
-          <a:blip r:embed="rId2"/>
-          <a:stretch>
-            <a:fillRect/>
-          </a:stretch>
-        </p:blipFill>
-        <p:spPr>
-          <a:xfrm>
-            <a:off x="2095501" y="2853499"/>
-            <a:ext cx="6457950" cy="3522518"/>
-          </a:xfrm>
-          <a:prstGeom prst="rect">
-            <a:avLst/>
-          </a:prstGeom>
-        </p:spPr>
-      </p:pic>
       <p:sp>
         <p:nvSpPr>
           <p:cNvPr id="6" name="TextBox 5">
             <a:extLst>
               <a:ext uri="{FF2B5EF4-FFF2-40B4-BE49-F238E27FC236}">
-                <a16:creationId xmlns:a16="http://schemas.microsoft.com/office/drawing/2014/main" id="{BD54E0AD-D3C1-780E-7298-ED0075A3E1C2}"/>
+                <a16:creationId xmlns:a16="http://schemas.microsoft.com/office/drawing/2014/main" id="{C41BA53E-6971-DDD0-D3C8-C17C55A41DE3}"/>
               </a:ext>
             </a:extLst>
           </p:cNvPr>
@@ -5154,7 +5534,7 @@
     </p:spTree>
     <p:extLst>
       <p:ext uri="{BB962C8B-B14F-4D97-AF65-F5344CB8AC3E}">
-        <p14:creationId xmlns:p14="http://schemas.microsoft.com/office/powerpoint/2010/main" val="2369409469"/>
+        <p14:creationId xmlns:p14="http://schemas.microsoft.com/office/powerpoint/2010/main" val="1288382200"/>
       </p:ext>
     </p:extLst>
   </p:cSld>
@@ -5164,7 +5544,7 @@
 </p:sld>
 </file>
 
-<file path=ppt/slides/slide14.xml><?xml version="1.0" encoding="utf-8"?>
+<file path=ppt/slides/slide15.xml><?xml version="1.0" encoding="utf-8"?>
 <p:sld xmlns:a="http://schemas.openxmlformats.org/drawingml/2006/main" xmlns:r="http://schemas.openxmlformats.org/officeDocument/2006/relationships" xmlns:p="http://schemas.openxmlformats.org/presentationml/2006/main">
   <p:cSld>
     <p:spTree>
@@ -5216,7 +5596,7 @@
             <a:fld id="{D57F1E4F-1CFF-5643-939E-217C01CDF565}" type="slidenum">
               <a:rPr lang="en-US" smtClean="0"/>
               <a:pPr/>
-              <a:t>14</a:t>
+              <a:t>15</a:t>
             </a:fld>
             <a:endParaRPr lang="en-US" dirty="0"/>
           </a:p>
@@ -7328,21 +7708,7 @@
                 <a:latin typeface="D2Coding" panose="020B0609020101020101" pitchFamily="49" charset="-127"/>
                 <a:ea typeface="D2Coding" panose="020B0609020101020101" pitchFamily="49" charset="-127"/>
               </a:rPr>
-              <a:t>번 </a:t>
-            </a:r>
-            <a:r>
-              <a:rPr lang="ko-KR" altLang="en-US" sz="1400" dirty="0" err="1">
-                <a:latin typeface="D2Coding" panose="020B0609020101020101" pitchFamily="49" charset="-127"/>
-                <a:ea typeface="D2Coding" panose="020B0609020101020101" pitchFamily="49" charset="-127"/>
-              </a:rPr>
-              <a:t>던ㅈ지면</a:t>
-            </a:r>
-            <a:r>
-              <a:rPr lang="ko-KR" altLang="en-US" sz="1400" dirty="0">
-                <a:latin typeface="D2Coding" panose="020B0609020101020101" pitchFamily="49" charset="-127"/>
-                <a:ea typeface="D2Coding" panose="020B0609020101020101" pitchFamily="49" charset="-127"/>
-              </a:rPr>
-              <a:t> 정확히 앞면 </a:t>
+              <a:t>번 던지면 정확히 앞면 </a:t>
             </a:r>
             <a:r>
               <a:rPr lang="en-US" altLang="ko-KR" sz="1400" dirty="0">
@@ -7759,6 +8125,53 @@
           </a:p>
         </p:txBody>
       </p:sp>
+      <p:pic>
+        <p:nvPicPr>
+          <p:cNvPr id="10242" name="Picture 2">
+            <a:extLst>
+              <a:ext uri="{FF2B5EF4-FFF2-40B4-BE49-F238E27FC236}">
+                <a16:creationId xmlns:a16="http://schemas.microsoft.com/office/drawing/2014/main" id="{BE677D51-6E7B-F0CF-8380-225DD42A04B5}"/>
+              </a:ext>
+            </a:extLst>
+          </p:cNvPr>
+          <p:cNvPicPr>
+            <a:picLocks noChangeAspect="1" noChangeArrowheads="1"/>
+          </p:cNvPicPr>
+          <p:nvPr/>
+        </p:nvPicPr>
+        <p:blipFill>
+          <a:blip r:embed="rId2">
+            <a:extLst>
+              <a:ext uri="{28A0092B-C50C-407E-A947-70E740481C1C}">
+                <a14:useLocalDpi xmlns:a14="http://schemas.microsoft.com/office/drawing/2010/main" val="0"/>
+              </a:ext>
+            </a:extLst>
+          </a:blip>
+          <a:srcRect/>
+          <a:stretch>
+            <a:fillRect/>
+          </a:stretch>
+        </p:blipFill>
+        <p:spPr bwMode="auto">
+          <a:xfrm>
+            <a:off x="762000" y="1884948"/>
+            <a:ext cx="5486400" cy="4333875"/>
+          </a:xfrm>
+          <a:prstGeom prst="rect">
+            <a:avLst/>
+          </a:prstGeom>
+          <a:noFill/>
+          <a:extLst>
+            <a:ext uri="{909E8E84-426E-40DD-AFC4-6F175D3DCCD1}">
+              <a14:hiddenFill xmlns:a14="http://schemas.microsoft.com/office/drawing/2010/main">
+                <a:solidFill>
+                  <a:srgbClr val="FFFFFF"/>
+                </a:solidFill>
+              </a14:hiddenFill>
+            </a:ext>
+          </a:extLst>
+        </p:spPr>
+      </p:pic>
     </p:spTree>
     <p:extLst>
       <p:ext uri="{BB962C8B-B14F-4D97-AF65-F5344CB8AC3E}">

--- a/Chapter 5 Fundamentals of machine learning.pptx
+++ b/Chapter 5 Fundamentals of machine learning.pptx
@@ -5,10 +5,10 @@
     <p:sldMasterId id="2147483660" r:id="rId1"/>
   </p:sldMasterIdLst>
   <p:notesMasterIdLst>
-    <p:notesMasterId r:id="rId17"/>
+    <p:notesMasterId r:id="rId18"/>
   </p:notesMasterIdLst>
   <p:handoutMasterIdLst>
-    <p:handoutMasterId r:id="rId18"/>
+    <p:handoutMasterId r:id="rId19"/>
   </p:handoutMasterIdLst>
   <p:sldIdLst>
     <p:sldId id="256" r:id="rId2"/>
@@ -19,13 +19,14 @@
     <p:sldId id="1148" r:id="rId7"/>
     <p:sldId id="1149" r:id="rId8"/>
     <p:sldId id="1150" r:id="rId9"/>
-    <p:sldId id="1151" r:id="rId10"/>
-    <p:sldId id="1152" r:id="rId11"/>
-    <p:sldId id="1155" r:id="rId12"/>
-    <p:sldId id="1157" r:id="rId13"/>
-    <p:sldId id="1158" r:id="rId14"/>
-    <p:sldId id="1159" r:id="rId15"/>
-    <p:sldId id="1156" r:id="rId16"/>
+    <p:sldId id="1160" r:id="rId10"/>
+    <p:sldId id="1156" r:id="rId11"/>
+    <p:sldId id="1161" r:id="rId12"/>
+    <p:sldId id="1151" r:id="rId13"/>
+    <p:sldId id="1157" r:id="rId14"/>
+    <p:sldId id="1158" r:id="rId15"/>
+    <p:sldId id="1152" r:id="rId16"/>
+    <p:sldId id="1159" r:id="rId17"/>
   </p:sldIdLst>
   <p:sldSz cx="12192000" cy="6858000"/>
   <p:notesSz cx="6858000" cy="9144000"/>
@@ -141,13 +142,14 @@
             <p14:sldId id="1148"/>
             <p14:sldId id="1149"/>
             <p14:sldId id="1150"/>
+            <p14:sldId id="1160"/>
+            <p14:sldId id="1156"/>
+            <p14:sldId id="1161"/>
             <p14:sldId id="1151"/>
-            <p14:sldId id="1152"/>
-            <p14:sldId id="1155"/>
             <p14:sldId id="1157"/>
             <p14:sldId id="1158"/>
+            <p14:sldId id="1152"/>
             <p14:sldId id="1159"/>
-            <p14:sldId id="1156"/>
           </p14:sldIdLst>
         </p14:section>
         <p14:section name="자세한 정보" id="{2CC34DB2-6590-42C0-AD4B-A04C6060184E}">
@@ -3043,7 +3045,7 @@
         <p:cNvPr id="1" name="">
           <a:extLst>
             <a:ext uri="{FF2B5EF4-FFF2-40B4-BE49-F238E27FC236}">
-              <a16:creationId xmlns:a16="http://schemas.microsoft.com/office/drawing/2014/main" id="{620CD20E-7318-3019-C1E6-3355EE6D62EF}"/>
+              <a16:creationId xmlns:a16="http://schemas.microsoft.com/office/drawing/2014/main" id="{2BB9405F-10BD-642A-ED53-86715C0B35A1}"/>
             </a:ext>
           </a:extLst>
         </p:cNvPr>
@@ -3063,7 +3065,7 @@
           <p:cNvPr id="4" name="슬라이드 번호 개체 틀 3">
             <a:extLst>
               <a:ext uri="{FF2B5EF4-FFF2-40B4-BE49-F238E27FC236}">
-                <a16:creationId xmlns:a16="http://schemas.microsoft.com/office/drawing/2014/main" id="{812AE0E6-0FEF-2F62-1B38-B53C84E3D217}"/>
+                <a16:creationId xmlns:a16="http://schemas.microsoft.com/office/drawing/2014/main" id="{5608A60C-C86D-7F6D-DE54-3BC7EB7C1F1C}"/>
               </a:ext>
             </a:extLst>
           </p:cNvPr>
@@ -3098,7 +3100,7 @@
           <p:cNvPr id="3" name="제목 1">
             <a:extLst>
               <a:ext uri="{FF2B5EF4-FFF2-40B4-BE49-F238E27FC236}">
-                <a16:creationId xmlns:a16="http://schemas.microsoft.com/office/drawing/2014/main" id="{BA4953BE-3FAE-969C-3077-8CEA680822B3}"/>
+                <a16:creationId xmlns:a16="http://schemas.microsoft.com/office/drawing/2014/main" id="{CCF7CFC9-D6A9-34AE-1DD9-917CF8643124}"/>
               </a:ext>
             </a:extLst>
           </p:cNvPr>
@@ -3146,47 +3148,111 @@
               <a:rPr lang="en-US" altLang="ko-KR" sz="2900" b="1" cap="none" dirty="0">
                 <a:latin typeface="Lora" pitchFamily="2" charset="0"/>
               </a:rPr>
-              <a:t>Locally Linear</a:t>
+              <a:t>The nature of generalization in deep learning</a:t>
             </a:r>
           </a:p>
         </p:txBody>
       </p:sp>
       <p:pic>
         <p:nvPicPr>
-          <p:cNvPr id="5" name="그림 4">
+          <p:cNvPr id="14340" name="Picture 4">
             <a:extLst>
               <a:ext uri="{FF2B5EF4-FFF2-40B4-BE49-F238E27FC236}">
-                <a16:creationId xmlns:a16="http://schemas.microsoft.com/office/drawing/2014/main" id="{D757B68B-0990-EAC0-574E-9010E6396A3E}"/>
+                <a16:creationId xmlns:a16="http://schemas.microsoft.com/office/drawing/2014/main" id="{D6A1A613-F908-DF08-70C4-E5E1FD8EF521}"/>
               </a:ext>
             </a:extLst>
           </p:cNvPr>
           <p:cNvPicPr>
-            <a:picLocks noChangeAspect="1"/>
+            <a:picLocks noChangeAspect="1" noChangeArrowheads="1"/>
           </p:cNvPicPr>
           <p:nvPr/>
         </p:nvPicPr>
         <p:blipFill>
-          <a:blip r:embed="rId2"/>
+          <a:blip r:embed="rId2">
+            <a:extLst>
+              <a:ext uri="{28A0092B-C50C-407E-A947-70E740481C1C}">
+                <a14:useLocalDpi xmlns:a14="http://schemas.microsoft.com/office/drawing/2010/main" val="0"/>
+              </a:ext>
+            </a:extLst>
+          </a:blip>
+          <a:srcRect/>
           <a:stretch>
             <a:fillRect/>
           </a:stretch>
         </p:blipFill>
-        <p:spPr>
-          <a:xfrm>
-            <a:off x="2610876" y="2981940"/>
-            <a:ext cx="6083299" cy="3318163"/>
+        <p:spPr bwMode="auto">
+          <a:xfrm>
+            <a:off x="1597344" y="3018404"/>
+            <a:ext cx="4328932" cy="3473835"/>
           </a:xfrm>
           <a:prstGeom prst="rect">
             <a:avLst/>
           </a:prstGeom>
+          <a:noFill/>
+          <a:extLst>
+            <a:ext uri="{909E8E84-426E-40DD-AFC4-6F175D3DCCD1}">
+              <a14:hiddenFill xmlns:a14="http://schemas.microsoft.com/office/drawing/2010/main">
+                <a:solidFill>
+                  <a:srgbClr val="FFFFFF"/>
+                </a:solidFill>
+              </a14:hiddenFill>
+            </a:ext>
+          </a:extLst>
+        </p:spPr>
+      </p:pic>
+      <p:pic>
+        <p:nvPicPr>
+          <p:cNvPr id="14342" name="Picture 6">
+            <a:extLst>
+              <a:ext uri="{FF2B5EF4-FFF2-40B4-BE49-F238E27FC236}">
+                <a16:creationId xmlns:a16="http://schemas.microsoft.com/office/drawing/2014/main" id="{CCB0697C-BF18-BCA1-7096-180CC403891A}"/>
+              </a:ext>
+            </a:extLst>
+          </p:cNvPr>
+          <p:cNvPicPr>
+            <a:picLocks noChangeAspect="1" noChangeArrowheads="1"/>
+          </p:cNvPicPr>
+          <p:nvPr/>
+        </p:nvPicPr>
+        <p:blipFill>
+          <a:blip r:embed="rId3">
+            <a:extLst>
+              <a:ext uri="{28A0092B-C50C-407E-A947-70E740481C1C}">
+                <a14:useLocalDpi xmlns:a14="http://schemas.microsoft.com/office/drawing/2010/main" val="0"/>
+              </a:ext>
+            </a:extLst>
+          </a:blip>
+          <a:srcRect/>
+          <a:stretch>
+            <a:fillRect/>
+          </a:stretch>
+        </p:blipFill>
+        <p:spPr bwMode="auto">
+          <a:xfrm>
+            <a:off x="6363345" y="3018404"/>
+            <a:ext cx="4527438" cy="3473835"/>
+          </a:xfrm>
+          <a:prstGeom prst="rect">
+            <a:avLst/>
+          </a:prstGeom>
+          <a:noFill/>
+          <a:extLst>
+            <a:ext uri="{909E8E84-426E-40DD-AFC4-6F175D3DCCD1}">
+              <a14:hiddenFill xmlns:a14="http://schemas.microsoft.com/office/drawing/2010/main">
+                <a:solidFill>
+                  <a:srgbClr val="FFFFFF"/>
+                </a:solidFill>
+              </a14:hiddenFill>
+            </a:ext>
+          </a:extLst>
         </p:spPr>
       </p:pic>
       <p:sp>
         <p:nvSpPr>
-          <p:cNvPr id="6" name="TextBox 5">
+          <p:cNvPr id="7" name="TextBox 6">
             <a:extLst>
               <a:ext uri="{FF2B5EF4-FFF2-40B4-BE49-F238E27FC236}">
-                <a16:creationId xmlns:a16="http://schemas.microsoft.com/office/drawing/2014/main" id="{BD54E0AD-D3C1-780E-7298-ED0075A3E1C2}"/>
+                <a16:creationId xmlns:a16="http://schemas.microsoft.com/office/drawing/2014/main" id="{2D89F46A-BE7E-D75F-06A5-C84FA5019AAF}"/>
               </a:ext>
             </a:extLst>
           </p:cNvPr>
@@ -3195,8 +3261,8 @@
         </p:nvSpPr>
         <p:spPr>
           <a:xfrm>
-            <a:off x="475645" y="1243876"/>
-            <a:ext cx="11135330" cy="1573316"/>
+            <a:off x="485804" y="1209655"/>
+            <a:ext cx="11218515" cy="1531830"/>
           </a:xfrm>
           <a:prstGeom prst="rect">
             <a:avLst/>
@@ -3221,71 +3287,40 @@
                 <a:latin typeface="D2Coding" panose="020B0609020101020101" pitchFamily="49" charset="-127"/>
                 <a:ea typeface="D2Coding" panose="020B0609020101020101" pitchFamily="49" charset="-127"/>
               </a:rPr>
-              <a:t>곡선을 확대하면 직선처럼 보이고</a:t>
+              <a:t>딥러닝 모델은 표현능력</a:t>
             </a:r>
             <a:r>
               <a:rPr lang="en-US" altLang="ko-KR" sz="1600" dirty="0">
                 <a:latin typeface="D2Coding" panose="020B0609020101020101" pitchFamily="49" charset="-127"/>
                 <a:ea typeface="D2Coding" panose="020B0609020101020101" pitchFamily="49" charset="-127"/>
               </a:rPr>
-              <a:t>, </a:t>
+              <a:t>(representational power)</a:t>
             </a:r>
             <a:r>
               <a:rPr lang="ko-KR" altLang="en-US" sz="1600" dirty="0">
                 <a:latin typeface="D2Coding" panose="020B0609020101020101" pitchFamily="49" charset="-127"/>
                 <a:ea typeface="D2Coding" panose="020B0609020101020101" pitchFamily="49" charset="-127"/>
               </a:rPr>
-              <a:t>지구</a:t>
+              <a:t>만 충분하다면 그 어떤 데이터라도 학습</a:t>
             </a:r>
             <a:r>
               <a:rPr lang="en-US" altLang="ko-KR" sz="1600" dirty="0">
                 <a:latin typeface="D2Coding" panose="020B0609020101020101" pitchFamily="49" charset="-127"/>
                 <a:ea typeface="D2Coding" panose="020B0609020101020101" pitchFamily="49" charset="-127"/>
               </a:rPr>
-              <a:t>(3</a:t>
+              <a:t>(fit)</a:t>
             </a:r>
             <a:r>
               <a:rPr lang="ko-KR" altLang="en-US" sz="1600" dirty="0">
                 <a:latin typeface="D2Coding" panose="020B0609020101020101" pitchFamily="49" charset="-127"/>
                 <a:ea typeface="D2Coding" panose="020B0609020101020101" pitchFamily="49" charset="-127"/>
               </a:rPr>
-              <a:t>차원 구</a:t>
-            </a:r>
-            <a:r>
-              <a:rPr lang="en-US" altLang="ko-KR" sz="1600" dirty="0">
-                <a:latin typeface="D2Coding" panose="020B0609020101020101" pitchFamily="49" charset="-127"/>
-                <a:ea typeface="D2Coding" panose="020B0609020101020101" pitchFamily="49" charset="-127"/>
-              </a:rPr>
-              <a:t>)</a:t>
-            </a:r>
-            <a:r>
-              <a:rPr lang="ko-KR" altLang="en-US" sz="1600" dirty="0">
-                <a:latin typeface="D2Coding" panose="020B0609020101020101" pitchFamily="49" charset="-127"/>
-                <a:ea typeface="D2Coding" panose="020B0609020101020101" pitchFamily="49" charset="-127"/>
-              </a:rPr>
-              <a:t>를 아주 좁게 보면 평평한 땅</a:t>
-            </a:r>
-            <a:r>
-              <a:rPr lang="en-US" altLang="ko-KR" sz="1600" dirty="0">
-                <a:latin typeface="D2Coding" panose="020B0609020101020101" pitchFamily="49" charset="-127"/>
-                <a:ea typeface="D2Coding" panose="020B0609020101020101" pitchFamily="49" charset="-127"/>
-              </a:rPr>
-              <a:t>(2</a:t>
-            </a:r>
-            <a:r>
-              <a:rPr lang="ko-KR" altLang="en-US" sz="1600" dirty="0">
-                <a:latin typeface="D2Coding" panose="020B0609020101020101" pitchFamily="49" charset="-127"/>
-                <a:ea typeface="D2Coding" panose="020B0609020101020101" pitchFamily="49" charset="-127"/>
-              </a:rPr>
-              <a:t>차원</a:t>
-            </a:r>
-            <a:r>
-              <a:rPr lang="en-US" altLang="ko-KR" sz="1600" dirty="0">
-                <a:latin typeface="D2Coding" panose="020B0609020101020101" pitchFamily="49" charset="-127"/>
-                <a:ea typeface="D2Coding" panose="020B0609020101020101" pitchFamily="49" charset="-127"/>
-              </a:rPr>
-              <a:t>)</a:t>
-            </a:r>
+              <a:t>시킬 수 있다는 것</a:t>
+            </a:r>
+            <a:endParaRPr lang="en-US" altLang="ko-KR" sz="1600" dirty="0">
+              <a:latin typeface="D2Coding" panose="020B0609020101020101" pitchFamily="49" charset="-127"/>
+              <a:ea typeface="D2Coding" panose="020B0609020101020101" pitchFamily="49" charset="-127"/>
+            </a:endParaRPr>
           </a:p>
           <a:p>
             <a:pPr marL="285750" indent="-285750">
@@ -3296,93 +3331,40 @@
               <a:buChar char="v"/>
             </a:pPr>
             <a:r>
+              <a:rPr lang="en-US" altLang="ko-KR" sz="1600" dirty="0">
+                <a:latin typeface="D2Coding" panose="020B0609020101020101" pitchFamily="49" charset="-127"/>
+                <a:ea typeface="D2Coding" panose="020B0609020101020101" pitchFamily="49" charset="-127"/>
+              </a:rPr>
+              <a:t>MNIST </a:t>
+            </a:r>
+            <a:r>
               <a:rPr lang="ko-KR" altLang="en-US" sz="1600" dirty="0">
                 <a:latin typeface="D2Coding" panose="020B0609020101020101" pitchFamily="49" charset="-127"/>
                 <a:ea typeface="D2Coding" panose="020B0609020101020101" pitchFamily="49" charset="-127"/>
               </a:rPr>
-              <a:t>현실 세계의 데이터 공간이 전체적으로는 복잡하게 꼬여 있어도</a:t>
+              <a:t>데이터셋의 정답 레이블</a:t>
             </a:r>
             <a:r>
               <a:rPr lang="en-US" altLang="ko-KR" sz="1600" dirty="0">
                 <a:latin typeface="D2Coding" panose="020B0609020101020101" pitchFamily="49" charset="-127"/>
                 <a:ea typeface="D2Coding" panose="020B0609020101020101" pitchFamily="49" charset="-127"/>
               </a:rPr>
-              <a:t>, </a:t>
+              <a:t>(label) </a:t>
             </a:r>
             <a:r>
               <a:rPr lang="ko-KR" altLang="en-US" sz="1600" dirty="0">
                 <a:latin typeface="D2Coding" panose="020B0609020101020101" pitchFamily="49" charset="-127"/>
                 <a:ea typeface="D2Coding" panose="020B0609020101020101" pitchFamily="49" charset="-127"/>
               </a:rPr>
-              <a:t>가까운 유역</a:t>
+              <a:t>순서를 무작위로 뒤섞은 뒤 모델을 학습시키면 입력 이미지와 뒤섞인 정답 사이에는 아무런 연관 관계가 없음에도 훈련데이터의 정확도가 아주 높다</a:t>
             </a:r>
             <a:r>
               <a:rPr lang="en-US" altLang="ko-KR" sz="1600" dirty="0">
                 <a:latin typeface="D2Coding" panose="020B0609020101020101" pitchFamily="49" charset="-127"/>
                 <a:ea typeface="D2Coding" panose="020B0609020101020101" pitchFamily="49" charset="-127"/>
               </a:rPr>
-              <a:t>(</a:t>
-            </a:r>
-            <a:r>
-              <a:rPr lang="ko-KR" altLang="en-US" sz="1600" dirty="0">
-                <a:latin typeface="D2Coding" panose="020B0609020101020101" pitchFamily="49" charset="-127"/>
-                <a:ea typeface="D2Coding" panose="020B0609020101020101" pitchFamily="49" charset="-127"/>
-              </a:rPr>
-              <a:t>국소적 공간</a:t>
-            </a:r>
-            <a:r>
-              <a:rPr lang="en-US" altLang="ko-KR" sz="1600" dirty="0">
-                <a:latin typeface="D2Coding" panose="020B0609020101020101" pitchFamily="49" charset="-127"/>
-                <a:ea typeface="D2Coding" panose="020B0609020101020101" pitchFamily="49" charset="-127"/>
-              </a:rPr>
-              <a:t>)</a:t>
-            </a:r>
-            <a:r>
-              <a:rPr lang="ko-KR" altLang="en-US" sz="1600" dirty="0" err="1">
-                <a:latin typeface="D2Coding" panose="020B0609020101020101" pitchFamily="49" charset="-127"/>
-                <a:ea typeface="D2Coding" panose="020B0609020101020101" pitchFamily="49" charset="-127"/>
-              </a:rPr>
-              <a:t>끼리는</a:t>
-            </a:r>
-            <a:r>
-              <a:rPr lang="ko-KR" altLang="en-US" sz="1600" dirty="0">
-                <a:latin typeface="D2Coding" panose="020B0609020101020101" pitchFamily="49" charset="-127"/>
-                <a:ea typeface="D2Coding" panose="020B0609020101020101" pitchFamily="49" charset="-127"/>
-              </a:rPr>
-              <a:t> 수학적으로 다루기 쉬운 단순한 형태</a:t>
-            </a:r>
-            <a:r>
-              <a:rPr lang="en-US" altLang="ko-KR" sz="1600" dirty="0">
-                <a:latin typeface="D2Coding" panose="020B0609020101020101" pitchFamily="49" charset="-127"/>
-                <a:ea typeface="D2Coding" panose="020B0609020101020101" pitchFamily="49" charset="-127"/>
-              </a:rPr>
-              <a:t>(</a:t>
-            </a:r>
-            <a:r>
-              <a:rPr lang="ko-KR" altLang="en-US" sz="1600" dirty="0">
-                <a:latin typeface="D2Coding" panose="020B0609020101020101" pitchFamily="49" charset="-127"/>
-                <a:ea typeface="D2Coding" panose="020B0609020101020101" pitchFamily="49" charset="-127"/>
-              </a:rPr>
-              <a:t>선형 공간</a:t>
-            </a:r>
-            <a:r>
-              <a:rPr lang="en-US" altLang="ko-KR" sz="1600" dirty="0">
-                <a:latin typeface="D2Coding" panose="020B0609020101020101" pitchFamily="49" charset="-127"/>
-                <a:ea typeface="D2Coding" panose="020B0609020101020101" pitchFamily="49" charset="-127"/>
-              </a:rPr>
-              <a:t>)</a:t>
-            </a:r>
-            <a:r>
-              <a:rPr lang="ko-KR" altLang="en-US" sz="1600" dirty="0">
-                <a:latin typeface="D2Coding" panose="020B0609020101020101" pitchFamily="49" charset="-127"/>
-                <a:ea typeface="D2Coding" panose="020B0609020101020101" pitchFamily="49" charset="-127"/>
-              </a:rPr>
-              <a:t>를 띠고 있음</a:t>
-            </a:r>
-            <a:endParaRPr lang="en-US" altLang="ko-KR" sz="1600" dirty="0">
-              <a:latin typeface="D2Coding" panose="020B0609020101020101" pitchFamily="49" charset="-127"/>
-              <a:ea typeface="D2Coding" panose="020B0609020101020101" pitchFamily="49" charset="-127"/>
-            </a:endParaRPr>
+              <a:t>(Memorize everything).</a:t>
+            </a:r>
           </a:p>
           <a:p>
             <a:pPr marL="285750" indent="-285750">
@@ -3397,43 +3379,335 @@
                 <a:latin typeface="D2Coding" panose="020B0609020101020101" pitchFamily="49" charset="-127"/>
                 <a:ea typeface="D2Coding" panose="020B0609020101020101" pitchFamily="49" charset="-127"/>
               </a:rPr>
-              <a:t>인공지능이 이 </a:t>
+              <a:t>다만</a:t>
             </a:r>
             <a:r>
               <a:rPr lang="en-US" altLang="ko-KR" sz="1600" dirty="0">
                 <a:latin typeface="D2Coding" panose="020B0609020101020101" pitchFamily="49" charset="-127"/>
                 <a:ea typeface="D2Coding" panose="020B0609020101020101" pitchFamily="49" charset="-127"/>
               </a:rPr>
-              <a:t>Manifold </a:t>
+              <a:t> </a:t>
             </a:r>
             <a:r>
               <a:rPr lang="ko-KR" altLang="en-US" sz="1600" dirty="0">
                 <a:latin typeface="D2Coding" panose="020B0609020101020101" pitchFamily="49" charset="-127"/>
                 <a:ea typeface="D2Coding" panose="020B0609020101020101" pitchFamily="49" charset="-127"/>
               </a:rPr>
-              <a:t>공간을 미분과 </a:t>
-            </a:r>
-            <a:r>
-              <a:rPr lang="ko-KR" altLang="en-US" sz="1600" dirty="0" err="1">
-                <a:latin typeface="D2Coding" panose="020B0609020101020101" pitchFamily="49" charset="-127"/>
-                <a:ea typeface="D2Coding" panose="020B0609020101020101" pitchFamily="49" charset="-127"/>
-              </a:rPr>
-              <a:t>경사하강법을</a:t>
+              <a:t>일반화가 일어날 가능성이 전혀 없기 때문에</a:t>
+            </a:r>
+            <a:r>
+              <a:rPr lang="en-US" altLang="ko-KR" sz="1600" dirty="0">
+                <a:latin typeface="D2Coding" panose="020B0609020101020101" pitchFamily="49" charset="-127"/>
+                <a:ea typeface="D2Coding" panose="020B0609020101020101" pitchFamily="49" charset="-127"/>
+              </a:rPr>
+              <a:t>, </a:t>
             </a:r>
             <a:r>
               <a:rPr lang="ko-KR" altLang="en-US" sz="1600" dirty="0">
                 <a:latin typeface="D2Coding" panose="020B0609020101020101" pitchFamily="49" charset="-127"/>
                 <a:ea typeface="D2Coding" panose="020B0609020101020101" pitchFamily="49" charset="-127"/>
               </a:rPr>
-              <a:t> 사용해 길을 찾아낼 수 있음</a:t>
-            </a:r>
+              <a:t>검증 손실</a:t>
+            </a:r>
+            <a:r>
+              <a:rPr lang="en-US" altLang="ko-KR" sz="1600" dirty="0">
+                <a:latin typeface="D2Coding" panose="020B0609020101020101" pitchFamily="49" charset="-127"/>
+                <a:ea typeface="D2Coding" panose="020B0609020101020101" pitchFamily="49" charset="-127"/>
+              </a:rPr>
+              <a:t>(validation loss)</a:t>
+            </a:r>
+            <a:r>
+              <a:rPr lang="ko-KR" altLang="en-US" sz="1600" dirty="0">
+                <a:latin typeface="D2Coding" panose="020B0609020101020101" pitchFamily="49" charset="-127"/>
+                <a:ea typeface="D2Coding" panose="020B0609020101020101" pitchFamily="49" charset="-127"/>
+              </a:rPr>
+              <a:t>은 전혀 개선되지 않음</a:t>
+            </a:r>
+          </a:p>
+        </p:txBody>
+      </p:sp>
+      <p:sp>
+        <p:nvSpPr>
+          <p:cNvPr id="9" name="TextBox 8">
+            <a:extLst>
+              <a:ext uri="{FF2B5EF4-FFF2-40B4-BE49-F238E27FC236}">
+                <a16:creationId xmlns:a16="http://schemas.microsoft.com/office/drawing/2014/main" id="{28B4BDBD-754C-22AB-6DEA-6BA103A63BD9}"/>
+              </a:ext>
+            </a:extLst>
+          </p:cNvPr>
+          <p:cNvSpPr txBox="1"/>
+          <p:nvPr/>
+        </p:nvSpPr>
+        <p:spPr>
+          <a:xfrm>
+            <a:off x="2374255" y="4755321"/>
+            <a:ext cx="3454401" cy="938719"/>
+          </a:xfrm>
+          <a:prstGeom prst="rect">
+            <a:avLst/>
+          </a:prstGeom>
+          <a:noFill/>
+        </p:spPr>
+        <p:txBody>
+          <a:bodyPr wrap="square">
+            <a:spAutoFit/>
+          </a:bodyPr>
+          <a:lstStyle/>
+          <a:p>
+            <a:pPr algn="l" latinLnBrk="0">
+              <a:buNone/>
+            </a:pPr>
+            <a:r>
+              <a:rPr lang="en-US" altLang="ko-KR" sz="1100" b="0" i="0" dirty="0">
+                <a:effectLst/>
+                <a:latin typeface="D2Coding" panose="020B0609020101020101" pitchFamily="49" charset="-127"/>
+                <a:ea typeface="D2Coding" panose="020B0609020101020101" pitchFamily="49" charset="-127"/>
+              </a:rPr>
+              <a:t>model = </a:t>
+            </a:r>
+            <a:r>
+              <a:rPr lang="en-US" altLang="ko-KR" sz="1100" b="0" i="0" dirty="0" err="1">
+                <a:effectLst/>
+                <a:latin typeface="D2Coding" panose="020B0609020101020101" pitchFamily="49" charset="-127"/>
+                <a:ea typeface="D2Coding" panose="020B0609020101020101" pitchFamily="49" charset="-127"/>
+              </a:rPr>
+              <a:t>keras.Sequential</a:t>
+            </a:r>
+            <a:r>
+              <a:rPr lang="en-US" altLang="ko-KR" sz="1100" b="0" i="0" dirty="0">
+                <a:effectLst/>
+                <a:latin typeface="D2Coding" panose="020B0609020101020101" pitchFamily="49" charset="-127"/>
+                <a:ea typeface="D2Coding" panose="020B0609020101020101" pitchFamily="49" charset="-127"/>
+              </a:rPr>
+              <a:t>(</a:t>
+            </a:r>
+          </a:p>
+          <a:p>
+            <a:pPr algn="l" latinLnBrk="0">
+              <a:buNone/>
+            </a:pPr>
+            <a:r>
+              <a:rPr lang="en-US" altLang="ko-KR" sz="1100" b="0" i="0" dirty="0">
+                <a:effectLst/>
+                <a:latin typeface="D2Coding" panose="020B0609020101020101" pitchFamily="49" charset="-127"/>
+                <a:ea typeface="D2Coding" panose="020B0609020101020101" pitchFamily="49" charset="-127"/>
+              </a:rPr>
+              <a:t>    [</a:t>
+            </a:r>
+          </a:p>
+          <a:p>
+            <a:pPr algn="l" latinLnBrk="0">
+              <a:buNone/>
+            </a:pPr>
+            <a:r>
+              <a:rPr lang="en-US" altLang="ko-KR" sz="1100" b="0" i="0" dirty="0">
+                <a:effectLst/>
+                <a:latin typeface="D2Coding" panose="020B0609020101020101" pitchFamily="49" charset="-127"/>
+                <a:ea typeface="D2Coding" panose="020B0609020101020101" pitchFamily="49" charset="-127"/>
+              </a:rPr>
+              <a:t>        </a:t>
+            </a:r>
+            <a:r>
+              <a:rPr lang="en-US" altLang="ko-KR" sz="1100" b="0" i="0" dirty="0" err="1">
+                <a:effectLst/>
+                <a:latin typeface="D2Coding" panose="020B0609020101020101" pitchFamily="49" charset="-127"/>
+                <a:ea typeface="D2Coding" panose="020B0609020101020101" pitchFamily="49" charset="-127"/>
+              </a:rPr>
+              <a:t>layers.Dense</a:t>
+            </a:r>
+            <a:r>
+              <a:rPr lang="en-US" altLang="ko-KR" sz="1100" b="0" i="0" dirty="0">
+                <a:effectLst/>
+                <a:latin typeface="D2Coding" panose="020B0609020101020101" pitchFamily="49" charset="-127"/>
+                <a:ea typeface="D2Coding" panose="020B0609020101020101" pitchFamily="49" charset="-127"/>
+              </a:rPr>
+              <a:t>(512, activation="</a:t>
+            </a:r>
+            <a:r>
+              <a:rPr lang="en-US" altLang="ko-KR" sz="1100" b="0" i="0" dirty="0" err="1">
+                <a:effectLst/>
+                <a:latin typeface="D2Coding" panose="020B0609020101020101" pitchFamily="49" charset="-127"/>
+                <a:ea typeface="D2Coding" panose="020B0609020101020101" pitchFamily="49" charset="-127"/>
+              </a:rPr>
+              <a:t>relu</a:t>
+            </a:r>
+            <a:r>
+              <a:rPr lang="en-US" altLang="ko-KR" sz="1100" b="0" i="0" dirty="0">
+                <a:effectLst/>
+                <a:latin typeface="D2Coding" panose="020B0609020101020101" pitchFamily="49" charset="-127"/>
+                <a:ea typeface="D2Coding" panose="020B0609020101020101" pitchFamily="49" charset="-127"/>
+              </a:rPr>
+              <a:t>"),</a:t>
+            </a:r>
+          </a:p>
+          <a:p>
+            <a:pPr algn="l" latinLnBrk="0">
+              <a:buNone/>
+            </a:pPr>
+            <a:r>
+              <a:rPr lang="en-US" altLang="ko-KR" sz="1100" b="0" i="0" dirty="0">
+                <a:effectLst/>
+                <a:latin typeface="D2Coding" panose="020B0609020101020101" pitchFamily="49" charset="-127"/>
+                <a:ea typeface="D2Coding" panose="020B0609020101020101" pitchFamily="49" charset="-127"/>
+              </a:rPr>
+              <a:t>        </a:t>
+            </a:r>
+            <a:r>
+              <a:rPr lang="en-US" altLang="ko-KR" sz="1100" b="0" i="0" dirty="0" err="1">
+                <a:effectLst/>
+                <a:latin typeface="D2Coding" panose="020B0609020101020101" pitchFamily="49" charset="-127"/>
+                <a:ea typeface="D2Coding" panose="020B0609020101020101" pitchFamily="49" charset="-127"/>
+              </a:rPr>
+              <a:t>layers.Dense</a:t>
+            </a:r>
+            <a:r>
+              <a:rPr lang="en-US" altLang="ko-KR" sz="1100" b="0" i="0" dirty="0">
+                <a:effectLst/>
+                <a:latin typeface="D2Coding" panose="020B0609020101020101" pitchFamily="49" charset="-127"/>
+                <a:ea typeface="D2Coding" panose="020B0609020101020101" pitchFamily="49" charset="-127"/>
+              </a:rPr>
+              <a:t>(10, activation="</a:t>
+            </a:r>
+            <a:r>
+              <a:rPr lang="en-US" altLang="ko-KR" sz="1100" b="0" i="0" dirty="0" err="1">
+                <a:effectLst/>
+                <a:latin typeface="D2Coding" panose="020B0609020101020101" pitchFamily="49" charset="-127"/>
+                <a:ea typeface="D2Coding" panose="020B0609020101020101" pitchFamily="49" charset="-127"/>
+              </a:rPr>
+              <a:t>softmax</a:t>
+            </a:r>
+            <a:r>
+              <a:rPr lang="en-US" altLang="ko-KR" sz="1100" b="0" i="0" dirty="0">
+                <a:effectLst/>
+                <a:latin typeface="D2Coding" panose="020B0609020101020101" pitchFamily="49" charset="-127"/>
+                <a:ea typeface="D2Coding" panose="020B0609020101020101" pitchFamily="49" charset="-127"/>
+              </a:rPr>
+              <a:t>"),</a:t>
+            </a:r>
+          </a:p>
+          <a:p>
+            <a:pPr algn="l">
+              <a:buNone/>
+            </a:pPr>
+            <a:r>
+              <a:rPr lang="en-US" altLang="ko-KR" sz="1100" b="0" i="0" dirty="0">
+                <a:effectLst/>
+                <a:latin typeface="D2Coding" panose="020B0609020101020101" pitchFamily="49" charset="-127"/>
+                <a:ea typeface="D2Coding" panose="020B0609020101020101" pitchFamily="49" charset="-127"/>
+              </a:rPr>
+              <a:t>    ]</a:t>
+            </a:r>
+          </a:p>
+        </p:txBody>
+      </p:sp>
+      <p:sp>
+        <p:nvSpPr>
+          <p:cNvPr id="10" name="직사각형 9">
+            <a:extLst>
+              <a:ext uri="{FF2B5EF4-FFF2-40B4-BE49-F238E27FC236}">
+                <a16:creationId xmlns:a16="http://schemas.microsoft.com/office/drawing/2014/main" id="{DE80B739-3F92-2F26-2CA2-62648FDCD8AB}"/>
+              </a:ext>
+            </a:extLst>
+          </p:cNvPr>
+          <p:cNvSpPr/>
+          <p:nvPr/>
+        </p:nvSpPr>
+        <p:spPr>
+          <a:xfrm>
+            <a:off x="4409440" y="3018404"/>
+            <a:ext cx="1259840" cy="273436"/>
+          </a:xfrm>
+          <a:prstGeom prst="rect">
+            <a:avLst/>
+          </a:prstGeom>
+          <a:noFill/>
+          <a:ln>
+            <a:solidFill>
+              <a:schemeClr val="tx1"/>
+            </a:solidFill>
+          </a:ln>
+        </p:spPr>
+        <p:style>
+          <a:lnRef idx="2">
+            <a:schemeClr val="accent1">
+              <a:shade val="15000"/>
+            </a:schemeClr>
+          </a:lnRef>
+          <a:fillRef idx="1">
+            <a:schemeClr val="accent1"/>
+          </a:fillRef>
+          <a:effectRef idx="0">
+            <a:schemeClr val="accent1"/>
+          </a:effectRef>
+          <a:fontRef idx="minor">
+            <a:schemeClr val="lt1"/>
+          </a:fontRef>
+        </p:style>
+        <p:txBody>
+          <a:bodyPr rtlCol="0" anchor="ctr"/>
+          <a:lstStyle/>
+          <a:p>
+            <a:pPr algn="ctr"/>
+            <a:endParaRPr lang="ko-KR" altLang="en-US"/>
+          </a:p>
+        </p:txBody>
+      </p:sp>
+      <p:sp>
+        <p:nvSpPr>
+          <p:cNvPr id="11" name="직사각형 10">
+            <a:extLst>
+              <a:ext uri="{FF2B5EF4-FFF2-40B4-BE49-F238E27FC236}">
+                <a16:creationId xmlns:a16="http://schemas.microsoft.com/office/drawing/2014/main" id="{CC4E756B-D020-83F5-14FE-E01F7EB91BB0}"/>
+              </a:ext>
+            </a:extLst>
+          </p:cNvPr>
+          <p:cNvSpPr/>
+          <p:nvPr/>
+        </p:nvSpPr>
+        <p:spPr>
+          <a:xfrm>
+            <a:off x="9347200" y="3018404"/>
+            <a:ext cx="1361440" cy="273436"/>
+          </a:xfrm>
+          <a:prstGeom prst="rect">
+            <a:avLst/>
+          </a:prstGeom>
+          <a:noFill/>
+          <a:ln>
+            <a:solidFill>
+              <a:schemeClr val="tx1"/>
+            </a:solidFill>
+          </a:ln>
+        </p:spPr>
+        <p:style>
+          <a:lnRef idx="2">
+            <a:schemeClr val="accent1">
+              <a:shade val="15000"/>
+            </a:schemeClr>
+          </a:lnRef>
+          <a:fillRef idx="1">
+            <a:schemeClr val="accent1"/>
+          </a:fillRef>
+          <a:effectRef idx="0">
+            <a:schemeClr val="accent1"/>
+          </a:effectRef>
+          <a:fontRef idx="minor">
+            <a:schemeClr val="lt1"/>
+          </a:fontRef>
+        </p:style>
+        <p:txBody>
+          <a:bodyPr rtlCol="0" anchor="ctr"/>
+          <a:lstStyle/>
+          <a:p>
+            <a:pPr algn="ctr"/>
+            <a:endParaRPr lang="ko-KR" altLang="en-US"/>
           </a:p>
         </p:txBody>
       </p:sp>
     </p:spTree>
     <p:extLst>
       <p:ext uri="{BB962C8B-B14F-4D97-AF65-F5344CB8AC3E}">
-        <p14:creationId xmlns:p14="http://schemas.microsoft.com/office/powerpoint/2010/main" val="2369409469"/>
+        <p14:creationId xmlns:p14="http://schemas.microsoft.com/office/powerpoint/2010/main" val="4138489990"/>
       </p:ext>
     </p:extLst>
   </p:cSld>
@@ -3451,7 +3725,7 @@
         <p:cNvPr id="1" name="">
           <a:extLst>
             <a:ext uri="{FF2B5EF4-FFF2-40B4-BE49-F238E27FC236}">
-              <a16:creationId xmlns:a16="http://schemas.microsoft.com/office/drawing/2014/main" id="{8F6E568E-BB0A-E6FA-390F-635191070F0D}"/>
+              <a16:creationId xmlns:a16="http://schemas.microsoft.com/office/drawing/2014/main" id="{51478CB2-58AF-781C-5F81-4B1C797059D4}"/>
             </a:ext>
           </a:extLst>
         </p:cNvPr>
@@ -3471,7 +3745,7 @@
           <p:cNvPr id="4" name="슬라이드 번호 개체 틀 3">
             <a:extLst>
               <a:ext uri="{FF2B5EF4-FFF2-40B4-BE49-F238E27FC236}">
-                <a16:creationId xmlns:a16="http://schemas.microsoft.com/office/drawing/2014/main" id="{48667B48-5B62-68A0-1660-CFDEA5415033}"/>
+                <a16:creationId xmlns:a16="http://schemas.microsoft.com/office/drawing/2014/main" id="{6A6D56C7-49EB-AF23-7E3F-2D36D5B489B7}"/>
               </a:ext>
             </a:extLst>
           </p:cNvPr>
@@ -3506,7 +3780,7 @@
           <p:cNvPr id="3" name="제목 1">
             <a:extLst>
               <a:ext uri="{FF2B5EF4-FFF2-40B4-BE49-F238E27FC236}">
-                <a16:creationId xmlns:a16="http://schemas.microsoft.com/office/drawing/2014/main" id="{8DA588E4-0C77-11C8-5DC4-F3AE9EF78886}"/>
+                <a16:creationId xmlns:a16="http://schemas.microsoft.com/office/drawing/2014/main" id="{FD536916-D349-56AA-B32F-82277BB12A11}"/>
               </a:ext>
             </a:extLst>
           </p:cNvPr>
@@ -3551,20 +3825,299 @@
           <a:p>
             <a:pPr algn="l"/>
             <a:r>
-              <a:rPr lang="en-US" altLang="ko-KR" sz="2800" b="1" cap="none" dirty="0">
+              <a:rPr lang="en-US" altLang="ko-KR" sz="2900" b="1" cap="none" dirty="0">
                 <a:latin typeface="Lora" pitchFamily="2" charset="0"/>
               </a:rPr>
-              <a:t>A geometric interpretation of deep learning</a:t>
-            </a:r>
+              <a:t>The nature of generalization in deep learning</a:t>
+            </a:r>
+          </a:p>
+        </p:txBody>
+      </p:sp>
+      <p:sp>
+        <p:nvSpPr>
+          <p:cNvPr id="5" name="TextBox 4">
+            <a:extLst>
+              <a:ext uri="{FF2B5EF4-FFF2-40B4-BE49-F238E27FC236}">
+                <a16:creationId xmlns:a16="http://schemas.microsoft.com/office/drawing/2014/main" id="{03DD547C-32D2-0F40-A7CA-20A0B410DACC}"/>
+              </a:ext>
+            </a:extLst>
+          </p:cNvPr>
+          <p:cNvSpPr txBox="1"/>
+          <p:nvPr/>
+        </p:nvSpPr>
+        <p:spPr>
+          <a:xfrm>
+            <a:off x="475644" y="1280775"/>
+            <a:ext cx="11218515" cy="2130263"/>
+          </a:xfrm>
+          <a:prstGeom prst="rect">
+            <a:avLst/>
+          </a:prstGeom>
+          <a:noFill/>
+        </p:spPr>
+        <p:txBody>
+          <a:bodyPr wrap="square">
+            <a:spAutoFit/>
+          </a:bodyPr>
+          <a:lstStyle/>
+          <a:p>
+            <a:pPr marL="285750" indent="-285750">
+              <a:lnSpc>
+                <a:spcPct val="150000"/>
+              </a:lnSpc>
+              <a:buFont typeface="Wingdings" panose="05000000000000000000" pitchFamily="2" charset="2"/>
+              <a:buChar char="v"/>
+            </a:pPr>
+            <a:r>
+              <a:rPr lang="ko-KR" altLang="en-US" sz="1600" dirty="0">
+                <a:latin typeface="D2Coding" panose="020B0609020101020101" pitchFamily="49" charset="-127"/>
+                <a:ea typeface="D2Coding" panose="020B0609020101020101" pitchFamily="49" charset="-127"/>
+              </a:rPr>
+              <a:t>그렇다면 </a:t>
+            </a:r>
+            <a:r>
+              <a:rPr lang="ko-KR" altLang="en-US" sz="1600" dirty="0" err="1">
+                <a:latin typeface="D2Coding" panose="020B0609020101020101" pitchFamily="49" charset="-127"/>
+                <a:ea typeface="D2Coding" panose="020B0609020101020101" pitchFamily="49" charset="-127"/>
+              </a:rPr>
+              <a:t>딥러닝이</a:t>
+            </a:r>
+            <a:r>
+              <a:rPr lang="ko-KR" altLang="en-US" sz="1600" dirty="0">
+                <a:latin typeface="D2Coding" panose="020B0609020101020101" pitchFamily="49" charset="-127"/>
+                <a:ea typeface="D2Coding" panose="020B0609020101020101" pitchFamily="49" charset="-127"/>
+              </a:rPr>
+              <a:t> 가진 기묘하고도 흥미로운 특성인 </a:t>
+            </a:r>
+            <a:r>
+              <a:rPr lang="en-US" altLang="ko-KR" sz="1600" b="1" dirty="0">
+                <a:latin typeface="D2Coding" panose="020B0609020101020101" pitchFamily="49" charset="-127"/>
+                <a:ea typeface="D2Coding" panose="020B0609020101020101" pitchFamily="49" charset="-127"/>
+              </a:rPr>
+              <a:t>'</a:t>
+            </a:r>
+            <a:r>
+              <a:rPr lang="ko-KR" altLang="en-US" sz="1600" b="1" dirty="0">
+                <a:latin typeface="D2Coding" panose="020B0609020101020101" pitchFamily="49" charset="-127"/>
+                <a:ea typeface="D2Coding" panose="020B0609020101020101" pitchFamily="49" charset="-127"/>
+              </a:rPr>
+              <a:t>무엇이든 외워버리는 능력</a:t>
+            </a:r>
+            <a:r>
+              <a:rPr lang="en-US" altLang="ko-KR" sz="1600" b="1" dirty="0">
+                <a:latin typeface="D2Coding" panose="020B0609020101020101" pitchFamily="49" charset="-127"/>
+                <a:ea typeface="D2Coding" panose="020B0609020101020101" pitchFamily="49" charset="-127"/>
+              </a:rPr>
+              <a:t>(</a:t>
+            </a:r>
+            <a:r>
+              <a:rPr lang="ko-KR" altLang="en-US" sz="1600" b="1" dirty="0">
+                <a:latin typeface="D2Coding" panose="020B0609020101020101" pitchFamily="49" charset="-127"/>
+                <a:ea typeface="D2Coding" panose="020B0609020101020101" pitchFamily="49" charset="-127"/>
+              </a:rPr>
+              <a:t>만능 암기력</a:t>
+            </a:r>
+            <a:r>
+              <a:rPr lang="en-US" altLang="ko-KR" sz="1600" b="1" dirty="0">
+                <a:latin typeface="D2Coding" panose="020B0609020101020101" pitchFamily="49" charset="-127"/>
+                <a:ea typeface="D2Coding" panose="020B0609020101020101" pitchFamily="49" charset="-127"/>
+              </a:rPr>
+              <a:t>, Memorize </a:t>
+            </a:r>
+            <a:r>
+              <a:rPr lang="en-US" altLang="ko-KR" sz="1600" b="1" dirty="0" err="1">
+                <a:latin typeface="D2Coding" panose="020B0609020101020101" pitchFamily="49" charset="-127"/>
+                <a:ea typeface="D2Coding" panose="020B0609020101020101" pitchFamily="49" charset="-127"/>
+              </a:rPr>
+              <a:t>everythings</a:t>
+            </a:r>
+            <a:r>
+              <a:rPr lang="en-US" altLang="ko-KR" sz="1600" b="1" dirty="0">
+                <a:latin typeface="D2Coding" panose="020B0609020101020101" pitchFamily="49" charset="-127"/>
+                <a:ea typeface="D2Coding" panose="020B0609020101020101" pitchFamily="49" charset="-127"/>
+              </a:rPr>
+              <a:t>)＇</a:t>
+            </a:r>
+            <a:r>
+              <a:rPr lang="ko-KR" altLang="en-US" sz="1600" b="1" dirty="0">
+                <a:latin typeface="D2Coding" panose="020B0609020101020101" pitchFamily="49" charset="-127"/>
+                <a:ea typeface="D2Coding" panose="020B0609020101020101" pitchFamily="49" charset="-127"/>
+              </a:rPr>
+              <a:t>에도 </a:t>
+            </a:r>
+            <a:r>
+              <a:rPr lang="en-US" altLang="ko-KR" sz="1600" b="1" dirty="0">
+                <a:latin typeface="D2Coding" panose="020B0609020101020101" pitchFamily="49" charset="-127"/>
+                <a:ea typeface="D2Coding" panose="020B0609020101020101" pitchFamily="49" charset="-127"/>
+              </a:rPr>
+              <a:t>'</a:t>
+            </a:r>
+            <a:r>
+              <a:rPr lang="ko-KR" altLang="en-US" sz="1600" b="1" dirty="0">
+                <a:latin typeface="D2Coding" panose="020B0609020101020101" pitchFamily="49" charset="-127"/>
+                <a:ea typeface="D2Coding" panose="020B0609020101020101" pitchFamily="49" charset="-127"/>
+              </a:rPr>
+              <a:t>왜 실전에서는 데이터를 일반화</a:t>
+            </a:r>
+            <a:r>
+              <a:rPr lang="en-US" altLang="ko-KR" sz="1600" b="1" dirty="0">
+                <a:latin typeface="D2Coding" panose="020B0609020101020101" pitchFamily="49" charset="-127"/>
+                <a:ea typeface="D2Coding" panose="020B0609020101020101" pitchFamily="49" charset="-127"/>
+              </a:rPr>
+              <a:t>(Generalization)</a:t>
+            </a:r>
+            <a:r>
+              <a:rPr lang="ko-KR" altLang="en-US" sz="1600" b="1" dirty="0">
+                <a:latin typeface="D2Coding" panose="020B0609020101020101" pitchFamily="49" charset="-127"/>
+                <a:ea typeface="D2Coding" panose="020B0609020101020101" pitchFamily="49" charset="-127"/>
+              </a:rPr>
+              <a:t>를 할 수 있을까</a:t>
+            </a:r>
+            <a:r>
+              <a:rPr lang="en-US" altLang="ko-KR" sz="1600" b="1" dirty="0">
+                <a:latin typeface="D2Coding" panose="020B0609020101020101" pitchFamily="49" charset="-127"/>
+                <a:ea typeface="D2Coding" panose="020B0609020101020101" pitchFamily="49" charset="-127"/>
+              </a:rPr>
+              <a:t>?</a:t>
+            </a:r>
+          </a:p>
+          <a:p>
+            <a:pPr>
+              <a:lnSpc>
+                <a:spcPct val="150000"/>
+              </a:lnSpc>
+            </a:pPr>
+            <a:r>
+              <a:rPr lang="en-US" altLang="ko-KR" sz="1400" dirty="0">
+                <a:latin typeface="D2Coding" panose="020B0609020101020101" pitchFamily="49" charset="-127"/>
+                <a:ea typeface="D2Coding" panose="020B0609020101020101" pitchFamily="49" charset="-127"/>
+              </a:rPr>
+              <a:t>	</a:t>
+            </a:r>
+            <a:r>
+              <a:rPr lang="en-US" altLang="ko-KR" sz="1400" dirty="0">
+                <a:latin typeface="D2Coding" panose="020B0609020101020101" pitchFamily="49" charset="-127"/>
+                <a:ea typeface="D2Coding" panose="020B0609020101020101" pitchFamily="49" charset="-127"/>
+                <a:sym typeface="Wingdings" panose="05000000000000000000" pitchFamily="2" charset="2"/>
+              </a:rPr>
+              <a:t> </a:t>
+            </a:r>
+            <a:r>
+              <a:rPr lang="ko-KR" altLang="en-US" sz="1400" dirty="0">
+                <a:latin typeface="D2Coding" panose="020B0609020101020101" pitchFamily="49" charset="-127"/>
+                <a:ea typeface="D2Coding" panose="020B0609020101020101" pitchFamily="49" charset="-127"/>
+              </a:rPr>
+              <a:t>딥러닝 모델이 똑똑해서 일반화를 하는 것이 아니라 </a:t>
+            </a:r>
+            <a:endParaRPr lang="en-US" altLang="ko-KR" sz="1400" dirty="0">
+              <a:latin typeface="D2Coding" panose="020B0609020101020101" pitchFamily="49" charset="-127"/>
+              <a:ea typeface="D2Coding" panose="020B0609020101020101" pitchFamily="49" charset="-127"/>
+            </a:endParaRPr>
+          </a:p>
+          <a:p>
+            <a:pPr>
+              <a:lnSpc>
+                <a:spcPct val="150000"/>
+              </a:lnSpc>
+            </a:pPr>
+            <a:r>
+              <a:rPr lang="en-US" altLang="ko-KR" sz="1400" dirty="0">
+                <a:latin typeface="D2Coding" panose="020B0609020101020101" pitchFamily="49" charset="-127"/>
+                <a:ea typeface="D2Coding" panose="020B0609020101020101" pitchFamily="49" charset="-127"/>
+              </a:rPr>
+              <a:t>	</a:t>
+            </a:r>
+            <a:r>
+              <a:rPr lang="en-US" altLang="ko-KR" sz="1400" dirty="0">
+                <a:latin typeface="D2Coding" panose="020B0609020101020101" pitchFamily="49" charset="-127"/>
+                <a:ea typeface="D2Coding" panose="020B0609020101020101" pitchFamily="49" charset="-127"/>
+                <a:sym typeface="Wingdings" panose="05000000000000000000" pitchFamily="2" charset="2"/>
+              </a:rPr>
+              <a:t> </a:t>
+            </a:r>
+            <a:r>
+              <a:rPr lang="ko-KR" altLang="en-US" sz="1400" dirty="0">
+                <a:latin typeface="D2Coding" panose="020B0609020101020101" pitchFamily="49" charset="-127"/>
+                <a:ea typeface="D2Coding" panose="020B0609020101020101" pitchFamily="49" charset="-127"/>
+              </a:rPr>
+              <a:t>실제로는 데이터 자체에 규칙이 있기 때문에 일반화가 가능한 것</a:t>
+            </a:r>
+            <a:endParaRPr lang="en-US" altLang="ko-KR" sz="1400" dirty="0">
+              <a:latin typeface="D2Coding" panose="020B0609020101020101" pitchFamily="49" charset="-127"/>
+              <a:ea typeface="D2Coding" panose="020B0609020101020101" pitchFamily="49" charset="-127"/>
+            </a:endParaRPr>
+          </a:p>
+          <a:p>
+            <a:pPr>
+              <a:lnSpc>
+                <a:spcPct val="150000"/>
+              </a:lnSpc>
+            </a:pPr>
+            <a:endParaRPr lang="en-US" altLang="ko-KR" sz="1400" dirty="0">
+              <a:latin typeface="D2Coding" panose="020B0609020101020101" pitchFamily="49" charset="-127"/>
+              <a:ea typeface="D2Coding" panose="020B0609020101020101" pitchFamily="49" charset="-127"/>
+            </a:endParaRPr>
+          </a:p>
+          <a:p>
+            <a:pPr marL="285750" indent="-285750">
+              <a:lnSpc>
+                <a:spcPct val="150000"/>
+              </a:lnSpc>
+              <a:buFont typeface="Wingdings" panose="05000000000000000000" pitchFamily="2" charset="2"/>
+              <a:buChar char="v"/>
+            </a:pPr>
+            <a:r>
+              <a:rPr lang="ko-KR" altLang="en-US" sz="1600" dirty="0">
+                <a:latin typeface="D2Coding" panose="020B0609020101020101" pitchFamily="49" charset="-127"/>
+                <a:ea typeface="D2Coding" panose="020B0609020101020101" pitchFamily="49" charset="-127"/>
+              </a:rPr>
+              <a:t>딥러닝 모델 일반화</a:t>
+            </a:r>
+            <a:r>
+              <a:rPr lang="en-US" altLang="ko-KR" sz="1600" dirty="0">
+                <a:latin typeface="D2Coding" panose="020B0609020101020101" pitchFamily="49" charset="-127"/>
+                <a:ea typeface="D2Coding" panose="020B0609020101020101" pitchFamily="49" charset="-127"/>
+              </a:rPr>
+              <a:t>(generalization)</a:t>
+            </a:r>
+            <a:r>
+              <a:rPr lang="ko-KR" altLang="en-US" sz="1600" dirty="0">
+                <a:latin typeface="D2Coding" panose="020B0609020101020101" pitchFamily="49" charset="-127"/>
+                <a:ea typeface="D2Coding" panose="020B0609020101020101" pitchFamily="49" charset="-127"/>
+              </a:rPr>
+              <a:t>의 핵심 원리　</a:t>
+            </a:r>
+            <a:r>
+              <a:rPr lang="ko-KR" altLang="en-US" sz="1600" dirty="0">
+                <a:latin typeface="D2Coding" panose="020B0609020101020101" pitchFamily="49" charset="-127"/>
+                <a:ea typeface="D2Coding" panose="020B0609020101020101" pitchFamily="49" charset="-127"/>
+                <a:sym typeface="Wingdings" panose="05000000000000000000" pitchFamily="2" charset="2"/>
+              </a:rPr>
+              <a:t></a:t>
+            </a:r>
+            <a:r>
+              <a:rPr lang="ko-KR" altLang="en-US" sz="1600" dirty="0">
+                <a:latin typeface="D2Coding" panose="020B0609020101020101" pitchFamily="49" charset="-127"/>
+                <a:ea typeface="D2Coding" panose="020B0609020101020101" pitchFamily="49" charset="-127"/>
+              </a:rPr>
+              <a:t>　</a:t>
+            </a:r>
+            <a:r>
+              <a:rPr lang="en-US" altLang="ko-KR" sz="1600" b="1" dirty="0">
+                <a:latin typeface="Lora" pitchFamily="2" charset="0"/>
+              </a:rPr>
+              <a:t>Manifold hypothesis</a:t>
+            </a:r>
+            <a:endParaRPr lang="ko-KR" altLang="en-US" sz="1600" dirty="0"/>
           </a:p>
         </p:txBody>
       </p:sp>
       <p:pic>
         <p:nvPicPr>
-          <p:cNvPr id="15362" name="Picture 2">
+          <p:cNvPr id="17410" name="Picture 2">
             <a:extLst>
               <a:ext uri="{FF2B5EF4-FFF2-40B4-BE49-F238E27FC236}">
-                <a16:creationId xmlns:a16="http://schemas.microsoft.com/office/drawing/2014/main" id="{7A6A21AA-3C7B-7BBE-2090-DA22F965EB48}"/>
+                <a16:creationId xmlns:a16="http://schemas.microsoft.com/office/drawing/2014/main" id="{5EA31F2B-42EA-CD76-2176-9D6877994FD0}"/>
               </a:ext>
             </a:extLst>
           </p:cNvPr>
@@ -3588,8 +4141,8 @@
         </p:blipFill>
         <p:spPr bwMode="auto">
           <a:xfrm>
-            <a:off x="1666875" y="2171700"/>
-            <a:ext cx="8858250" cy="2514600"/>
+            <a:off x="3024836" y="3641339"/>
+            <a:ext cx="3568994" cy="2632281"/>
           </a:xfrm>
           <a:prstGeom prst="rect">
             <a:avLst/>
@@ -3606,46 +4159,40 @@
           </a:extLst>
         </p:spPr>
       </p:pic>
-      <p:sp>
-        <p:nvSpPr>
-          <p:cNvPr id="22" name="TextBox 21">
+      <p:pic>
+        <p:nvPicPr>
+          <p:cNvPr id="10" name="그림 9">
             <a:extLst>
               <a:ext uri="{FF2B5EF4-FFF2-40B4-BE49-F238E27FC236}">
-                <a16:creationId xmlns:a16="http://schemas.microsoft.com/office/drawing/2014/main" id="{A4D001D8-9362-68FC-DE19-9DBC61DF92D4}"/>
+                <a16:creationId xmlns:a16="http://schemas.microsoft.com/office/drawing/2014/main" id="{F03A33BA-0C59-816C-63D9-CA3B0C18BBCE}"/>
               </a:ext>
             </a:extLst>
           </p:cNvPr>
-          <p:cNvSpPr txBox="1"/>
+          <p:cNvPicPr>
+            <a:picLocks noChangeAspect="1"/>
+          </p:cNvPicPr>
           <p:nvPr/>
-        </p:nvSpPr>
+        </p:nvPicPr>
+        <p:blipFill>
+          <a:blip r:embed="rId3"/>
+          <a:stretch>
+            <a:fillRect/>
+          </a:stretch>
+        </p:blipFill>
         <p:spPr>
           <a:xfrm>
-            <a:off x="1666875" y="4807282"/>
-            <a:ext cx="6096000" cy="369332"/>
+            <a:off x="7177729" y="3641339"/>
+            <a:ext cx="2998708" cy="2632281"/>
           </a:xfrm>
           <a:prstGeom prst="rect">
             <a:avLst/>
           </a:prstGeom>
-          <a:noFill/>
-        </p:spPr>
-        <p:txBody>
-          <a:bodyPr wrap="square">
-            <a:spAutoFit/>
-          </a:bodyPr>
-          <a:lstStyle/>
-          <a:p>
-            <a:r>
-              <a:rPr lang="en-US" altLang="ko-KR" dirty="0"/>
-              <a:t>Uncrumpling a complicated manifold of data</a:t>
-            </a:r>
-            <a:endParaRPr lang="ko-KR" altLang="en-US" dirty="0"/>
-          </a:p>
-        </p:txBody>
-      </p:sp>
+        </p:spPr>
+      </p:pic>
     </p:spTree>
     <p:extLst>
       <p:ext uri="{BB962C8B-B14F-4D97-AF65-F5344CB8AC3E}">
-        <p14:creationId xmlns:p14="http://schemas.microsoft.com/office/powerpoint/2010/main" val="3743836085"/>
+        <p14:creationId xmlns:p14="http://schemas.microsoft.com/office/powerpoint/2010/main" val="2088224966"/>
       </p:ext>
     </p:extLst>
   </p:cSld>
@@ -3656,6 +4203,828 @@
 </file>
 
 <file path=ppt/slides/slide12.xml><?xml version="1.0" encoding="utf-8"?>
+<p:sld xmlns:a="http://schemas.openxmlformats.org/drawingml/2006/main" xmlns:r="http://schemas.openxmlformats.org/officeDocument/2006/relationships" xmlns:p="http://schemas.openxmlformats.org/presentationml/2006/main">
+  <p:cSld>
+    <p:spTree>
+      <p:nvGrpSpPr>
+        <p:cNvPr id="1" name="">
+          <a:extLst>
+            <a:ext uri="{FF2B5EF4-FFF2-40B4-BE49-F238E27FC236}">
+              <a16:creationId xmlns:a16="http://schemas.microsoft.com/office/drawing/2014/main" id="{289BD5F5-C4AF-0739-24BA-C8F1D4C4AFE9}"/>
+            </a:ext>
+          </a:extLst>
+        </p:cNvPr>
+        <p:cNvGrpSpPr/>
+        <p:nvPr/>
+      </p:nvGrpSpPr>
+      <p:grpSpPr>
+        <a:xfrm>
+          <a:off x="0" y="0"/>
+          <a:ext cx="0" cy="0"/>
+          <a:chOff x="0" y="0"/>
+          <a:chExt cx="0" cy="0"/>
+        </a:xfrm>
+      </p:grpSpPr>
+      <p:sp>
+        <p:nvSpPr>
+          <p:cNvPr id="4" name="슬라이드 번호 개체 틀 3">
+            <a:extLst>
+              <a:ext uri="{FF2B5EF4-FFF2-40B4-BE49-F238E27FC236}">
+                <a16:creationId xmlns:a16="http://schemas.microsoft.com/office/drawing/2014/main" id="{77C5A695-564F-1896-5C51-012FD575E329}"/>
+              </a:ext>
+            </a:extLst>
+          </p:cNvPr>
+          <p:cNvSpPr>
+            <a:spLocks noGrp="1"/>
+          </p:cNvSpPr>
+          <p:nvPr>
+            <p:ph type="sldNum" sz="quarter" idx="12"/>
+          </p:nvPr>
+        </p:nvSpPr>
+        <p:spPr>
+          <a:xfrm>
+            <a:off x="10514011" y="6036261"/>
+            <a:ext cx="753545" cy="365125"/>
+          </a:xfrm>
+        </p:spPr>
+        <p:txBody>
+          <a:bodyPr/>
+          <a:lstStyle/>
+          <a:p>
+            <a:fld id="{D57F1E4F-1CFF-5643-939E-217C01CDF565}" type="slidenum">
+              <a:rPr lang="en-US" smtClean="0"/>
+              <a:pPr/>
+              <a:t>12</a:t>
+            </a:fld>
+            <a:endParaRPr lang="en-US" dirty="0"/>
+          </a:p>
+        </p:txBody>
+      </p:sp>
+      <p:sp>
+        <p:nvSpPr>
+          <p:cNvPr id="3" name="제목 1">
+            <a:extLst>
+              <a:ext uri="{FF2B5EF4-FFF2-40B4-BE49-F238E27FC236}">
+                <a16:creationId xmlns:a16="http://schemas.microsoft.com/office/drawing/2014/main" id="{2001CBBD-742B-8439-582B-25A1E68B9FAA}"/>
+              </a:ext>
+            </a:extLst>
+          </p:cNvPr>
+          <p:cNvSpPr txBox="1">
+            <a:spLocks/>
+          </p:cNvSpPr>
+          <p:nvPr/>
+        </p:nvSpPr>
+        <p:spPr>
+          <a:xfrm>
+            <a:off x="475645" y="481983"/>
+            <a:ext cx="10353762" cy="766439"/>
+          </a:xfrm>
+          <a:prstGeom prst="rect">
+            <a:avLst/>
+          </a:prstGeom>
+        </p:spPr>
+        <p:txBody>
+          <a:bodyPr vert="horz" lIns="91440" tIns="45720" rIns="91440" bIns="45720" rtlCol="0" anchor="ctr">
+            <a:normAutofit/>
+          </a:bodyPr>
+          <a:lstStyle>
+            <a:lvl1pPr algn="ctr" defTabSz="914400" rtl="0" eaLnBrk="1" latinLnBrk="1" hangingPunct="1">
+              <a:lnSpc>
+                <a:spcPct val="90000"/>
+              </a:lnSpc>
+              <a:spcBef>
+                <a:spcPct val="0"/>
+              </a:spcBef>
+              <a:buNone/>
+              <a:defRPr sz="3200" kern="1200" cap="all" baseline="0">
+                <a:solidFill>
+                  <a:schemeClr val="tx1"/>
+                </a:solidFill>
+                <a:effectLst/>
+                <a:latin typeface="Batang" panose="02030600000101010101" pitchFamily="18" charset="-127"/>
+                <a:ea typeface="Batang" panose="02030600000101010101" pitchFamily="18" charset="-127"/>
+                <a:cs typeface="+mj-cs"/>
+              </a:defRPr>
+            </a:lvl1pPr>
+          </a:lstStyle>
+          <a:p>
+            <a:pPr algn="l"/>
+            <a:r>
+              <a:rPr lang="en-US" altLang="ko-KR" sz="2900" b="1" cap="none" dirty="0">
+                <a:latin typeface="Lora" pitchFamily="2" charset="0"/>
+              </a:rPr>
+              <a:t>Manifold</a:t>
+            </a:r>
+          </a:p>
+        </p:txBody>
+      </p:sp>
+      <p:sp>
+        <p:nvSpPr>
+          <p:cNvPr id="6" name="TextBox 5">
+            <a:extLst>
+              <a:ext uri="{FF2B5EF4-FFF2-40B4-BE49-F238E27FC236}">
+                <a16:creationId xmlns:a16="http://schemas.microsoft.com/office/drawing/2014/main" id="{201C9B22-1A95-035A-0631-7E94024D966B}"/>
+              </a:ext>
+            </a:extLst>
+          </p:cNvPr>
+          <p:cNvSpPr txBox="1"/>
+          <p:nvPr/>
+        </p:nvSpPr>
+        <p:spPr>
+          <a:xfrm>
+            <a:off x="599470" y="1238161"/>
+            <a:ext cx="11135330" cy="1296317"/>
+          </a:xfrm>
+          <a:prstGeom prst="rect">
+            <a:avLst/>
+          </a:prstGeom>
+          <a:noFill/>
+        </p:spPr>
+        <p:txBody>
+          <a:bodyPr wrap="square">
+            <a:spAutoFit/>
+          </a:bodyPr>
+          <a:lstStyle/>
+          <a:p>
+            <a:pPr>
+              <a:lnSpc>
+                <a:spcPct val="150000"/>
+              </a:lnSpc>
+            </a:pPr>
+            <a:r>
+              <a:rPr lang="ko-KR" altLang="en-US" dirty="0">
+                <a:latin typeface="D2Coding" panose="020B0609020101020101" pitchFamily="49" charset="-127"/>
+                <a:ea typeface="D2Coding" panose="020B0609020101020101" pitchFamily="49" charset="-127"/>
+              </a:rPr>
+              <a:t>아래 그림처럼 종이 한 장을 떠올려 보세요</a:t>
+            </a:r>
+            <a:r>
+              <a:rPr lang="en-US" altLang="ko-KR" dirty="0">
+                <a:latin typeface="D2Coding" panose="020B0609020101020101" pitchFamily="49" charset="-127"/>
+                <a:ea typeface="D2Coding" panose="020B0609020101020101" pitchFamily="49" charset="-127"/>
+              </a:rPr>
+              <a:t>.</a:t>
+            </a:r>
+            <a:r>
+              <a:rPr lang="ko-KR" altLang="en-US" dirty="0">
+                <a:latin typeface="D2Coding" panose="020B0609020101020101" pitchFamily="49" charset="-127"/>
+                <a:ea typeface="D2Coding" panose="020B0609020101020101" pitchFamily="49" charset="-127"/>
+              </a:rPr>
+              <a:t> 종이는 우리가 살아가는 </a:t>
+            </a:r>
+            <a:r>
+              <a:rPr lang="en-US" altLang="ko-KR" dirty="0">
+                <a:latin typeface="D2Coding" panose="020B0609020101020101" pitchFamily="49" charset="-127"/>
+                <a:ea typeface="D2Coding" panose="020B0609020101020101" pitchFamily="49" charset="-127"/>
+              </a:rPr>
+              <a:t>3</a:t>
+            </a:r>
+            <a:r>
+              <a:rPr lang="ko-KR" altLang="en-US" dirty="0">
+                <a:latin typeface="D2Coding" panose="020B0609020101020101" pitchFamily="49" charset="-127"/>
+                <a:ea typeface="D2Coding" panose="020B0609020101020101" pitchFamily="49" charset="-127"/>
+              </a:rPr>
+              <a:t>차원 공간 속에 존재하는 </a:t>
+            </a:r>
+            <a:r>
+              <a:rPr lang="en-US" altLang="ko-KR" dirty="0">
+                <a:latin typeface="D2Coding" panose="020B0609020101020101" pitchFamily="49" charset="-127"/>
+                <a:ea typeface="D2Coding" panose="020B0609020101020101" pitchFamily="49" charset="-127"/>
+              </a:rPr>
+              <a:t>2</a:t>
+            </a:r>
+            <a:r>
+              <a:rPr lang="ko-KR" altLang="en-US" dirty="0">
+                <a:latin typeface="D2Coding" panose="020B0609020101020101" pitchFamily="49" charset="-127"/>
+                <a:ea typeface="D2Coding" panose="020B0609020101020101" pitchFamily="49" charset="-127"/>
+              </a:rPr>
+              <a:t>차원 물체로</a:t>
+            </a:r>
+            <a:r>
+              <a:rPr lang="en-US" altLang="ko-KR" dirty="0">
+                <a:latin typeface="D2Coding" panose="020B0609020101020101" pitchFamily="49" charset="-127"/>
+                <a:ea typeface="D2Coding" panose="020B0609020101020101" pitchFamily="49" charset="-127"/>
+              </a:rPr>
+              <a:t> </a:t>
+            </a:r>
+            <a:r>
+              <a:rPr lang="ko-KR" altLang="en-US" dirty="0">
+                <a:latin typeface="D2Coding" panose="020B0609020101020101" pitchFamily="49" charset="-127"/>
+                <a:ea typeface="D2Coding" panose="020B0609020101020101" pitchFamily="49" charset="-127"/>
+              </a:rPr>
+              <a:t>구부리거나 말거나</a:t>
+            </a:r>
+            <a:r>
+              <a:rPr lang="en-US" altLang="ko-KR" dirty="0">
+                <a:latin typeface="D2Coding" panose="020B0609020101020101" pitchFamily="49" charset="-127"/>
+                <a:ea typeface="D2Coding" panose="020B0609020101020101" pitchFamily="49" charset="-127"/>
+              </a:rPr>
+              <a:t> </a:t>
+            </a:r>
+            <a:r>
+              <a:rPr lang="ko-KR" altLang="en-US" dirty="0">
+                <a:latin typeface="D2Coding" panose="020B0609020101020101" pitchFamily="49" charset="-127"/>
+                <a:ea typeface="D2Coding" panose="020B0609020101020101" pitchFamily="49" charset="-127"/>
+              </a:rPr>
+              <a:t>구길수 있지만</a:t>
+            </a:r>
+            <a:r>
+              <a:rPr lang="en-US" altLang="ko-KR" dirty="0">
+                <a:latin typeface="D2Coding" panose="020B0609020101020101" pitchFamily="49" charset="-127"/>
+                <a:ea typeface="D2Coding" panose="020B0609020101020101" pitchFamily="49" charset="-127"/>
+              </a:rPr>
+              <a:t>, </a:t>
+            </a:r>
+            <a:r>
+              <a:rPr lang="ko-KR" altLang="en-US" dirty="0">
+                <a:latin typeface="D2Coding" panose="020B0609020101020101" pitchFamily="49" charset="-127"/>
+                <a:ea typeface="D2Coding" panose="020B0609020101020101" pitchFamily="49" charset="-127"/>
+              </a:rPr>
+              <a:t>이러한 변형은 종이 자체의 </a:t>
+            </a:r>
+            <a:r>
+              <a:rPr lang="en-US" altLang="ko-KR" dirty="0">
+                <a:latin typeface="D2Coding" panose="020B0609020101020101" pitchFamily="49" charset="-127"/>
+                <a:ea typeface="D2Coding" panose="020B0609020101020101" pitchFamily="49" charset="-127"/>
+              </a:rPr>
+              <a:t>2</a:t>
+            </a:r>
+            <a:r>
+              <a:rPr lang="ko-KR" altLang="en-US" dirty="0">
+                <a:latin typeface="D2Coding" panose="020B0609020101020101" pitchFamily="49" charset="-127"/>
+                <a:ea typeface="D2Coding" panose="020B0609020101020101" pitchFamily="49" charset="-127"/>
+              </a:rPr>
+              <a:t>차원</a:t>
+            </a:r>
+            <a:r>
+              <a:rPr lang="en-US" altLang="ko-KR" dirty="0">
+                <a:latin typeface="D2Coding" panose="020B0609020101020101" pitchFamily="49" charset="-127"/>
+                <a:ea typeface="D2Coding" panose="020B0609020101020101" pitchFamily="49" charset="-127"/>
+              </a:rPr>
+              <a:t>(Intrinsic 2 dimension)</a:t>
+            </a:r>
+            <a:r>
+              <a:rPr lang="ko-KR" altLang="en-US" dirty="0">
+                <a:latin typeface="D2Coding" panose="020B0609020101020101" pitchFamily="49" charset="-127"/>
+                <a:ea typeface="D2Coding" panose="020B0609020101020101" pitchFamily="49" charset="-127"/>
+              </a:rPr>
+              <a:t> 구조 안에서 일어납니다</a:t>
+            </a:r>
+            <a:r>
+              <a:rPr lang="en-US" altLang="ko-KR" dirty="0">
+                <a:latin typeface="D2Coding" panose="020B0609020101020101" pitchFamily="49" charset="-127"/>
+                <a:ea typeface="D2Coding" panose="020B0609020101020101" pitchFamily="49" charset="-127"/>
+              </a:rPr>
+              <a:t>. </a:t>
+            </a:r>
+            <a:r>
+              <a:rPr lang="ko-KR" altLang="en-US" b="1" dirty="0">
+                <a:latin typeface="D2Coding" panose="020B0609020101020101" pitchFamily="49" charset="-127"/>
+                <a:ea typeface="D2Coding" panose="020B0609020101020101" pitchFamily="49" charset="-127"/>
+              </a:rPr>
+              <a:t>이 종이가 </a:t>
+            </a:r>
+            <a:r>
+              <a:rPr lang="en-US" altLang="ko-KR" b="1" dirty="0">
+                <a:latin typeface="D2Coding" panose="020B0609020101020101" pitchFamily="49" charset="-127"/>
+                <a:ea typeface="D2Coding" panose="020B0609020101020101" pitchFamily="49" charset="-127"/>
+              </a:rPr>
+              <a:t>3</a:t>
+            </a:r>
+            <a:r>
+              <a:rPr lang="ko-KR" altLang="en-US" b="1" dirty="0">
+                <a:latin typeface="D2Coding" panose="020B0609020101020101" pitchFamily="49" charset="-127"/>
+                <a:ea typeface="D2Coding" panose="020B0609020101020101" pitchFamily="49" charset="-127"/>
+              </a:rPr>
+              <a:t>차원 공간에 </a:t>
+            </a:r>
+            <a:r>
+              <a:rPr lang="ko-KR" altLang="en-US" b="1" dirty="0" err="1">
+                <a:latin typeface="D2Coding" panose="020B0609020101020101" pitchFamily="49" charset="-127"/>
+                <a:ea typeface="D2Coding" panose="020B0609020101020101" pitchFamily="49" charset="-127"/>
+              </a:rPr>
+              <a:t>임베딩</a:t>
+            </a:r>
+            <a:r>
+              <a:rPr lang="en-US" altLang="ko-KR" b="1" dirty="0">
+                <a:latin typeface="D2Coding" panose="020B0609020101020101" pitchFamily="49" charset="-127"/>
+                <a:ea typeface="D2Coding" panose="020B0609020101020101" pitchFamily="49" charset="-127"/>
+              </a:rPr>
+              <a:t>(embedded)</a:t>
+            </a:r>
+            <a:r>
+              <a:rPr lang="ko-KR" altLang="en-US" b="1" dirty="0">
+                <a:latin typeface="D2Coding" panose="020B0609020101020101" pitchFamily="49" charset="-127"/>
+                <a:ea typeface="D2Coding" panose="020B0609020101020101" pitchFamily="49" charset="-127"/>
+              </a:rPr>
+              <a:t>된 </a:t>
+            </a:r>
+            <a:r>
+              <a:rPr lang="en-US" altLang="ko-KR" b="1" dirty="0">
+                <a:latin typeface="D2Coding" panose="020B0609020101020101" pitchFamily="49" charset="-127"/>
+                <a:ea typeface="D2Coding" panose="020B0609020101020101" pitchFamily="49" charset="-127"/>
+              </a:rPr>
+              <a:t>2</a:t>
+            </a:r>
+            <a:r>
+              <a:rPr lang="ko-KR" altLang="en-US" b="1" dirty="0">
+                <a:latin typeface="D2Coding" panose="020B0609020101020101" pitchFamily="49" charset="-127"/>
+                <a:ea typeface="D2Coding" panose="020B0609020101020101" pitchFamily="49" charset="-127"/>
+              </a:rPr>
+              <a:t>차원 </a:t>
+            </a:r>
+            <a:r>
+              <a:rPr lang="ko-KR" altLang="en-US" b="1" dirty="0" err="1">
+                <a:latin typeface="D2Coding" panose="020B0609020101020101" pitchFamily="49" charset="-127"/>
+                <a:ea typeface="D2Coding" panose="020B0609020101020101" pitchFamily="49" charset="-127"/>
+              </a:rPr>
+              <a:t>매니폴드</a:t>
+            </a:r>
+            <a:r>
+              <a:rPr lang="en-US" altLang="ko-KR" b="1" dirty="0">
+                <a:latin typeface="D2Coding" panose="020B0609020101020101" pitchFamily="49" charset="-127"/>
+                <a:ea typeface="D2Coding" panose="020B0609020101020101" pitchFamily="49" charset="-127"/>
+              </a:rPr>
+              <a:t>(manifold)</a:t>
+            </a:r>
+            <a:endParaRPr lang="ko-KR" altLang="en-US" b="1" dirty="0">
+              <a:latin typeface="D2Coding" panose="020B0609020101020101" pitchFamily="49" charset="-127"/>
+              <a:ea typeface="D2Coding" panose="020B0609020101020101" pitchFamily="49" charset="-127"/>
+            </a:endParaRPr>
+          </a:p>
+        </p:txBody>
+      </p:sp>
+      <p:pic>
+        <p:nvPicPr>
+          <p:cNvPr id="9220" name="Picture 4" descr="3d 렌더링, 빈 페이지가 있는 추상 배경, 모서리가 말린 백서, 스크롤된 문서, 비즈니스 템플릿">
+            <a:extLst>
+              <a:ext uri="{FF2B5EF4-FFF2-40B4-BE49-F238E27FC236}">
+                <a16:creationId xmlns:a16="http://schemas.microsoft.com/office/drawing/2014/main" id="{0091CADD-5F60-3E66-4507-BCB3669910C2}"/>
+              </a:ext>
+            </a:extLst>
+          </p:cNvPr>
+          <p:cNvPicPr>
+            <a:picLocks noChangeAspect="1" noChangeArrowheads="1"/>
+          </p:cNvPicPr>
+          <p:nvPr/>
+        </p:nvPicPr>
+        <p:blipFill>
+          <a:blip r:embed="rId2">
+            <a:extLst>
+              <a:ext uri="{28A0092B-C50C-407E-A947-70E740481C1C}">
+                <a14:useLocalDpi xmlns:a14="http://schemas.microsoft.com/office/drawing/2010/main" val="0"/>
+              </a:ext>
+            </a:extLst>
+          </a:blip>
+          <a:srcRect/>
+          <a:stretch>
+            <a:fillRect/>
+          </a:stretch>
+        </p:blipFill>
+        <p:spPr bwMode="auto">
+          <a:xfrm>
+            <a:off x="714895" y="3017707"/>
+            <a:ext cx="4828656" cy="2716826"/>
+          </a:xfrm>
+          <a:prstGeom prst="rect">
+            <a:avLst/>
+          </a:prstGeom>
+          <a:noFill/>
+          <a:extLst>
+            <a:ext uri="{909E8E84-426E-40DD-AFC4-6F175D3DCCD1}">
+              <a14:hiddenFill xmlns:a14="http://schemas.microsoft.com/office/drawing/2010/main">
+                <a:solidFill>
+                  <a:srgbClr val="FFFFFF"/>
+                </a:solidFill>
+              </a14:hiddenFill>
+            </a:ext>
+          </a:extLst>
+        </p:spPr>
+      </p:pic>
+      <p:sp>
+        <p:nvSpPr>
+          <p:cNvPr id="8" name="TextBox 7">
+            <a:extLst>
+              <a:ext uri="{FF2B5EF4-FFF2-40B4-BE49-F238E27FC236}">
+                <a16:creationId xmlns:a16="http://schemas.microsoft.com/office/drawing/2014/main" id="{06FC1E48-A3C7-643D-42AF-6CB23B585005}"/>
+              </a:ext>
+            </a:extLst>
+          </p:cNvPr>
+          <p:cNvSpPr txBox="1"/>
+          <p:nvPr/>
+        </p:nvSpPr>
+        <p:spPr>
+          <a:xfrm>
+            <a:off x="5790680" y="3017707"/>
+            <a:ext cx="5944120" cy="2752357"/>
+          </a:xfrm>
+          <a:prstGeom prst="rect">
+            <a:avLst/>
+          </a:prstGeom>
+          <a:noFill/>
+        </p:spPr>
+        <p:txBody>
+          <a:bodyPr wrap="square">
+            <a:spAutoFit/>
+          </a:bodyPr>
+          <a:lstStyle/>
+          <a:p>
+            <a:pPr marL="285750" indent="-285750">
+              <a:buFont typeface="Wingdings" panose="05000000000000000000" pitchFamily="2" charset="2"/>
+              <a:buChar char="§"/>
+            </a:pPr>
+            <a:r>
+              <a:rPr lang="ko-KR" altLang="en-US" sz="1400" dirty="0">
+                <a:latin typeface="D2Coding" panose="020B0609020101020101" pitchFamily="49" charset="-127"/>
+                <a:ea typeface="D2Coding" panose="020B0609020101020101" pitchFamily="49" charset="-127"/>
+              </a:rPr>
+              <a:t>외재 차원</a:t>
+            </a:r>
+            <a:r>
+              <a:rPr lang="en-US" altLang="ko-KR" sz="1400" dirty="0">
+                <a:latin typeface="D2Coding" panose="020B0609020101020101" pitchFamily="49" charset="-127"/>
+                <a:ea typeface="D2Coding" panose="020B0609020101020101" pitchFamily="49" charset="-127"/>
+              </a:rPr>
+              <a:t>(Extrinsic Dimension): </a:t>
+            </a:r>
+            <a:r>
+              <a:rPr lang="ko-KR" altLang="en-US" sz="1400" dirty="0">
+                <a:latin typeface="D2Coding" panose="020B0609020101020101" pitchFamily="49" charset="-127"/>
+                <a:ea typeface="D2Coding" panose="020B0609020101020101" pitchFamily="49" charset="-127"/>
+              </a:rPr>
+              <a:t>종이가 존재하는 공간 </a:t>
+            </a:r>
+            <a:r>
+              <a:rPr lang="en-US" altLang="ko-KR" sz="1400" dirty="0">
+                <a:latin typeface="D2Coding" panose="020B0609020101020101" pitchFamily="49" charset="-127"/>
+                <a:ea typeface="D2Coding" panose="020B0609020101020101" pitchFamily="49" charset="-127"/>
+              </a:rPr>
+              <a:t>3</a:t>
+            </a:r>
+            <a:r>
+              <a:rPr lang="ko-KR" altLang="en-US" sz="1400" dirty="0">
+                <a:latin typeface="D2Coding" panose="020B0609020101020101" pitchFamily="49" charset="-127"/>
+                <a:ea typeface="D2Coding" panose="020B0609020101020101" pitchFamily="49" charset="-127"/>
+              </a:rPr>
+              <a:t>차원</a:t>
+            </a:r>
+          </a:p>
+          <a:p>
+            <a:pPr marL="285750" indent="-285750">
+              <a:buFont typeface="Wingdings" panose="05000000000000000000" pitchFamily="2" charset="2"/>
+              <a:buChar char="§"/>
+            </a:pPr>
+            <a:r>
+              <a:rPr lang="ko-KR" altLang="en-US" sz="1400" dirty="0">
+                <a:latin typeface="D2Coding" panose="020B0609020101020101" pitchFamily="49" charset="-127"/>
+                <a:ea typeface="D2Coding" panose="020B0609020101020101" pitchFamily="49" charset="-127"/>
+              </a:rPr>
+              <a:t>내재 차원</a:t>
+            </a:r>
+            <a:r>
+              <a:rPr lang="en-US" altLang="ko-KR" sz="1400" dirty="0">
+                <a:latin typeface="D2Coding" panose="020B0609020101020101" pitchFamily="49" charset="-127"/>
+                <a:ea typeface="D2Coding" panose="020B0609020101020101" pitchFamily="49" charset="-127"/>
+              </a:rPr>
+              <a:t>(Intrinsic Dimension): </a:t>
+            </a:r>
+            <a:r>
+              <a:rPr lang="ko-KR" altLang="en-US" sz="1400" dirty="0">
+                <a:latin typeface="D2Coding" panose="020B0609020101020101" pitchFamily="49" charset="-127"/>
+                <a:ea typeface="D2Coding" panose="020B0609020101020101" pitchFamily="49" charset="-127"/>
+              </a:rPr>
+              <a:t>종이 자체의 </a:t>
+            </a:r>
+            <a:r>
+              <a:rPr lang="en-US" altLang="ko-KR" sz="1400" dirty="0">
+                <a:latin typeface="D2Coding" panose="020B0609020101020101" pitchFamily="49" charset="-127"/>
+                <a:ea typeface="D2Coding" panose="020B0609020101020101" pitchFamily="49" charset="-127"/>
+              </a:rPr>
+              <a:t>2</a:t>
+            </a:r>
+            <a:r>
+              <a:rPr lang="ko-KR" altLang="en-US" sz="1400" dirty="0">
+                <a:latin typeface="D2Coding" panose="020B0609020101020101" pitchFamily="49" charset="-127"/>
+                <a:ea typeface="D2Coding" panose="020B0609020101020101" pitchFamily="49" charset="-127"/>
+              </a:rPr>
+              <a:t>차원 </a:t>
+            </a:r>
+          </a:p>
+          <a:p>
+            <a:pPr marL="285750" indent="-285750">
+              <a:buFont typeface="Wingdings" panose="05000000000000000000" pitchFamily="2" charset="2"/>
+              <a:buChar char="§"/>
+            </a:pPr>
+            <a:r>
+              <a:rPr lang="ko-KR" altLang="en-US" sz="1400" dirty="0" err="1">
+                <a:latin typeface="D2Coding" panose="020B0609020101020101" pitchFamily="49" charset="-127"/>
+                <a:ea typeface="D2Coding" panose="020B0609020101020101" pitchFamily="49" charset="-127"/>
+              </a:rPr>
+              <a:t>임베딩</a:t>
+            </a:r>
+            <a:r>
+              <a:rPr lang="en-US" altLang="ko-KR" sz="1400" dirty="0">
+                <a:latin typeface="D2Coding" panose="020B0609020101020101" pitchFamily="49" charset="-127"/>
+                <a:ea typeface="D2Coding" panose="020B0609020101020101" pitchFamily="49" charset="-127"/>
+              </a:rPr>
+              <a:t>(Embedding): </a:t>
+            </a:r>
+            <a:r>
+              <a:rPr lang="ko-KR" altLang="en-US" sz="1400" dirty="0">
+                <a:latin typeface="D2Coding" panose="020B0609020101020101" pitchFamily="49" charset="-127"/>
+                <a:ea typeface="D2Coding" panose="020B0609020101020101" pitchFamily="49" charset="-127"/>
+              </a:rPr>
+              <a:t>낮은 차원의 구조</a:t>
+            </a:r>
+            <a:r>
+              <a:rPr lang="en-US" altLang="ko-KR" sz="1400" dirty="0">
+                <a:latin typeface="D2Coding" panose="020B0609020101020101" pitchFamily="49" charset="-127"/>
+                <a:ea typeface="D2Coding" panose="020B0609020101020101" pitchFamily="49" charset="-127"/>
+              </a:rPr>
+              <a:t>(</a:t>
+            </a:r>
+            <a:r>
+              <a:rPr lang="ko-KR" altLang="en-US" sz="1400" dirty="0">
+                <a:latin typeface="D2Coding" panose="020B0609020101020101" pitchFamily="49" charset="-127"/>
+                <a:ea typeface="D2Coding" panose="020B0609020101020101" pitchFamily="49" charset="-127"/>
+              </a:rPr>
+              <a:t>종이</a:t>
+            </a:r>
+            <a:r>
+              <a:rPr lang="en-US" altLang="ko-KR" sz="1400" dirty="0">
+                <a:latin typeface="D2Coding" panose="020B0609020101020101" pitchFamily="49" charset="-127"/>
+                <a:ea typeface="D2Coding" panose="020B0609020101020101" pitchFamily="49" charset="-127"/>
+              </a:rPr>
+              <a:t>)</a:t>
+            </a:r>
+            <a:r>
+              <a:rPr lang="ko-KR" altLang="en-US" sz="1400" dirty="0">
+                <a:latin typeface="D2Coding" panose="020B0609020101020101" pitchFamily="49" charset="-127"/>
+                <a:ea typeface="D2Coding" panose="020B0609020101020101" pitchFamily="49" charset="-127"/>
+              </a:rPr>
+              <a:t>가 더 높은 차원의 공간</a:t>
+            </a:r>
+            <a:r>
+              <a:rPr lang="en-US" altLang="ko-KR" sz="1400" dirty="0">
+                <a:latin typeface="D2Coding" panose="020B0609020101020101" pitchFamily="49" charset="-127"/>
+                <a:ea typeface="D2Coding" panose="020B0609020101020101" pitchFamily="49" charset="-127"/>
+              </a:rPr>
+              <a:t>(3</a:t>
+            </a:r>
+            <a:r>
+              <a:rPr lang="ko-KR" altLang="en-US" sz="1400" dirty="0">
+                <a:latin typeface="D2Coding" panose="020B0609020101020101" pitchFamily="49" charset="-127"/>
+                <a:ea typeface="D2Coding" panose="020B0609020101020101" pitchFamily="49" charset="-127"/>
+              </a:rPr>
+              <a:t>차원</a:t>
+            </a:r>
+            <a:r>
+              <a:rPr lang="en-US" altLang="ko-KR" sz="1400" dirty="0">
+                <a:latin typeface="D2Coding" panose="020B0609020101020101" pitchFamily="49" charset="-127"/>
+                <a:ea typeface="D2Coding" panose="020B0609020101020101" pitchFamily="49" charset="-127"/>
+              </a:rPr>
+              <a:t>)</a:t>
+            </a:r>
+            <a:r>
+              <a:rPr lang="ko-KR" altLang="en-US" sz="1400" dirty="0">
+                <a:latin typeface="D2Coding" panose="020B0609020101020101" pitchFamily="49" charset="-127"/>
+                <a:ea typeface="D2Coding" panose="020B0609020101020101" pitchFamily="49" charset="-127"/>
+              </a:rPr>
+              <a:t>에 놓여 있음</a:t>
+            </a:r>
+            <a:r>
+              <a:rPr lang="en-US" altLang="ko-KR" sz="1400" dirty="0">
+                <a:latin typeface="D2Coding" panose="020B0609020101020101" pitchFamily="49" charset="-127"/>
+                <a:ea typeface="D2Coding" panose="020B0609020101020101" pitchFamily="49" charset="-127"/>
+              </a:rPr>
+              <a:t>(Embedded)</a:t>
+            </a:r>
+            <a:endParaRPr lang="ko-KR" altLang="en-US" sz="1400" dirty="0">
+              <a:latin typeface="D2Coding" panose="020B0609020101020101" pitchFamily="49" charset="-127"/>
+              <a:ea typeface="D2Coding" panose="020B0609020101020101" pitchFamily="49" charset="-127"/>
+            </a:endParaRPr>
+          </a:p>
+          <a:p>
+            <a:pPr marL="285750" indent="-285750">
+              <a:buFont typeface="Wingdings" panose="05000000000000000000" pitchFamily="2" charset="2"/>
+              <a:buChar char="§"/>
+            </a:pPr>
+            <a:r>
+              <a:rPr lang="ko-KR" altLang="en-US" sz="1400" dirty="0" err="1">
+                <a:latin typeface="D2Coding" panose="020B0609020101020101" pitchFamily="49" charset="-127"/>
+                <a:ea typeface="D2Coding" panose="020B0609020101020101" pitchFamily="49" charset="-127"/>
+              </a:rPr>
+              <a:t>매니폴드</a:t>
+            </a:r>
+            <a:r>
+              <a:rPr lang="en-US" altLang="ko-KR" sz="1400" dirty="0">
+                <a:latin typeface="D2Coding" panose="020B0609020101020101" pitchFamily="49" charset="-127"/>
+                <a:ea typeface="D2Coding" panose="020B0609020101020101" pitchFamily="49" charset="-127"/>
+              </a:rPr>
+              <a:t>(Manifold): </a:t>
+            </a:r>
+            <a:r>
+              <a:rPr lang="ko-KR" altLang="en-US" sz="1400" dirty="0">
+                <a:latin typeface="D2Coding" panose="020B0609020101020101" pitchFamily="49" charset="-127"/>
+                <a:ea typeface="D2Coding" panose="020B0609020101020101" pitchFamily="49" charset="-127"/>
+              </a:rPr>
+              <a:t>작은 영역에서는 평평한 공간</a:t>
+            </a:r>
+            <a:r>
+              <a:rPr lang="en-US" altLang="ko-KR" sz="1400" dirty="0">
+                <a:latin typeface="D2Coding" panose="020B0609020101020101" pitchFamily="49" charset="-127"/>
+                <a:ea typeface="D2Coding" panose="020B0609020101020101" pitchFamily="49" charset="-127"/>
+              </a:rPr>
+              <a:t>(</a:t>
+            </a:r>
+            <a:r>
+              <a:rPr lang="ko-KR" altLang="en-US" sz="1400" dirty="0">
+                <a:latin typeface="D2Coding" panose="020B0609020101020101" pitchFamily="49" charset="-127"/>
+                <a:ea typeface="D2Coding" panose="020B0609020101020101" pitchFamily="49" charset="-127"/>
+              </a:rPr>
+              <a:t>유클리드 공간</a:t>
+            </a:r>
+            <a:r>
+              <a:rPr lang="en-US" altLang="ko-KR" sz="1400" dirty="0">
+                <a:latin typeface="D2Coding" panose="020B0609020101020101" pitchFamily="49" charset="-127"/>
+                <a:ea typeface="D2Coding" panose="020B0609020101020101" pitchFamily="49" charset="-127"/>
+              </a:rPr>
+              <a:t>, Locally</a:t>
+            </a:r>
+            <a:r>
+              <a:rPr lang="ko-KR" altLang="en-US" sz="1400" dirty="0">
+                <a:latin typeface="D2Coding" panose="020B0609020101020101" pitchFamily="49" charset="-127"/>
+                <a:ea typeface="D2Coding" panose="020B0609020101020101" pitchFamily="49" charset="-127"/>
+              </a:rPr>
+              <a:t> </a:t>
+            </a:r>
+            <a:r>
+              <a:rPr lang="en-US" altLang="ko-KR" sz="1400" dirty="0">
+                <a:latin typeface="D2Coding" panose="020B0609020101020101" pitchFamily="49" charset="-127"/>
+                <a:ea typeface="D2Coding" panose="020B0609020101020101" pitchFamily="49" charset="-127"/>
+              </a:rPr>
+              <a:t>Linear)</a:t>
+            </a:r>
+            <a:r>
+              <a:rPr lang="ko-KR" altLang="en-US" sz="1400" dirty="0">
+                <a:latin typeface="D2Coding" panose="020B0609020101020101" pitchFamily="49" charset="-127"/>
+                <a:ea typeface="D2Coding" panose="020B0609020101020101" pitchFamily="49" charset="-127"/>
+              </a:rPr>
+              <a:t>처럼 보이지만</a:t>
+            </a:r>
+            <a:r>
+              <a:rPr lang="en-US" altLang="ko-KR" sz="1400" dirty="0">
+                <a:latin typeface="D2Coding" panose="020B0609020101020101" pitchFamily="49" charset="-127"/>
+                <a:ea typeface="D2Coding" panose="020B0609020101020101" pitchFamily="49" charset="-127"/>
+              </a:rPr>
+              <a:t>, </a:t>
+            </a:r>
+            <a:r>
+              <a:rPr lang="ko-KR" altLang="en-US" sz="1400" dirty="0">
+                <a:latin typeface="D2Coding" panose="020B0609020101020101" pitchFamily="49" charset="-127"/>
+                <a:ea typeface="D2Coding" panose="020B0609020101020101" pitchFamily="49" charset="-127"/>
+              </a:rPr>
+              <a:t>전체적으로는 구부러질 수 있는 </a:t>
+            </a:r>
+            <a:r>
+              <a:rPr lang="ko-KR" altLang="en-US" sz="1400" dirty="0" err="1">
+                <a:latin typeface="D2Coding" panose="020B0609020101020101" pitchFamily="49" charset="-127"/>
+                <a:ea typeface="D2Coding" panose="020B0609020101020101" pitchFamily="49" charset="-127"/>
+              </a:rPr>
+              <a:t>저차원</a:t>
+            </a:r>
+            <a:r>
+              <a:rPr lang="ko-KR" altLang="en-US" sz="1400" dirty="0">
+                <a:latin typeface="D2Coding" panose="020B0609020101020101" pitchFamily="49" charset="-127"/>
+                <a:ea typeface="D2Coding" panose="020B0609020101020101" pitchFamily="49" charset="-127"/>
+              </a:rPr>
+              <a:t> 구조 </a:t>
+            </a:r>
+          </a:p>
+          <a:p>
+            <a:endParaRPr lang="en-US" altLang="ko-KR" sz="1400" dirty="0">
+              <a:latin typeface="D2Coding" panose="020B0609020101020101" pitchFamily="49" charset="-127"/>
+              <a:ea typeface="D2Coding" panose="020B0609020101020101" pitchFamily="49" charset="-127"/>
+            </a:endParaRPr>
+          </a:p>
+          <a:p>
+            <a:pPr>
+              <a:lnSpc>
+                <a:spcPct val="150000"/>
+              </a:lnSpc>
+            </a:pPr>
+            <a:r>
+              <a:rPr lang="ko-KR" altLang="en-US" sz="1400" dirty="0">
+                <a:latin typeface="D2Coding" panose="020B0609020101020101" pitchFamily="49" charset="-127"/>
+                <a:ea typeface="D2Coding" panose="020B0609020101020101" pitchFamily="49" charset="-127"/>
+              </a:rPr>
+              <a:t>데이터가 매우 높은 차원의 공간에 존재하더라도</a:t>
+            </a:r>
+            <a:r>
+              <a:rPr lang="en-US" altLang="ko-KR" sz="1400" dirty="0">
+                <a:latin typeface="D2Coding" panose="020B0609020101020101" pitchFamily="49" charset="-127"/>
+                <a:ea typeface="D2Coding" panose="020B0609020101020101" pitchFamily="49" charset="-127"/>
+              </a:rPr>
+              <a:t>, </a:t>
+            </a:r>
+            <a:r>
+              <a:rPr lang="ko-KR" altLang="en-US" sz="1400" dirty="0">
+                <a:latin typeface="D2Coding" panose="020B0609020101020101" pitchFamily="49" charset="-127"/>
+                <a:ea typeface="D2Coding" panose="020B0609020101020101" pitchFamily="49" charset="-127"/>
+              </a:rPr>
+              <a:t>실제로는 그 안의 훨씬 낮은 차원의 구조</a:t>
+            </a:r>
+            <a:r>
+              <a:rPr lang="en-US" altLang="ko-KR" sz="1400" dirty="0">
+                <a:latin typeface="D2Coding" panose="020B0609020101020101" pitchFamily="49" charset="-127"/>
+                <a:ea typeface="D2Coding" panose="020B0609020101020101" pitchFamily="49" charset="-127"/>
+              </a:rPr>
+              <a:t>(</a:t>
+            </a:r>
+            <a:r>
+              <a:rPr lang="ko-KR" altLang="en-US" sz="1400" dirty="0" err="1">
+                <a:latin typeface="D2Coding" panose="020B0609020101020101" pitchFamily="49" charset="-127"/>
+                <a:ea typeface="D2Coding" panose="020B0609020101020101" pitchFamily="49" charset="-127"/>
+              </a:rPr>
+              <a:t>매니폴드</a:t>
+            </a:r>
+            <a:r>
+              <a:rPr lang="en-US" altLang="ko-KR" sz="1400" dirty="0">
+                <a:latin typeface="D2Coding" panose="020B0609020101020101" pitchFamily="49" charset="-127"/>
+                <a:ea typeface="D2Coding" panose="020B0609020101020101" pitchFamily="49" charset="-127"/>
+              </a:rPr>
+              <a:t>) </a:t>
+            </a:r>
+            <a:r>
+              <a:rPr lang="ko-KR" altLang="en-US" sz="1400" dirty="0">
+                <a:latin typeface="D2Coding" panose="020B0609020101020101" pitchFamily="49" charset="-127"/>
+                <a:ea typeface="D2Coding" panose="020B0609020101020101" pitchFamily="49" charset="-127"/>
+              </a:rPr>
+              <a:t>위에 분포할 수 있음 </a:t>
+            </a:r>
+            <a:r>
+              <a:rPr lang="en-US" altLang="ko-KR" sz="1400" dirty="0">
+                <a:latin typeface="D2Coding" panose="020B0609020101020101" pitchFamily="49" charset="-127"/>
+                <a:ea typeface="D2Coding" panose="020B0609020101020101" pitchFamily="49" charset="-127"/>
+              </a:rPr>
+              <a:t>(</a:t>
+            </a:r>
+            <a:r>
+              <a:rPr lang="ko-KR" altLang="en-US" sz="1400" dirty="0" err="1">
+                <a:latin typeface="D2Coding" panose="020B0609020101020101" pitchFamily="49" charset="-127"/>
+                <a:ea typeface="D2Coding" panose="020B0609020101020101" pitchFamily="49" charset="-127"/>
+              </a:rPr>
+              <a:t>딥러닝은</a:t>
+            </a:r>
+            <a:r>
+              <a:rPr lang="ko-KR" altLang="en-US" sz="1400" dirty="0">
+                <a:latin typeface="D2Coding" panose="020B0609020101020101" pitchFamily="49" charset="-127"/>
+                <a:ea typeface="D2Coding" panose="020B0609020101020101" pitchFamily="49" charset="-127"/>
+              </a:rPr>
+              <a:t> 이 </a:t>
+            </a:r>
+            <a:r>
+              <a:rPr lang="ko-KR" altLang="en-US" sz="1400" dirty="0" err="1">
+                <a:latin typeface="D2Coding" panose="020B0609020101020101" pitchFamily="49" charset="-127"/>
+                <a:ea typeface="D2Coding" panose="020B0609020101020101" pitchFamily="49" charset="-127"/>
+              </a:rPr>
+              <a:t>매니폴드의</a:t>
+            </a:r>
+            <a:r>
+              <a:rPr lang="ko-KR" altLang="en-US" sz="1400" dirty="0">
+                <a:latin typeface="D2Coding" panose="020B0609020101020101" pitchFamily="49" charset="-127"/>
+                <a:ea typeface="D2Coding" panose="020B0609020101020101" pitchFamily="49" charset="-127"/>
+              </a:rPr>
+              <a:t> 구조를 찾아냄</a:t>
+            </a:r>
+            <a:r>
+              <a:rPr lang="en-US" altLang="ko-KR" sz="1400" dirty="0">
+                <a:latin typeface="D2Coding" panose="020B0609020101020101" pitchFamily="49" charset="-127"/>
+                <a:ea typeface="D2Coding" panose="020B0609020101020101" pitchFamily="49" charset="-127"/>
+              </a:rPr>
+              <a:t>)</a:t>
+            </a:r>
+            <a:endParaRPr lang="ko-KR" altLang="en-US" sz="1400" dirty="0">
+              <a:latin typeface="D2Coding" panose="020B0609020101020101" pitchFamily="49" charset="-127"/>
+              <a:ea typeface="D2Coding" panose="020B0609020101020101" pitchFamily="49" charset="-127"/>
+            </a:endParaRPr>
+          </a:p>
+        </p:txBody>
+      </p:sp>
+    </p:spTree>
+    <p:extLst>
+      <p:ext uri="{BB962C8B-B14F-4D97-AF65-F5344CB8AC3E}">
+        <p14:creationId xmlns:p14="http://schemas.microsoft.com/office/powerpoint/2010/main" val="3844273402"/>
+      </p:ext>
+    </p:extLst>
+  </p:cSld>
+  <p:clrMapOvr>
+    <a:masterClrMapping/>
+  </p:clrMapOvr>
+</p:sld>
+</file>
+
+<file path=ppt/slides/slide13.xml><?xml version="1.0" encoding="utf-8"?>
 <p:sld xmlns:a="http://schemas.openxmlformats.org/drawingml/2006/main" xmlns:r="http://schemas.openxmlformats.org/officeDocument/2006/relationships" xmlns:p="http://schemas.openxmlformats.org/presentationml/2006/main">
   <p:cSld>
     <p:spTree>
@@ -3707,7 +5076,7 @@
             <a:fld id="{D57F1E4F-1CFF-5643-939E-217C01CDF565}" type="slidenum">
               <a:rPr lang="en-US" smtClean="0"/>
               <a:pPr/>
-              <a:t>12</a:t>
+              <a:t>13</a:t>
             </a:fld>
             <a:endParaRPr lang="en-US" dirty="0"/>
           </a:p>
@@ -4186,7 +5555,7 @@
 </p:sld>
 </file>
 
-<file path=ppt/slides/slide13.xml><?xml version="1.0" encoding="utf-8"?>
+<file path=ppt/slides/slide14.xml><?xml version="1.0" encoding="utf-8"?>
 <p:sld xmlns:a="http://schemas.openxmlformats.org/drawingml/2006/main" xmlns:r="http://schemas.openxmlformats.org/officeDocument/2006/relationships" xmlns:p="http://schemas.openxmlformats.org/presentationml/2006/main">
   <p:cSld>
     <p:spTree>
@@ -4238,7 +5607,7 @@
             <a:fld id="{D57F1E4F-1CFF-5643-939E-217C01CDF565}" type="slidenum">
               <a:rPr lang="en-US" smtClean="0"/>
               <a:pPr/>
-              <a:t>13</a:t>
+              <a:t>14</a:t>
             </a:fld>
             <a:endParaRPr lang="en-US" dirty="0"/>
           </a:p>
@@ -5270,7 +6639,415 @@
 </p:sld>
 </file>
 
-<file path=ppt/slides/slide14.xml><?xml version="1.0" encoding="utf-8"?>
+<file path=ppt/slides/slide15.xml><?xml version="1.0" encoding="utf-8"?>
+<p:sld xmlns:a="http://schemas.openxmlformats.org/drawingml/2006/main" xmlns:r="http://schemas.openxmlformats.org/officeDocument/2006/relationships" xmlns:p="http://schemas.openxmlformats.org/presentationml/2006/main">
+  <p:cSld>
+    <p:spTree>
+      <p:nvGrpSpPr>
+        <p:cNvPr id="1" name="">
+          <a:extLst>
+            <a:ext uri="{FF2B5EF4-FFF2-40B4-BE49-F238E27FC236}">
+              <a16:creationId xmlns:a16="http://schemas.microsoft.com/office/drawing/2014/main" id="{620CD20E-7318-3019-C1E6-3355EE6D62EF}"/>
+            </a:ext>
+          </a:extLst>
+        </p:cNvPr>
+        <p:cNvGrpSpPr/>
+        <p:nvPr/>
+      </p:nvGrpSpPr>
+      <p:grpSpPr>
+        <a:xfrm>
+          <a:off x="0" y="0"/>
+          <a:ext cx="0" cy="0"/>
+          <a:chOff x="0" y="0"/>
+          <a:chExt cx="0" cy="0"/>
+        </a:xfrm>
+      </p:grpSpPr>
+      <p:sp>
+        <p:nvSpPr>
+          <p:cNvPr id="4" name="슬라이드 번호 개체 틀 3">
+            <a:extLst>
+              <a:ext uri="{FF2B5EF4-FFF2-40B4-BE49-F238E27FC236}">
+                <a16:creationId xmlns:a16="http://schemas.microsoft.com/office/drawing/2014/main" id="{812AE0E6-0FEF-2F62-1B38-B53C84E3D217}"/>
+              </a:ext>
+            </a:extLst>
+          </p:cNvPr>
+          <p:cNvSpPr>
+            <a:spLocks noGrp="1"/>
+          </p:cNvSpPr>
+          <p:nvPr>
+            <p:ph type="sldNum" sz="quarter" idx="12"/>
+          </p:nvPr>
+        </p:nvSpPr>
+        <p:spPr>
+          <a:xfrm>
+            <a:off x="10514011" y="6036261"/>
+            <a:ext cx="753545" cy="365125"/>
+          </a:xfrm>
+        </p:spPr>
+        <p:txBody>
+          <a:bodyPr/>
+          <a:lstStyle/>
+          <a:p>
+            <a:fld id="{D57F1E4F-1CFF-5643-939E-217C01CDF565}" type="slidenum">
+              <a:rPr lang="en-US" smtClean="0"/>
+              <a:pPr/>
+              <a:t>15</a:t>
+            </a:fld>
+            <a:endParaRPr lang="en-US" dirty="0"/>
+          </a:p>
+        </p:txBody>
+      </p:sp>
+      <p:sp>
+        <p:nvSpPr>
+          <p:cNvPr id="3" name="제목 1">
+            <a:extLst>
+              <a:ext uri="{FF2B5EF4-FFF2-40B4-BE49-F238E27FC236}">
+                <a16:creationId xmlns:a16="http://schemas.microsoft.com/office/drawing/2014/main" id="{BA4953BE-3FAE-969C-3077-8CEA680822B3}"/>
+              </a:ext>
+            </a:extLst>
+          </p:cNvPr>
+          <p:cNvSpPr txBox="1">
+            <a:spLocks/>
+          </p:cNvSpPr>
+          <p:nvPr/>
+        </p:nvSpPr>
+        <p:spPr>
+          <a:xfrm>
+            <a:off x="475645" y="481983"/>
+            <a:ext cx="10353762" cy="766439"/>
+          </a:xfrm>
+          <a:prstGeom prst="rect">
+            <a:avLst/>
+          </a:prstGeom>
+        </p:spPr>
+        <p:txBody>
+          <a:bodyPr vert="horz" lIns="91440" tIns="45720" rIns="91440" bIns="45720" rtlCol="0" anchor="ctr">
+            <a:normAutofit/>
+          </a:bodyPr>
+          <a:lstStyle>
+            <a:lvl1pPr algn="ctr" defTabSz="914400" rtl="0" eaLnBrk="1" latinLnBrk="1" hangingPunct="1">
+              <a:lnSpc>
+                <a:spcPct val="90000"/>
+              </a:lnSpc>
+              <a:spcBef>
+                <a:spcPct val="0"/>
+              </a:spcBef>
+              <a:buNone/>
+              <a:defRPr sz="3200" kern="1200" cap="all" baseline="0">
+                <a:solidFill>
+                  <a:schemeClr val="tx1"/>
+                </a:solidFill>
+                <a:effectLst/>
+                <a:latin typeface="Batang" panose="02030600000101010101" pitchFamily="18" charset="-127"/>
+                <a:ea typeface="Batang" panose="02030600000101010101" pitchFamily="18" charset="-127"/>
+                <a:cs typeface="+mj-cs"/>
+              </a:defRPr>
+            </a:lvl1pPr>
+          </a:lstStyle>
+          <a:p>
+            <a:pPr algn="l"/>
+            <a:r>
+              <a:rPr lang="en-US" altLang="ko-KR" sz="2900" b="1" cap="none" dirty="0">
+                <a:latin typeface="Lora" pitchFamily="2" charset="0"/>
+              </a:rPr>
+              <a:t>Locally Linear</a:t>
+            </a:r>
+          </a:p>
+        </p:txBody>
+      </p:sp>
+      <p:pic>
+        <p:nvPicPr>
+          <p:cNvPr id="5" name="그림 4">
+            <a:extLst>
+              <a:ext uri="{FF2B5EF4-FFF2-40B4-BE49-F238E27FC236}">
+                <a16:creationId xmlns:a16="http://schemas.microsoft.com/office/drawing/2014/main" id="{D757B68B-0990-EAC0-574E-9010E6396A3E}"/>
+              </a:ext>
+            </a:extLst>
+          </p:cNvPr>
+          <p:cNvPicPr>
+            <a:picLocks noChangeAspect="1"/>
+          </p:cNvPicPr>
+          <p:nvPr/>
+        </p:nvPicPr>
+        <p:blipFill>
+          <a:blip r:embed="rId2"/>
+          <a:stretch>
+            <a:fillRect/>
+          </a:stretch>
+        </p:blipFill>
+        <p:spPr>
+          <a:xfrm>
+            <a:off x="2610876" y="2981940"/>
+            <a:ext cx="6083299" cy="3318163"/>
+          </a:xfrm>
+          <a:prstGeom prst="rect">
+            <a:avLst/>
+          </a:prstGeom>
+        </p:spPr>
+      </p:pic>
+      <p:sp>
+        <p:nvSpPr>
+          <p:cNvPr id="6" name="TextBox 5">
+            <a:extLst>
+              <a:ext uri="{FF2B5EF4-FFF2-40B4-BE49-F238E27FC236}">
+                <a16:creationId xmlns:a16="http://schemas.microsoft.com/office/drawing/2014/main" id="{BD54E0AD-D3C1-780E-7298-ED0075A3E1C2}"/>
+              </a:ext>
+            </a:extLst>
+          </p:cNvPr>
+          <p:cNvSpPr txBox="1"/>
+          <p:nvPr/>
+        </p:nvSpPr>
+        <p:spPr>
+          <a:xfrm>
+            <a:off x="475645" y="1243876"/>
+            <a:ext cx="11135330" cy="1573316"/>
+          </a:xfrm>
+          <a:prstGeom prst="rect">
+            <a:avLst/>
+          </a:prstGeom>
+          <a:noFill/>
+        </p:spPr>
+        <p:txBody>
+          <a:bodyPr wrap="square">
+            <a:spAutoFit/>
+          </a:bodyPr>
+          <a:lstStyle/>
+          <a:p>
+            <a:pPr marL="285750" indent="-285750">
+              <a:lnSpc>
+                <a:spcPct val="150000"/>
+              </a:lnSpc>
+              <a:buFont typeface="Wingdings" panose="05000000000000000000" pitchFamily="2" charset="2"/>
+              <a:buChar char="v"/>
+            </a:pPr>
+            <a:r>
+              <a:rPr lang="ko-KR" altLang="en-US" sz="1600" dirty="0">
+                <a:latin typeface="D2Coding" panose="020B0609020101020101" pitchFamily="49" charset="-127"/>
+                <a:ea typeface="D2Coding" panose="020B0609020101020101" pitchFamily="49" charset="-127"/>
+              </a:rPr>
+              <a:t>곡선을 확대하면 직선처럼 보이고</a:t>
+            </a:r>
+            <a:r>
+              <a:rPr lang="en-US" altLang="ko-KR" sz="1600" dirty="0">
+                <a:latin typeface="D2Coding" panose="020B0609020101020101" pitchFamily="49" charset="-127"/>
+                <a:ea typeface="D2Coding" panose="020B0609020101020101" pitchFamily="49" charset="-127"/>
+              </a:rPr>
+              <a:t>, </a:t>
+            </a:r>
+            <a:r>
+              <a:rPr lang="ko-KR" altLang="en-US" sz="1600" dirty="0">
+                <a:latin typeface="D2Coding" panose="020B0609020101020101" pitchFamily="49" charset="-127"/>
+                <a:ea typeface="D2Coding" panose="020B0609020101020101" pitchFamily="49" charset="-127"/>
+              </a:rPr>
+              <a:t>지구</a:t>
+            </a:r>
+            <a:r>
+              <a:rPr lang="en-US" altLang="ko-KR" sz="1600" dirty="0">
+                <a:latin typeface="D2Coding" panose="020B0609020101020101" pitchFamily="49" charset="-127"/>
+                <a:ea typeface="D2Coding" panose="020B0609020101020101" pitchFamily="49" charset="-127"/>
+              </a:rPr>
+              <a:t>(3</a:t>
+            </a:r>
+            <a:r>
+              <a:rPr lang="ko-KR" altLang="en-US" sz="1600" dirty="0">
+                <a:latin typeface="D2Coding" panose="020B0609020101020101" pitchFamily="49" charset="-127"/>
+                <a:ea typeface="D2Coding" panose="020B0609020101020101" pitchFamily="49" charset="-127"/>
+              </a:rPr>
+              <a:t>차원 구</a:t>
+            </a:r>
+            <a:r>
+              <a:rPr lang="en-US" altLang="ko-KR" sz="1600" dirty="0">
+                <a:latin typeface="D2Coding" panose="020B0609020101020101" pitchFamily="49" charset="-127"/>
+                <a:ea typeface="D2Coding" panose="020B0609020101020101" pitchFamily="49" charset="-127"/>
+              </a:rPr>
+              <a:t>)</a:t>
+            </a:r>
+            <a:r>
+              <a:rPr lang="ko-KR" altLang="en-US" sz="1600" dirty="0">
+                <a:latin typeface="D2Coding" panose="020B0609020101020101" pitchFamily="49" charset="-127"/>
+                <a:ea typeface="D2Coding" panose="020B0609020101020101" pitchFamily="49" charset="-127"/>
+              </a:rPr>
+              <a:t>를 아주 좁게 보면 평평한 땅</a:t>
+            </a:r>
+            <a:r>
+              <a:rPr lang="en-US" altLang="ko-KR" sz="1600" dirty="0">
+                <a:latin typeface="D2Coding" panose="020B0609020101020101" pitchFamily="49" charset="-127"/>
+                <a:ea typeface="D2Coding" panose="020B0609020101020101" pitchFamily="49" charset="-127"/>
+              </a:rPr>
+              <a:t>(2</a:t>
+            </a:r>
+            <a:r>
+              <a:rPr lang="ko-KR" altLang="en-US" sz="1600" dirty="0">
+                <a:latin typeface="D2Coding" panose="020B0609020101020101" pitchFamily="49" charset="-127"/>
+                <a:ea typeface="D2Coding" panose="020B0609020101020101" pitchFamily="49" charset="-127"/>
+              </a:rPr>
+              <a:t>차원</a:t>
+            </a:r>
+            <a:r>
+              <a:rPr lang="en-US" altLang="ko-KR" sz="1600" dirty="0">
+                <a:latin typeface="D2Coding" panose="020B0609020101020101" pitchFamily="49" charset="-127"/>
+                <a:ea typeface="D2Coding" panose="020B0609020101020101" pitchFamily="49" charset="-127"/>
+              </a:rPr>
+              <a:t>)</a:t>
+            </a:r>
+          </a:p>
+          <a:p>
+            <a:pPr marL="285750" indent="-285750">
+              <a:lnSpc>
+                <a:spcPct val="150000"/>
+              </a:lnSpc>
+              <a:buFont typeface="Wingdings" panose="05000000000000000000" pitchFamily="2" charset="2"/>
+              <a:buChar char="v"/>
+            </a:pPr>
+            <a:r>
+              <a:rPr lang="ko-KR" altLang="en-US" sz="1600" dirty="0">
+                <a:latin typeface="D2Coding" panose="020B0609020101020101" pitchFamily="49" charset="-127"/>
+                <a:ea typeface="D2Coding" panose="020B0609020101020101" pitchFamily="49" charset="-127"/>
+              </a:rPr>
+              <a:t>현실 세계의 데이터 공간이 전체적으로는 복잡하게 꼬여 있어도</a:t>
+            </a:r>
+            <a:r>
+              <a:rPr lang="en-US" altLang="ko-KR" sz="1600" dirty="0">
+                <a:latin typeface="D2Coding" panose="020B0609020101020101" pitchFamily="49" charset="-127"/>
+                <a:ea typeface="D2Coding" panose="020B0609020101020101" pitchFamily="49" charset="-127"/>
+              </a:rPr>
+              <a:t>, </a:t>
+            </a:r>
+            <a:r>
+              <a:rPr lang="ko-KR" altLang="en-US" sz="1600" dirty="0">
+                <a:latin typeface="D2Coding" panose="020B0609020101020101" pitchFamily="49" charset="-127"/>
+                <a:ea typeface="D2Coding" panose="020B0609020101020101" pitchFamily="49" charset="-127"/>
+              </a:rPr>
+              <a:t>가까운 유역</a:t>
+            </a:r>
+            <a:r>
+              <a:rPr lang="en-US" altLang="ko-KR" sz="1600" dirty="0">
+                <a:latin typeface="D2Coding" panose="020B0609020101020101" pitchFamily="49" charset="-127"/>
+                <a:ea typeface="D2Coding" panose="020B0609020101020101" pitchFamily="49" charset="-127"/>
+              </a:rPr>
+              <a:t>(</a:t>
+            </a:r>
+            <a:r>
+              <a:rPr lang="ko-KR" altLang="en-US" sz="1600" dirty="0">
+                <a:latin typeface="D2Coding" panose="020B0609020101020101" pitchFamily="49" charset="-127"/>
+                <a:ea typeface="D2Coding" panose="020B0609020101020101" pitchFamily="49" charset="-127"/>
+              </a:rPr>
+              <a:t>국소적 공간</a:t>
+            </a:r>
+            <a:r>
+              <a:rPr lang="en-US" altLang="ko-KR" sz="1600" dirty="0">
+                <a:latin typeface="D2Coding" panose="020B0609020101020101" pitchFamily="49" charset="-127"/>
+                <a:ea typeface="D2Coding" panose="020B0609020101020101" pitchFamily="49" charset="-127"/>
+              </a:rPr>
+              <a:t>)</a:t>
+            </a:r>
+            <a:r>
+              <a:rPr lang="ko-KR" altLang="en-US" sz="1600" dirty="0" err="1">
+                <a:latin typeface="D2Coding" panose="020B0609020101020101" pitchFamily="49" charset="-127"/>
+                <a:ea typeface="D2Coding" panose="020B0609020101020101" pitchFamily="49" charset="-127"/>
+              </a:rPr>
+              <a:t>끼리는</a:t>
+            </a:r>
+            <a:r>
+              <a:rPr lang="ko-KR" altLang="en-US" sz="1600" dirty="0">
+                <a:latin typeface="D2Coding" panose="020B0609020101020101" pitchFamily="49" charset="-127"/>
+                <a:ea typeface="D2Coding" panose="020B0609020101020101" pitchFamily="49" charset="-127"/>
+              </a:rPr>
+              <a:t> 수학적으로 다루기 쉬운 단순한 형태</a:t>
+            </a:r>
+            <a:r>
+              <a:rPr lang="en-US" altLang="ko-KR" sz="1600" dirty="0">
+                <a:latin typeface="D2Coding" panose="020B0609020101020101" pitchFamily="49" charset="-127"/>
+                <a:ea typeface="D2Coding" panose="020B0609020101020101" pitchFamily="49" charset="-127"/>
+              </a:rPr>
+              <a:t>(</a:t>
+            </a:r>
+            <a:r>
+              <a:rPr lang="ko-KR" altLang="en-US" sz="1600" dirty="0">
+                <a:latin typeface="D2Coding" panose="020B0609020101020101" pitchFamily="49" charset="-127"/>
+                <a:ea typeface="D2Coding" panose="020B0609020101020101" pitchFamily="49" charset="-127"/>
+              </a:rPr>
+              <a:t>선형 공간</a:t>
+            </a:r>
+            <a:r>
+              <a:rPr lang="en-US" altLang="ko-KR" sz="1600" dirty="0">
+                <a:latin typeface="D2Coding" panose="020B0609020101020101" pitchFamily="49" charset="-127"/>
+                <a:ea typeface="D2Coding" panose="020B0609020101020101" pitchFamily="49" charset="-127"/>
+              </a:rPr>
+              <a:t>)</a:t>
+            </a:r>
+            <a:r>
+              <a:rPr lang="ko-KR" altLang="en-US" sz="1600" dirty="0">
+                <a:latin typeface="D2Coding" panose="020B0609020101020101" pitchFamily="49" charset="-127"/>
+                <a:ea typeface="D2Coding" panose="020B0609020101020101" pitchFamily="49" charset="-127"/>
+              </a:rPr>
+              <a:t>를 띠고 있음</a:t>
+            </a:r>
+            <a:endParaRPr lang="en-US" altLang="ko-KR" sz="1600" dirty="0">
+              <a:latin typeface="D2Coding" panose="020B0609020101020101" pitchFamily="49" charset="-127"/>
+              <a:ea typeface="D2Coding" panose="020B0609020101020101" pitchFamily="49" charset="-127"/>
+            </a:endParaRPr>
+          </a:p>
+          <a:p>
+            <a:pPr marL="285750" indent="-285750">
+              <a:lnSpc>
+                <a:spcPct val="150000"/>
+              </a:lnSpc>
+              <a:buFont typeface="Wingdings" panose="05000000000000000000" pitchFamily="2" charset="2"/>
+              <a:buChar char="v"/>
+            </a:pPr>
+            <a:r>
+              <a:rPr lang="ko-KR" altLang="en-US" sz="1600" dirty="0">
+                <a:latin typeface="D2Coding" panose="020B0609020101020101" pitchFamily="49" charset="-127"/>
+                <a:ea typeface="D2Coding" panose="020B0609020101020101" pitchFamily="49" charset="-127"/>
+              </a:rPr>
+              <a:t>인공지능이 이 </a:t>
+            </a:r>
+            <a:r>
+              <a:rPr lang="en-US" altLang="ko-KR" sz="1600" dirty="0">
+                <a:latin typeface="D2Coding" panose="020B0609020101020101" pitchFamily="49" charset="-127"/>
+                <a:ea typeface="D2Coding" panose="020B0609020101020101" pitchFamily="49" charset="-127"/>
+              </a:rPr>
+              <a:t>Manifold </a:t>
+            </a:r>
+            <a:r>
+              <a:rPr lang="ko-KR" altLang="en-US" sz="1600" dirty="0">
+                <a:latin typeface="D2Coding" panose="020B0609020101020101" pitchFamily="49" charset="-127"/>
+                <a:ea typeface="D2Coding" panose="020B0609020101020101" pitchFamily="49" charset="-127"/>
+              </a:rPr>
+              <a:t>공간을 미분과 </a:t>
+            </a:r>
+            <a:r>
+              <a:rPr lang="ko-KR" altLang="en-US" sz="1600" dirty="0" err="1">
+                <a:latin typeface="D2Coding" panose="020B0609020101020101" pitchFamily="49" charset="-127"/>
+                <a:ea typeface="D2Coding" panose="020B0609020101020101" pitchFamily="49" charset="-127"/>
+              </a:rPr>
+              <a:t>경사하강법을</a:t>
+            </a:r>
+            <a:r>
+              <a:rPr lang="ko-KR" altLang="en-US" sz="1600" dirty="0">
+                <a:latin typeface="D2Coding" panose="020B0609020101020101" pitchFamily="49" charset="-127"/>
+                <a:ea typeface="D2Coding" panose="020B0609020101020101" pitchFamily="49" charset="-127"/>
+              </a:rPr>
+              <a:t> 사용해 길을 찾아낼 수 있음</a:t>
+            </a:r>
+          </a:p>
+        </p:txBody>
+      </p:sp>
+    </p:spTree>
+    <p:extLst>
+      <p:ext uri="{BB962C8B-B14F-4D97-AF65-F5344CB8AC3E}">
+        <p14:creationId xmlns:p14="http://schemas.microsoft.com/office/powerpoint/2010/main" val="2369409469"/>
+      </p:ext>
+    </p:extLst>
+  </p:cSld>
+  <p:clrMapOvr>
+    <a:masterClrMapping/>
+  </p:clrMapOvr>
+</p:sld>
+</file>
+
+<file path=ppt/slides/slide16.xml><?xml version="1.0" encoding="utf-8"?>
 <p:sld xmlns:a="http://schemas.openxmlformats.org/drawingml/2006/main" xmlns:r="http://schemas.openxmlformats.org/officeDocument/2006/relationships" xmlns:p="http://schemas.openxmlformats.org/presentationml/2006/main">
   <p:cSld>
     <p:spTree>
@@ -5322,7 +7099,7 @@
             <a:fld id="{D57F1E4F-1CFF-5643-939E-217C01CDF565}" type="slidenum">
               <a:rPr lang="en-US" smtClean="0"/>
               <a:pPr/>
-              <a:t>14</a:t>
+              <a:t>16</a:t>
             </a:fld>
             <a:endParaRPr lang="en-US" dirty="0"/>
           </a:p>
@@ -5535,135 +7312,6 @@
     <p:extLst>
       <p:ext uri="{BB962C8B-B14F-4D97-AF65-F5344CB8AC3E}">
         <p14:creationId xmlns:p14="http://schemas.microsoft.com/office/powerpoint/2010/main" val="1288382200"/>
-      </p:ext>
-    </p:extLst>
-  </p:cSld>
-  <p:clrMapOvr>
-    <a:masterClrMapping/>
-  </p:clrMapOvr>
-</p:sld>
-</file>
-
-<file path=ppt/slides/slide15.xml><?xml version="1.0" encoding="utf-8"?>
-<p:sld xmlns:a="http://schemas.openxmlformats.org/drawingml/2006/main" xmlns:r="http://schemas.openxmlformats.org/officeDocument/2006/relationships" xmlns:p="http://schemas.openxmlformats.org/presentationml/2006/main">
-  <p:cSld>
-    <p:spTree>
-      <p:nvGrpSpPr>
-        <p:cNvPr id="1" name="">
-          <a:extLst>
-            <a:ext uri="{FF2B5EF4-FFF2-40B4-BE49-F238E27FC236}">
-              <a16:creationId xmlns:a16="http://schemas.microsoft.com/office/drawing/2014/main" id="{2BB9405F-10BD-642A-ED53-86715C0B35A1}"/>
-            </a:ext>
-          </a:extLst>
-        </p:cNvPr>
-        <p:cNvGrpSpPr/>
-        <p:nvPr/>
-      </p:nvGrpSpPr>
-      <p:grpSpPr>
-        <a:xfrm>
-          <a:off x="0" y="0"/>
-          <a:ext cx="0" cy="0"/>
-          <a:chOff x="0" y="0"/>
-          <a:chExt cx="0" cy="0"/>
-        </a:xfrm>
-      </p:grpSpPr>
-      <p:sp>
-        <p:nvSpPr>
-          <p:cNvPr id="4" name="슬라이드 번호 개체 틀 3">
-            <a:extLst>
-              <a:ext uri="{FF2B5EF4-FFF2-40B4-BE49-F238E27FC236}">
-                <a16:creationId xmlns:a16="http://schemas.microsoft.com/office/drawing/2014/main" id="{5608A60C-C86D-7F6D-DE54-3BC7EB7C1F1C}"/>
-              </a:ext>
-            </a:extLst>
-          </p:cNvPr>
-          <p:cNvSpPr>
-            <a:spLocks noGrp="1"/>
-          </p:cNvSpPr>
-          <p:nvPr>
-            <p:ph type="sldNum" sz="quarter" idx="12"/>
-          </p:nvPr>
-        </p:nvSpPr>
-        <p:spPr>
-          <a:xfrm>
-            <a:off x="10514011" y="6036261"/>
-            <a:ext cx="753545" cy="365125"/>
-          </a:xfrm>
-        </p:spPr>
-        <p:txBody>
-          <a:bodyPr/>
-          <a:lstStyle/>
-          <a:p>
-            <a:fld id="{D57F1E4F-1CFF-5643-939E-217C01CDF565}" type="slidenum">
-              <a:rPr lang="en-US" smtClean="0"/>
-              <a:pPr/>
-              <a:t>15</a:t>
-            </a:fld>
-            <a:endParaRPr lang="en-US" dirty="0"/>
-          </a:p>
-        </p:txBody>
-      </p:sp>
-      <p:sp>
-        <p:nvSpPr>
-          <p:cNvPr id="3" name="제목 1">
-            <a:extLst>
-              <a:ext uri="{FF2B5EF4-FFF2-40B4-BE49-F238E27FC236}">
-                <a16:creationId xmlns:a16="http://schemas.microsoft.com/office/drawing/2014/main" id="{CCF7CFC9-D6A9-34AE-1DD9-917CF8643124}"/>
-              </a:ext>
-            </a:extLst>
-          </p:cNvPr>
-          <p:cNvSpPr txBox="1">
-            <a:spLocks/>
-          </p:cNvSpPr>
-          <p:nvPr/>
-        </p:nvSpPr>
-        <p:spPr>
-          <a:xfrm>
-            <a:off x="475645" y="481983"/>
-            <a:ext cx="10353762" cy="766439"/>
-          </a:xfrm>
-          <a:prstGeom prst="rect">
-            <a:avLst/>
-          </a:prstGeom>
-        </p:spPr>
-        <p:txBody>
-          <a:bodyPr vert="horz" lIns="91440" tIns="45720" rIns="91440" bIns="45720" rtlCol="0" anchor="ctr">
-            <a:normAutofit/>
-          </a:bodyPr>
-          <a:lstStyle>
-            <a:lvl1pPr algn="ctr" defTabSz="914400" rtl="0" eaLnBrk="1" latinLnBrk="1" hangingPunct="1">
-              <a:lnSpc>
-                <a:spcPct val="90000"/>
-              </a:lnSpc>
-              <a:spcBef>
-                <a:spcPct val="0"/>
-              </a:spcBef>
-              <a:buNone/>
-              <a:defRPr sz="3200" kern="1200" cap="all" baseline="0">
-                <a:solidFill>
-                  <a:schemeClr val="tx1"/>
-                </a:solidFill>
-                <a:effectLst/>
-                <a:latin typeface="Batang" panose="02030600000101010101" pitchFamily="18" charset="-127"/>
-                <a:ea typeface="Batang" panose="02030600000101010101" pitchFamily="18" charset="-127"/>
-                <a:cs typeface="+mj-cs"/>
-              </a:defRPr>
-            </a:lvl1pPr>
-          </a:lstStyle>
-          <a:p>
-            <a:pPr algn="l"/>
-            <a:r>
-              <a:rPr lang="en-US" altLang="ko-KR" sz="2900" b="1" cap="none" dirty="0">
-                <a:latin typeface="Lora" pitchFamily="2" charset="0"/>
-              </a:rPr>
-              <a:t>The nature of generalization in deep learning</a:t>
-            </a:r>
-          </a:p>
-        </p:txBody>
-      </p:sp>
-    </p:spTree>
-    <p:extLst>
-      <p:ext uri="{BB962C8B-B14F-4D97-AF65-F5344CB8AC3E}">
-        <p14:creationId xmlns:p14="http://schemas.microsoft.com/office/powerpoint/2010/main" val="4138489990"/>
       </p:ext>
     </p:extLst>
   </p:cSld>
@@ -8120,17 +9768,17 @@
               <a:rPr lang="en-US" altLang="ko-KR" sz="2800" b="1" cap="none" dirty="0">
                 <a:latin typeface="Lora" pitchFamily="2" charset="0"/>
               </a:rPr>
-              <a:t>Homework1</a:t>
+              <a:t>Homework1_spurious correlations</a:t>
             </a:r>
           </a:p>
         </p:txBody>
       </p:sp>
       <p:pic>
         <p:nvPicPr>
-          <p:cNvPr id="10242" name="Picture 2">
+          <p:cNvPr id="10254" name="Picture 14">
             <a:extLst>
               <a:ext uri="{FF2B5EF4-FFF2-40B4-BE49-F238E27FC236}">
-                <a16:creationId xmlns:a16="http://schemas.microsoft.com/office/drawing/2014/main" id="{BE677D51-6E7B-F0CF-8380-225DD42A04B5}"/>
+                <a16:creationId xmlns:a16="http://schemas.microsoft.com/office/drawing/2014/main" id="{6093A6B7-4C33-C6D8-4F0A-9D918B402969}"/>
               </a:ext>
             </a:extLst>
           </p:cNvPr>
@@ -8154,13 +9802,18 @@
         </p:blipFill>
         <p:spPr bwMode="auto">
           <a:xfrm>
-            <a:off x="762000" y="1884948"/>
-            <a:ext cx="5486400" cy="4333875"/>
+            <a:off x="653731" y="1530284"/>
+            <a:ext cx="6285549" cy="1446862"/>
           </a:xfrm>
           <a:prstGeom prst="rect">
             <a:avLst/>
           </a:prstGeom>
           <a:noFill/>
+          <a:ln w="19050">
+            <a:solidFill>
+              <a:schemeClr val="tx1"/>
+            </a:solidFill>
+          </a:ln>
           <a:extLst>
             <a:ext uri="{909E8E84-426E-40DD-AFC4-6F175D3DCCD1}">
               <a14:hiddenFill xmlns:a14="http://schemas.microsoft.com/office/drawing/2010/main">
@@ -8172,6 +9825,409 @@
           </a:extLst>
         </p:spPr>
       </p:pic>
+      <p:pic>
+        <p:nvPicPr>
+          <p:cNvPr id="10258" name="Picture 18">
+            <a:extLst>
+              <a:ext uri="{FF2B5EF4-FFF2-40B4-BE49-F238E27FC236}">
+                <a16:creationId xmlns:a16="http://schemas.microsoft.com/office/drawing/2014/main" id="{CCFA25F7-30C9-174B-87D9-8CCF12C465B6}"/>
+              </a:ext>
+            </a:extLst>
+          </p:cNvPr>
+          <p:cNvPicPr>
+            <a:picLocks noChangeAspect="1" noChangeArrowheads="1"/>
+          </p:cNvPicPr>
+          <p:nvPr/>
+        </p:nvPicPr>
+        <p:blipFill>
+          <a:blip r:embed="rId3">
+            <a:extLst>
+              <a:ext uri="{28A0092B-C50C-407E-A947-70E740481C1C}">
+                <a14:useLocalDpi xmlns:a14="http://schemas.microsoft.com/office/drawing/2010/main" val="0"/>
+              </a:ext>
+            </a:extLst>
+          </a:blip>
+          <a:srcRect/>
+          <a:stretch>
+            <a:fillRect/>
+          </a:stretch>
+        </p:blipFill>
+        <p:spPr bwMode="auto">
+          <a:xfrm>
+            <a:off x="653729" y="4799826"/>
+            <a:ext cx="6285549" cy="1446862"/>
+          </a:xfrm>
+          <a:prstGeom prst="rect">
+            <a:avLst/>
+          </a:prstGeom>
+          <a:noFill/>
+          <a:ln w="19050">
+            <a:solidFill>
+              <a:schemeClr val="accent5"/>
+            </a:solidFill>
+          </a:ln>
+          <a:extLst>
+            <a:ext uri="{909E8E84-426E-40DD-AFC4-6F175D3DCCD1}">
+              <a14:hiddenFill xmlns:a14="http://schemas.microsoft.com/office/drawing/2010/main">
+                <a:solidFill>
+                  <a:srgbClr val="FFFFFF"/>
+                </a:solidFill>
+              </a14:hiddenFill>
+            </a:ext>
+          </a:extLst>
+        </p:spPr>
+      </p:pic>
+      <p:sp>
+        <p:nvSpPr>
+          <p:cNvPr id="7" name="TextBox 6">
+            <a:extLst>
+              <a:ext uri="{FF2B5EF4-FFF2-40B4-BE49-F238E27FC236}">
+                <a16:creationId xmlns:a16="http://schemas.microsoft.com/office/drawing/2014/main" id="{204FEE66-EE1D-C74E-6511-123884581787}"/>
+              </a:ext>
+            </a:extLst>
+          </p:cNvPr>
+          <p:cNvSpPr txBox="1"/>
+          <p:nvPr/>
+        </p:nvSpPr>
+        <p:spPr>
+          <a:xfrm>
+            <a:off x="7101840" y="3165055"/>
+            <a:ext cx="4622800" cy="1077218"/>
+          </a:xfrm>
+          <a:prstGeom prst="rect">
+            <a:avLst/>
+          </a:prstGeom>
+          <a:noFill/>
+          <a:ln w="19050">
+            <a:solidFill>
+              <a:srgbClr val="D24726"/>
+            </a:solidFill>
+          </a:ln>
+        </p:spPr>
+        <p:txBody>
+          <a:bodyPr wrap="square">
+            <a:spAutoFit/>
+          </a:bodyPr>
+          <a:lstStyle/>
+          <a:p>
+            <a:pPr marL="285750" indent="-285750">
+              <a:buFont typeface="Wingdings" panose="05000000000000000000" pitchFamily="2" charset="2"/>
+              <a:buChar char="ü"/>
+            </a:pPr>
+            <a:r>
+              <a:rPr lang="fr-FR" altLang="ko-KR" sz="1600" dirty="0">
+                <a:latin typeface="D2Coding" panose="020B0609020101020101" pitchFamily="49" charset="-127"/>
+                <a:ea typeface="D2Coding" panose="020B0609020101020101" pitchFamily="49" charset="-127"/>
+              </a:rPr>
+              <a:t>np.random.random((len(train_images),1716)</a:t>
+            </a:r>
+            <a:endParaRPr lang="en-US" altLang="ko-KR" sz="1600" dirty="0">
+              <a:latin typeface="D2Coding" panose="020B0609020101020101" pitchFamily="49" charset="-127"/>
+              <a:ea typeface="D2Coding" panose="020B0609020101020101" pitchFamily="49" charset="-127"/>
+            </a:endParaRPr>
+          </a:p>
+          <a:p>
+            <a:pPr marL="285750" indent="-285750">
+              <a:buFont typeface="Wingdings" panose="05000000000000000000" pitchFamily="2" charset="2"/>
+              <a:buChar char="ü"/>
+            </a:pPr>
+            <a:r>
+              <a:rPr lang="en-US" altLang="ko-KR" sz="1600" dirty="0">
+                <a:latin typeface="D2Coding" panose="020B0609020101020101" pitchFamily="49" charset="-127"/>
+                <a:ea typeface="D2Coding" panose="020B0609020101020101" pitchFamily="49" charset="-127"/>
+              </a:rPr>
+              <a:t>W</a:t>
+            </a:r>
+            <a:r>
+              <a:rPr lang="ko-KR" altLang="en-US" sz="1600" dirty="0" err="1">
+                <a:latin typeface="D2Coding" panose="020B0609020101020101" pitchFamily="49" charset="-127"/>
+                <a:ea typeface="D2Coding" panose="020B0609020101020101" pitchFamily="49" charset="-127"/>
+              </a:rPr>
+              <a:t>hite</a:t>
+            </a:r>
+            <a:r>
+              <a:rPr lang="ko-KR" altLang="en-US" sz="1600" dirty="0">
+                <a:latin typeface="D2Coding" panose="020B0609020101020101" pitchFamily="49" charset="-127"/>
+                <a:ea typeface="D2Coding" panose="020B0609020101020101" pitchFamily="49" charset="-127"/>
+              </a:rPr>
+              <a:t> </a:t>
+            </a:r>
+            <a:r>
+              <a:rPr lang="ko-KR" altLang="en-US" sz="1600" dirty="0" err="1">
+                <a:latin typeface="D2Coding" panose="020B0609020101020101" pitchFamily="49" charset="-127"/>
+                <a:ea typeface="D2Coding" panose="020B0609020101020101" pitchFamily="49" charset="-127"/>
+              </a:rPr>
+              <a:t>noise는</a:t>
+            </a:r>
+            <a:r>
+              <a:rPr lang="ko-KR" altLang="en-US" sz="1600" dirty="0">
+                <a:latin typeface="D2Coding" panose="020B0609020101020101" pitchFamily="49" charset="-127"/>
+                <a:ea typeface="D2Coding" panose="020B0609020101020101" pitchFamily="49" charset="-127"/>
+              </a:rPr>
+              <a:t> 레이블과 아무 관련이 없는 완전히 </a:t>
+            </a:r>
+            <a:r>
+              <a:rPr lang="ko-KR" altLang="en-US" sz="1600" dirty="0" err="1">
+                <a:latin typeface="D2Coding" panose="020B0609020101020101" pitchFamily="49" charset="-127"/>
+                <a:ea typeface="D2Coding" panose="020B0609020101020101" pitchFamily="49" charset="-127"/>
+              </a:rPr>
+              <a:t>랜덤한</a:t>
+            </a:r>
+            <a:r>
+              <a:rPr lang="ko-KR" altLang="en-US" sz="1600" dirty="0">
+                <a:latin typeface="D2Coding" panose="020B0609020101020101" pitchFamily="49" charset="-127"/>
+                <a:ea typeface="D2Coding" panose="020B0609020101020101" pitchFamily="49" charset="-127"/>
+              </a:rPr>
+              <a:t> 값</a:t>
+            </a:r>
+            <a:r>
+              <a:rPr lang="en-US" altLang="ko-KR" sz="1600" dirty="0">
+                <a:latin typeface="D2Coding" panose="020B0609020101020101" pitchFamily="49" charset="-127"/>
+                <a:ea typeface="D2Coding" panose="020B0609020101020101" pitchFamily="49" charset="-127"/>
+              </a:rPr>
+              <a:t>(white</a:t>
+            </a:r>
+            <a:r>
+              <a:rPr lang="ko-KR" altLang="en-US" sz="1600" dirty="0">
+                <a:latin typeface="D2Coding" panose="020B0609020101020101" pitchFamily="49" charset="-127"/>
+                <a:ea typeface="D2Coding" panose="020B0609020101020101" pitchFamily="49" charset="-127"/>
+              </a:rPr>
+              <a:t> </a:t>
+            </a:r>
+            <a:r>
+              <a:rPr lang="en-US" altLang="ko-KR" sz="1600" dirty="0">
+                <a:latin typeface="D2Coding" panose="020B0609020101020101" pitchFamily="49" charset="-127"/>
+                <a:ea typeface="D2Coding" panose="020B0609020101020101" pitchFamily="49" charset="-127"/>
+              </a:rPr>
+              <a:t>noise)</a:t>
+            </a:r>
+            <a:r>
+              <a:rPr lang="ko-KR" altLang="en-US" sz="1600" dirty="0">
+                <a:latin typeface="D2Coding" panose="020B0609020101020101" pitchFamily="49" charset="-127"/>
+                <a:ea typeface="D2Coding" panose="020B0609020101020101" pitchFamily="49" charset="-127"/>
+              </a:rPr>
+              <a:t>을</a:t>
+            </a:r>
+            <a:r>
+              <a:rPr lang="en-US" altLang="ko-KR" sz="1600" dirty="0">
+                <a:latin typeface="D2Coding" panose="020B0609020101020101" pitchFamily="49" charset="-127"/>
+                <a:ea typeface="D2Coding" panose="020B0609020101020101" pitchFamily="49" charset="-127"/>
+              </a:rPr>
+              <a:t> </a:t>
+            </a:r>
+            <a:r>
+              <a:rPr lang="ko-KR" altLang="en-US" sz="1600" dirty="0">
+                <a:latin typeface="D2Coding" panose="020B0609020101020101" pitchFamily="49" charset="-127"/>
+                <a:ea typeface="D2Coding" panose="020B0609020101020101" pitchFamily="49" charset="-127"/>
+              </a:rPr>
+              <a:t>생성하여 원래 데이터와 합치기</a:t>
+            </a:r>
+            <a:endParaRPr lang="en-US" altLang="ko-KR" sz="1600" dirty="0">
+              <a:latin typeface="D2Coding" panose="020B0609020101020101" pitchFamily="49" charset="-127"/>
+              <a:ea typeface="D2Coding" panose="020B0609020101020101" pitchFamily="49" charset="-127"/>
+            </a:endParaRPr>
+          </a:p>
+        </p:txBody>
+      </p:sp>
+      <p:pic>
+        <p:nvPicPr>
+          <p:cNvPr id="10256" name="Picture 16">
+            <a:extLst>
+              <a:ext uri="{FF2B5EF4-FFF2-40B4-BE49-F238E27FC236}">
+                <a16:creationId xmlns:a16="http://schemas.microsoft.com/office/drawing/2014/main" id="{72738D12-FD35-BB63-896F-A97AEC91C246}"/>
+              </a:ext>
+            </a:extLst>
+          </p:cNvPr>
+          <p:cNvPicPr>
+            <a:picLocks noChangeAspect="1" noChangeArrowheads="1"/>
+          </p:cNvPicPr>
+          <p:nvPr/>
+        </p:nvPicPr>
+        <p:blipFill>
+          <a:blip r:embed="rId4">
+            <a:extLst>
+              <a:ext uri="{28A0092B-C50C-407E-A947-70E740481C1C}">
+                <a14:useLocalDpi xmlns:a14="http://schemas.microsoft.com/office/drawing/2010/main" val="0"/>
+              </a:ext>
+            </a:extLst>
+          </a:blip>
+          <a:srcRect/>
+          <a:stretch>
+            <a:fillRect/>
+          </a:stretch>
+        </p:blipFill>
+        <p:spPr bwMode="auto">
+          <a:xfrm>
+            <a:off x="653730" y="3165055"/>
+            <a:ext cx="6285549" cy="1446862"/>
+          </a:xfrm>
+          <a:prstGeom prst="rect">
+            <a:avLst/>
+          </a:prstGeom>
+          <a:noFill/>
+          <a:ln w="19050">
+            <a:solidFill>
+              <a:srgbClr val="D24726"/>
+            </a:solidFill>
+          </a:ln>
+          <a:extLst>
+            <a:ext uri="{909E8E84-426E-40DD-AFC4-6F175D3DCCD1}">
+              <a14:hiddenFill xmlns:a14="http://schemas.microsoft.com/office/drawing/2010/main">
+                <a:solidFill>
+                  <a:srgbClr val="FFFFFF"/>
+                </a:solidFill>
+              </a14:hiddenFill>
+            </a:ext>
+          </a:extLst>
+        </p:spPr>
+      </p:pic>
+      <p:sp>
+        <p:nvSpPr>
+          <p:cNvPr id="13" name="TextBox 12">
+            <a:extLst>
+              <a:ext uri="{FF2B5EF4-FFF2-40B4-BE49-F238E27FC236}">
+                <a16:creationId xmlns:a16="http://schemas.microsoft.com/office/drawing/2014/main" id="{D48BB812-FC4E-B2C8-0D3C-0EBCD775003F}"/>
+              </a:ext>
+            </a:extLst>
+          </p:cNvPr>
+          <p:cNvSpPr txBox="1"/>
+          <p:nvPr/>
+        </p:nvSpPr>
+        <p:spPr>
+          <a:xfrm>
+            <a:off x="7101840" y="4799826"/>
+            <a:ext cx="4622800" cy="830997"/>
+          </a:xfrm>
+          <a:prstGeom prst="rect">
+            <a:avLst/>
+          </a:prstGeom>
+          <a:noFill/>
+          <a:ln w="19050">
+            <a:solidFill>
+              <a:schemeClr val="accent5"/>
+            </a:solidFill>
+          </a:ln>
+        </p:spPr>
+        <p:txBody>
+          <a:bodyPr wrap="square">
+            <a:spAutoFit/>
+          </a:bodyPr>
+          <a:lstStyle/>
+          <a:p>
+            <a:pPr marL="285750" indent="-285750">
+              <a:buFont typeface="Wingdings" panose="05000000000000000000" pitchFamily="2" charset="2"/>
+              <a:buChar char="ü"/>
+            </a:pPr>
+            <a:r>
+              <a:rPr lang="fr-FR" altLang="ko-KR" sz="1600" dirty="0">
+                <a:latin typeface="D2Coding" panose="020B0609020101020101" pitchFamily="49" charset="-127"/>
+                <a:ea typeface="D2Coding" panose="020B0609020101020101" pitchFamily="49" charset="-127"/>
+              </a:rPr>
+              <a:t>np.zeros((len(train_images), 1716))</a:t>
+            </a:r>
+            <a:endParaRPr lang="en-US" altLang="ko-KR" sz="1600" dirty="0">
+              <a:latin typeface="D2Coding" panose="020B0609020101020101" pitchFamily="49" charset="-127"/>
+              <a:ea typeface="D2Coding" panose="020B0609020101020101" pitchFamily="49" charset="-127"/>
+            </a:endParaRPr>
+          </a:p>
+          <a:p>
+            <a:pPr marL="285750" indent="-285750">
+              <a:buFont typeface="Wingdings" panose="05000000000000000000" pitchFamily="2" charset="2"/>
+              <a:buChar char="ü"/>
+            </a:pPr>
+            <a:r>
+              <a:rPr lang="ko-KR" altLang="en-US" sz="1600" dirty="0" err="1">
+                <a:latin typeface="D2Coding" panose="020B0609020101020101" pitchFamily="49" charset="-127"/>
+                <a:ea typeface="D2Coding" panose="020B0609020101020101" pitchFamily="49" charset="-127"/>
+              </a:rPr>
+              <a:t>Zero</a:t>
+            </a:r>
+            <a:r>
+              <a:rPr lang="ko-KR" altLang="en-US" sz="1600" dirty="0">
+                <a:latin typeface="D2Coding" panose="020B0609020101020101" pitchFamily="49" charset="-127"/>
+                <a:ea typeface="D2Coding" panose="020B0609020101020101" pitchFamily="49" charset="-127"/>
+              </a:rPr>
+              <a:t> </a:t>
+            </a:r>
+            <a:r>
+              <a:rPr lang="ko-KR" altLang="en-US" sz="1600" dirty="0" err="1">
+                <a:latin typeface="D2Coding" panose="020B0609020101020101" pitchFamily="49" charset="-127"/>
+                <a:ea typeface="D2Coding" panose="020B0609020101020101" pitchFamily="49" charset="-127"/>
+              </a:rPr>
+              <a:t>feature도</a:t>
+            </a:r>
+            <a:r>
+              <a:rPr lang="ko-KR" altLang="en-US" sz="1600" dirty="0">
+                <a:latin typeface="D2Coding" panose="020B0609020101020101" pitchFamily="49" charset="-127"/>
+                <a:ea typeface="D2Coding" panose="020B0609020101020101" pitchFamily="49" charset="-127"/>
+              </a:rPr>
+              <a:t> 정보를 생성하여 원래데이터와 합치기</a:t>
+            </a:r>
+            <a:endParaRPr lang="en-US" altLang="ko-KR" sz="1600" dirty="0">
+              <a:latin typeface="D2Coding" panose="020B0609020101020101" pitchFamily="49" charset="-127"/>
+              <a:ea typeface="D2Coding" panose="020B0609020101020101" pitchFamily="49" charset="-127"/>
+            </a:endParaRPr>
+          </a:p>
+        </p:txBody>
+      </p:sp>
+      <p:sp>
+        <p:nvSpPr>
+          <p:cNvPr id="14" name="TextBox 13">
+            <a:extLst>
+              <a:ext uri="{FF2B5EF4-FFF2-40B4-BE49-F238E27FC236}">
+                <a16:creationId xmlns:a16="http://schemas.microsoft.com/office/drawing/2014/main" id="{CCEA543C-6AB9-BBCC-5F4A-1F2FAB041674}"/>
+              </a:ext>
+            </a:extLst>
+          </p:cNvPr>
+          <p:cNvSpPr txBox="1"/>
+          <p:nvPr/>
+        </p:nvSpPr>
+        <p:spPr>
+          <a:xfrm>
+            <a:off x="7101840" y="1530284"/>
+            <a:ext cx="4622800" cy="338554"/>
+          </a:xfrm>
+          <a:prstGeom prst="rect">
+            <a:avLst/>
+          </a:prstGeom>
+          <a:noFill/>
+          <a:ln w="19050">
+            <a:solidFill>
+              <a:schemeClr val="tx1"/>
+            </a:solidFill>
+          </a:ln>
+        </p:spPr>
+        <p:txBody>
+          <a:bodyPr wrap="square">
+            <a:spAutoFit/>
+          </a:bodyPr>
+          <a:lstStyle/>
+          <a:p>
+            <a:pPr marL="285750" indent="-285750">
+              <a:buFont typeface="Wingdings" panose="05000000000000000000" pitchFamily="2" charset="2"/>
+              <a:buChar char="ü"/>
+            </a:pPr>
+            <a:r>
+              <a:rPr lang="en-US" altLang="ko-KR" sz="1600" dirty="0">
+                <a:latin typeface="D2Coding" panose="020B0609020101020101" pitchFamily="49" charset="-127"/>
+                <a:ea typeface="D2Coding" panose="020B0609020101020101" pitchFamily="49" charset="-127"/>
+              </a:rPr>
+              <a:t>MNIST</a:t>
+            </a:r>
+            <a:r>
+              <a:rPr lang="ko-KR" altLang="en-US" sz="1600" dirty="0">
+                <a:latin typeface="D2Coding" panose="020B0609020101020101" pitchFamily="49" charset="-127"/>
+                <a:ea typeface="D2Coding" panose="020B0609020101020101" pitchFamily="49" charset="-127"/>
+              </a:rPr>
+              <a:t> 원본 이미지</a:t>
+            </a:r>
+            <a:endParaRPr lang="en-US" altLang="ko-KR" sz="1600" dirty="0">
+              <a:latin typeface="D2Coding" panose="020B0609020101020101" pitchFamily="49" charset="-127"/>
+              <a:ea typeface="D2Coding" panose="020B0609020101020101" pitchFamily="49" charset="-127"/>
+            </a:endParaRPr>
+          </a:p>
+        </p:txBody>
+      </p:sp>
     </p:spTree>
     <p:extLst>
       <p:ext uri="{BB962C8B-B14F-4D97-AF65-F5344CB8AC3E}">
@@ -8193,7 +10249,7 @@
         <p:cNvPr id="1" name="">
           <a:extLst>
             <a:ext uri="{FF2B5EF4-FFF2-40B4-BE49-F238E27FC236}">
-              <a16:creationId xmlns:a16="http://schemas.microsoft.com/office/drawing/2014/main" id="{289BD5F5-C4AF-0739-24BA-C8F1D4C4AFE9}"/>
+              <a16:creationId xmlns:a16="http://schemas.microsoft.com/office/drawing/2014/main" id="{865A9835-85F3-2213-EEF6-B8147D94968B}"/>
             </a:ext>
           </a:extLst>
         </p:cNvPr>
@@ -8213,7 +10269,7 @@
           <p:cNvPr id="4" name="슬라이드 번호 개체 틀 3">
             <a:extLst>
               <a:ext uri="{FF2B5EF4-FFF2-40B4-BE49-F238E27FC236}">
-                <a16:creationId xmlns:a16="http://schemas.microsoft.com/office/drawing/2014/main" id="{77C5A695-564F-1896-5C51-012FD575E329}"/>
+                <a16:creationId xmlns:a16="http://schemas.microsoft.com/office/drawing/2014/main" id="{EC0BED23-A46F-CA59-BC3D-4276719A7D0A}"/>
               </a:ext>
             </a:extLst>
           </p:cNvPr>
@@ -8248,7 +10304,7 @@
           <p:cNvPr id="3" name="제목 1">
             <a:extLst>
               <a:ext uri="{FF2B5EF4-FFF2-40B4-BE49-F238E27FC236}">
-                <a16:creationId xmlns:a16="http://schemas.microsoft.com/office/drawing/2014/main" id="{2001CBBD-742B-8439-582B-25A1E68B9FAA}"/>
+                <a16:creationId xmlns:a16="http://schemas.microsoft.com/office/drawing/2014/main" id="{72A35549-9752-429B-F531-B1D598DC4DA7}"/>
               </a:ext>
             </a:extLst>
           </p:cNvPr>
@@ -8293,256 +10349,20 @@
           <a:p>
             <a:pPr algn="l"/>
             <a:r>
-              <a:rPr lang="en-US" altLang="ko-KR" sz="2900" b="1" cap="none" dirty="0">
+              <a:rPr lang="en-US" altLang="ko-KR" sz="2800" b="1" cap="none" dirty="0">
                 <a:latin typeface="Lora" pitchFamily="2" charset="0"/>
               </a:rPr>
-              <a:t>Manifold</a:t>
-            </a:r>
-          </a:p>
-        </p:txBody>
-      </p:sp>
-      <p:sp>
-        <p:nvSpPr>
-          <p:cNvPr id="6" name="TextBox 5">
-            <a:extLst>
-              <a:ext uri="{FF2B5EF4-FFF2-40B4-BE49-F238E27FC236}">
-                <a16:creationId xmlns:a16="http://schemas.microsoft.com/office/drawing/2014/main" id="{201C9B22-1A95-035A-0631-7E94024D966B}"/>
-              </a:ext>
-            </a:extLst>
-          </p:cNvPr>
-          <p:cNvSpPr txBox="1"/>
-          <p:nvPr/>
-        </p:nvSpPr>
-        <p:spPr>
-          <a:xfrm>
-            <a:off x="599470" y="1238161"/>
-            <a:ext cx="11135330" cy="1296317"/>
-          </a:xfrm>
-          <a:prstGeom prst="rect">
-            <a:avLst/>
-          </a:prstGeom>
-          <a:noFill/>
-        </p:spPr>
-        <p:txBody>
-          <a:bodyPr wrap="square">
-            <a:spAutoFit/>
-          </a:bodyPr>
-          <a:lstStyle/>
-          <a:p>
-            <a:pPr>
-              <a:lnSpc>
-                <a:spcPct val="150000"/>
-              </a:lnSpc>
-            </a:pPr>
-            <a:r>
-              <a:rPr lang="ko-KR" altLang="en-US" dirty="0">
-                <a:latin typeface="D2Coding" panose="020B0609020101020101" pitchFamily="49" charset="-127"/>
-                <a:ea typeface="D2Coding" panose="020B0609020101020101" pitchFamily="49" charset="-127"/>
-              </a:rPr>
-              <a:t>아래 그림처럼 종이 한 장을 떠올려 보세요</a:t>
-            </a:r>
-            <a:r>
-              <a:rPr lang="en-US" altLang="ko-KR" dirty="0">
-                <a:latin typeface="D2Coding" panose="020B0609020101020101" pitchFamily="49" charset="-127"/>
-                <a:ea typeface="D2Coding" panose="020B0609020101020101" pitchFamily="49" charset="-127"/>
-              </a:rPr>
-              <a:t>.</a:t>
-            </a:r>
-            <a:r>
-              <a:rPr lang="ko-KR" altLang="en-US" dirty="0">
-                <a:latin typeface="D2Coding" panose="020B0609020101020101" pitchFamily="49" charset="-127"/>
-                <a:ea typeface="D2Coding" panose="020B0609020101020101" pitchFamily="49" charset="-127"/>
-              </a:rPr>
-              <a:t> 종이는 우리가 살아가는 </a:t>
-            </a:r>
-            <a:r>
-              <a:rPr lang="en-US" altLang="ko-KR" dirty="0">
-                <a:latin typeface="D2Coding" panose="020B0609020101020101" pitchFamily="49" charset="-127"/>
-                <a:ea typeface="D2Coding" panose="020B0609020101020101" pitchFamily="49" charset="-127"/>
-              </a:rPr>
-              <a:t>3</a:t>
-            </a:r>
-            <a:r>
-              <a:rPr lang="ko-KR" altLang="en-US" dirty="0">
-                <a:latin typeface="D2Coding" panose="020B0609020101020101" pitchFamily="49" charset="-127"/>
-                <a:ea typeface="D2Coding" panose="020B0609020101020101" pitchFamily="49" charset="-127"/>
-              </a:rPr>
-              <a:t>차원 공간 속에 존재하는 </a:t>
-            </a:r>
-            <a:r>
-              <a:rPr lang="en-US" altLang="ko-KR" dirty="0">
-                <a:latin typeface="D2Coding" panose="020B0609020101020101" pitchFamily="49" charset="-127"/>
-                <a:ea typeface="D2Coding" panose="020B0609020101020101" pitchFamily="49" charset="-127"/>
-              </a:rPr>
-              <a:t>2</a:t>
-            </a:r>
-            <a:r>
-              <a:rPr lang="ko-KR" altLang="en-US" dirty="0">
-                <a:latin typeface="D2Coding" panose="020B0609020101020101" pitchFamily="49" charset="-127"/>
-                <a:ea typeface="D2Coding" panose="020B0609020101020101" pitchFamily="49" charset="-127"/>
-              </a:rPr>
-              <a:t>차원 물체로</a:t>
-            </a:r>
-            <a:r>
-              <a:rPr lang="en-US" altLang="ko-KR" dirty="0">
-                <a:latin typeface="D2Coding" panose="020B0609020101020101" pitchFamily="49" charset="-127"/>
-                <a:ea typeface="D2Coding" panose="020B0609020101020101" pitchFamily="49" charset="-127"/>
-              </a:rPr>
-              <a:t> </a:t>
-            </a:r>
-            <a:r>
-              <a:rPr lang="ko-KR" altLang="en-US" dirty="0">
-                <a:latin typeface="D2Coding" panose="020B0609020101020101" pitchFamily="49" charset="-127"/>
-                <a:ea typeface="D2Coding" panose="020B0609020101020101" pitchFamily="49" charset="-127"/>
-              </a:rPr>
-              <a:t>구부리거나 말거나</a:t>
-            </a:r>
-            <a:r>
-              <a:rPr lang="en-US" altLang="ko-KR" dirty="0">
-                <a:latin typeface="D2Coding" panose="020B0609020101020101" pitchFamily="49" charset="-127"/>
-                <a:ea typeface="D2Coding" panose="020B0609020101020101" pitchFamily="49" charset="-127"/>
-              </a:rPr>
-              <a:t> </a:t>
-            </a:r>
-            <a:r>
-              <a:rPr lang="ko-KR" altLang="en-US" dirty="0">
-                <a:latin typeface="D2Coding" panose="020B0609020101020101" pitchFamily="49" charset="-127"/>
-                <a:ea typeface="D2Coding" panose="020B0609020101020101" pitchFamily="49" charset="-127"/>
-              </a:rPr>
-              <a:t>구길수 있지만</a:t>
-            </a:r>
-            <a:r>
-              <a:rPr lang="en-US" altLang="ko-KR" dirty="0">
-                <a:latin typeface="D2Coding" panose="020B0609020101020101" pitchFamily="49" charset="-127"/>
-                <a:ea typeface="D2Coding" panose="020B0609020101020101" pitchFamily="49" charset="-127"/>
-              </a:rPr>
-              <a:t>, </a:t>
-            </a:r>
-            <a:r>
-              <a:rPr lang="ko-KR" altLang="en-US" dirty="0">
-                <a:latin typeface="D2Coding" panose="020B0609020101020101" pitchFamily="49" charset="-127"/>
-                <a:ea typeface="D2Coding" panose="020B0609020101020101" pitchFamily="49" charset="-127"/>
-              </a:rPr>
-              <a:t>이러한 변형은 종이 자체의 </a:t>
-            </a:r>
-            <a:r>
-              <a:rPr lang="en-US" altLang="ko-KR" dirty="0">
-                <a:latin typeface="D2Coding" panose="020B0609020101020101" pitchFamily="49" charset="-127"/>
-                <a:ea typeface="D2Coding" panose="020B0609020101020101" pitchFamily="49" charset="-127"/>
-              </a:rPr>
-              <a:t>2</a:t>
-            </a:r>
-            <a:r>
-              <a:rPr lang="ko-KR" altLang="en-US" dirty="0">
-                <a:latin typeface="D2Coding" panose="020B0609020101020101" pitchFamily="49" charset="-127"/>
-                <a:ea typeface="D2Coding" panose="020B0609020101020101" pitchFamily="49" charset="-127"/>
-              </a:rPr>
-              <a:t>차원</a:t>
-            </a:r>
-            <a:r>
-              <a:rPr lang="en-US" altLang="ko-KR" dirty="0">
-                <a:latin typeface="D2Coding" panose="020B0609020101020101" pitchFamily="49" charset="-127"/>
-                <a:ea typeface="D2Coding" panose="020B0609020101020101" pitchFamily="49" charset="-127"/>
-              </a:rPr>
-              <a:t>(Intrinsic 2 dimension)</a:t>
-            </a:r>
-            <a:r>
-              <a:rPr lang="ko-KR" altLang="en-US" dirty="0">
-                <a:latin typeface="D2Coding" panose="020B0609020101020101" pitchFamily="49" charset="-127"/>
-                <a:ea typeface="D2Coding" panose="020B0609020101020101" pitchFamily="49" charset="-127"/>
-              </a:rPr>
-              <a:t> 구조 안에서 일어납니다</a:t>
-            </a:r>
-            <a:r>
-              <a:rPr lang="en-US" altLang="ko-KR" dirty="0">
-                <a:latin typeface="D2Coding" panose="020B0609020101020101" pitchFamily="49" charset="-127"/>
-                <a:ea typeface="D2Coding" panose="020B0609020101020101" pitchFamily="49" charset="-127"/>
-              </a:rPr>
-              <a:t>. </a:t>
-            </a:r>
-            <a:r>
-              <a:rPr lang="ko-KR" altLang="en-US" b="1" dirty="0">
-                <a:latin typeface="D2Coding" panose="020B0609020101020101" pitchFamily="49" charset="-127"/>
-                <a:ea typeface="D2Coding" panose="020B0609020101020101" pitchFamily="49" charset="-127"/>
-              </a:rPr>
-              <a:t>이 종이가 </a:t>
-            </a:r>
-            <a:r>
-              <a:rPr lang="en-US" altLang="ko-KR" b="1" dirty="0">
-                <a:latin typeface="D2Coding" panose="020B0609020101020101" pitchFamily="49" charset="-127"/>
-                <a:ea typeface="D2Coding" panose="020B0609020101020101" pitchFamily="49" charset="-127"/>
-              </a:rPr>
-              <a:t>3</a:t>
-            </a:r>
-            <a:r>
-              <a:rPr lang="ko-KR" altLang="en-US" b="1" dirty="0">
-                <a:latin typeface="D2Coding" panose="020B0609020101020101" pitchFamily="49" charset="-127"/>
-                <a:ea typeface="D2Coding" panose="020B0609020101020101" pitchFamily="49" charset="-127"/>
-              </a:rPr>
-              <a:t>차원 공간에 </a:t>
-            </a:r>
-            <a:r>
-              <a:rPr lang="ko-KR" altLang="en-US" b="1" dirty="0" err="1">
-                <a:latin typeface="D2Coding" panose="020B0609020101020101" pitchFamily="49" charset="-127"/>
-                <a:ea typeface="D2Coding" panose="020B0609020101020101" pitchFamily="49" charset="-127"/>
-              </a:rPr>
-              <a:t>임베딩</a:t>
-            </a:r>
-            <a:r>
-              <a:rPr lang="en-US" altLang="ko-KR" b="1" dirty="0">
-                <a:latin typeface="D2Coding" panose="020B0609020101020101" pitchFamily="49" charset="-127"/>
-                <a:ea typeface="D2Coding" panose="020B0609020101020101" pitchFamily="49" charset="-127"/>
-              </a:rPr>
-              <a:t>(embedded)</a:t>
-            </a:r>
-            <a:r>
-              <a:rPr lang="ko-KR" altLang="en-US" b="1" dirty="0">
-                <a:latin typeface="D2Coding" panose="020B0609020101020101" pitchFamily="49" charset="-127"/>
-                <a:ea typeface="D2Coding" panose="020B0609020101020101" pitchFamily="49" charset="-127"/>
-              </a:rPr>
-              <a:t>된 </a:t>
-            </a:r>
-            <a:r>
-              <a:rPr lang="en-US" altLang="ko-KR" b="1" dirty="0">
-                <a:latin typeface="D2Coding" panose="020B0609020101020101" pitchFamily="49" charset="-127"/>
-                <a:ea typeface="D2Coding" panose="020B0609020101020101" pitchFamily="49" charset="-127"/>
-              </a:rPr>
-              <a:t>2</a:t>
-            </a:r>
-            <a:r>
-              <a:rPr lang="ko-KR" altLang="en-US" b="1" dirty="0">
-                <a:latin typeface="D2Coding" panose="020B0609020101020101" pitchFamily="49" charset="-127"/>
-                <a:ea typeface="D2Coding" panose="020B0609020101020101" pitchFamily="49" charset="-127"/>
-              </a:rPr>
-              <a:t>차원 </a:t>
-            </a:r>
-            <a:r>
-              <a:rPr lang="ko-KR" altLang="en-US" b="1" dirty="0" err="1">
-                <a:latin typeface="D2Coding" panose="020B0609020101020101" pitchFamily="49" charset="-127"/>
-                <a:ea typeface="D2Coding" panose="020B0609020101020101" pitchFamily="49" charset="-127"/>
-              </a:rPr>
-              <a:t>매니폴드</a:t>
-            </a:r>
-            <a:r>
-              <a:rPr lang="en-US" altLang="ko-KR" b="1" dirty="0">
-                <a:latin typeface="D2Coding" panose="020B0609020101020101" pitchFamily="49" charset="-127"/>
-                <a:ea typeface="D2Coding" panose="020B0609020101020101" pitchFamily="49" charset="-127"/>
-              </a:rPr>
-              <a:t>(manifold)</a:t>
-            </a:r>
-            <a:endParaRPr lang="ko-KR" altLang="en-US" b="1" dirty="0">
-              <a:latin typeface="D2Coding" panose="020B0609020101020101" pitchFamily="49" charset="-127"/>
-              <a:ea typeface="D2Coding" panose="020B0609020101020101" pitchFamily="49" charset="-127"/>
-            </a:endParaRPr>
+              <a:t>Homework1_spurious correlations</a:t>
+            </a:r>
           </a:p>
         </p:txBody>
       </p:sp>
       <p:pic>
         <p:nvPicPr>
-          <p:cNvPr id="9220" name="Picture 4" descr="3d 렌더링, 빈 페이지가 있는 추상 배경, 모서리가 말린 백서, 스크롤된 문서, 비즈니스 템플릿">
+          <p:cNvPr id="16386" name="Picture 2">
             <a:extLst>
               <a:ext uri="{FF2B5EF4-FFF2-40B4-BE49-F238E27FC236}">
-                <a16:creationId xmlns:a16="http://schemas.microsoft.com/office/drawing/2014/main" id="{0091CADD-5F60-3E66-4507-BCB3669910C2}"/>
+                <a16:creationId xmlns:a16="http://schemas.microsoft.com/office/drawing/2014/main" id="{3E884927-57A4-A84A-D36D-D7F951CD3821}"/>
               </a:ext>
             </a:extLst>
           </p:cNvPr>
@@ -8566,8 +10386,8 @@
         </p:blipFill>
         <p:spPr bwMode="auto">
           <a:xfrm>
-            <a:off x="714895" y="3017707"/>
-            <a:ext cx="4828656" cy="2716826"/>
+            <a:off x="690880" y="1884948"/>
+            <a:ext cx="5486400" cy="4333875"/>
           </a:xfrm>
           <a:prstGeom prst="rect">
             <a:avLst/>
@@ -8586,10 +10406,10 @@
       </p:pic>
       <p:sp>
         <p:nvSpPr>
-          <p:cNvPr id="8" name="TextBox 7">
+          <p:cNvPr id="2" name="TextBox 1">
             <a:extLst>
               <a:ext uri="{FF2B5EF4-FFF2-40B4-BE49-F238E27FC236}">
-                <a16:creationId xmlns:a16="http://schemas.microsoft.com/office/drawing/2014/main" id="{06FC1E48-A3C7-643D-42AF-6CB23B585005}"/>
+                <a16:creationId xmlns:a16="http://schemas.microsoft.com/office/drawing/2014/main" id="{54F409DE-C93C-0141-468F-E29C78398B08}"/>
               </a:ext>
             </a:extLst>
           </p:cNvPr>
@@ -8598,8 +10418,8 @@
         </p:nvSpPr>
         <p:spPr>
           <a:xfrm>
-            <a:off x="5790680" y="3017707"/>
-            <a:ext cx="5944120" cy="2752357"/>
+            <a:off x="6289040" y="1884948"/>
+            <a:ext cx="5486400" cy="2800767"/>
           </a:xfrm>
           <a:prstGeom prst="rect">
             <a:avLst/>
@@ -8614,175 +10434,100 @@
           <a:p>
             <a:pPr marL="285750" indent="-285750">
               <a:buFont typeface="Wingdings" panose="05000000000000000000" pitchFamily="2" charset="2"/>
-              <a:buChar char="§"/>
+              <a:buChar char="v"/>
             </a:pPr>
             <a:r>
-              <a:rPr lang="ko-KR" altLang="en-US" sz="1400" dirty="0">
-                <a:latin typeface="D2Coding" panose="020B0609020101020101" pitchFamily="49" charset="-127"/>
-                <a:ea typeface="D2Coding" panose="020B0609020101020101" pitchFamily="49" charset="-127"/>
-              </a:rPr>
-              <a:t>외재 차원</a:t>
-            </a:r>
-            <a:r>
-              <a:rPr lang="en-US" altLang="ko-KR" sz="1400" dirty="0">
-                <a:latin typeface="D2Coding" panose="020B0609020101020101" pitchFamily="49" charset="-127"/>
-                <a:ea typeface="D2Coding" panose="020B0609020101020101" pitchFamily="49" charset="-127"/>
-              </a:rPr>
-              <a:t>(Extrinsic Dimension): </a:t>
-            </a:r>
-            <a:r>
-              <a:rPr lang="ko-KR" altLang="en-US" sz="1400" dirty="0">
-                <a:latin typeface="D2Coding" panose="020B0609020101020101" pitchFamily="49" charset="-127"/>
-                <a:ea typeface="D2Coding" panose="020B0609020101020101" pitchFamily="49" charset="-127"/>
-              </a:rPr>
-              <a:t>종이가 존재하는 공간 </a:t>
-            </a:r>
-            <a:r>
-              <a:rPr lang="en-US" altLang="ko-KR" sz="1400" dirty="0">
-                <a:latin typeface="D2Coding" panose="020B0609020101020101" pitchFamily="49" charset="-127"/>
-                <a:ea typeface="D2Coding" panose="020B0609020101020101" pitchFamily="49" charset="-127"/>
-              </a:rPr>
-              <a:t>3</a:t>
-            </a:r>
-            <a:r>
-              <a:rPr lang="ko-KR" altLang="en-US" sz="1400" dirty="0">
-                <a:latin typeface="D2Coding" panose="020B0609020101020101" pitchFamily="49" charset="-127"/>
-                <a:ea typeface="D2Coding" panose="020B0609020101020101" pitchFamily="49" charset="-127"/>
-              </a:rPr>
-              <a:t>차원</a:t>
-            </a:r>
-          </a:p>
-          <a:p>
-            <a:pPr marL="285750" indent="-285750">
-              <a:buFont typeface="Wingdings" panose="05000000000000000000" pitchFamily="2" charset="2"/>
-              <a:buChar char="§"/>
-            </a:pPr>
-            <a:r>
-              <a:rPr lang="ko-KR" altLang="en-US" sz="1400" dirty="0">
-                <a:latin typeface="D2Coding" panose="020B0609020101020101" pitchFamily="49" charset="-127"/>
-                <a:ea typeface="D2Coding" panose="020B0609020101020101" pitchFamily="49" charset="-127"/>
-              </a:rPr>
-              <a:t>내재 차원</a:t>
-            </a:r>
-            <a:r>
-              <a:rPr lang="en-US" altLang="ko-KR" sz="1400" dirty="0">
-                <a:latin typeface="D2Coding" panose="020B0609020101020101" pitchFamily="49" charset="-127"/>
-                <a:ea typeface="D2Coding" panose="020B0609020101020101" pitchFamily="49" charset="-127"/>
-              </a:rPr>
-              <a:t>(Intrinsic Dimension): </a:t>
-            </a:r>
-            <a:r>
-              <a:rPr lang="ko-KR" altLang="en-US" sz="1400" dirty="0">
-                <a:latin typeface="D2Coding" panose="020B0609020101020101" pitchFamily="49" charset="-127"/>
-                <a:ea typeface="D2Coding" panose="020B0609020101020101" pitchFamily="49" charset="-127"/>
-              </a:rPr>
-              <a:t>종이 자체의 </a:t>
-            </a:r>
-            <a:r>
-              <a:rPr lang="en-US" altLang="ko-KR" sz="1400" dirty="0">
-                <a:latin typeface="D2Coding" panose="020B0609020101020101" pitchFamily="49" charset="-127"/>
-                <a:ea typeface="D2Coding" panose="020B0609020101020101" pitchFamily="49" charset="-127"/>
-              </a:rPr>
-              <a:t>2</a:t>
-            </a:r>
-            <a:r>
-              <a:rPr lang="ko-KR" altLang="en-US" sz="1400" dirty="0">
-                <a:latin typeface="D2Coding" panose="020B0609020101020101" pitchFamily="49" charset="-127"/>
-                <a:ea typeface="D2Coding" panose="020B0609020101020101" pitchFamily="49" charset="-127"/>
-              </a:rPr>
-              <a:t>차원 </a:t>
-            </a:r>
-          </a:p>
-          <a:p>
-            <a:pPr marL="285750" indent="-285750">
-              <a:buFont typeface="Wingdings" panose="05000000000000000000" pitchFamily="2" charset="2"/>
-              <a:buChar char="§"/>
-            </a:pPr>
-            <a:r>
-              <a:rPr lang="ko-KR" altLang="en-US" sz="1400" dirty="0" err="1">
-                <a:latin typeface="D2Coding" panose="020B0609020101020101" pitchFamily="49" charset="-127"/>
-                <a:ea typeface="D2Coding" panose="020B0609020101020101" pitchFamily="49" charset="-127"/>
-              </a:rPr>
-              <a:t>임베딩</a:t>
-            </a:r>
-            <a:r>
-              <a:rPr lang="en-US" altLang="ko-KR" sz="1400" dirty="0">
-                <a:latin typeface="D2Coding" panose="020B0609020101020101" pitchFamily="49" charset="-127"/>
-                <a:ea typeface="D2Coding" panose="020B0609020101020101" pitchFamily="49" charset="-127"/>
-              </a:rPr>
-              <a:t>(Embedding): </a:t>
-            </a:r>
-            <a:r>
-              <a:rPr lang="ko-KR" altLang="en-US" sz="1400" dirty="0">
-                <a:latin typeface="D2Coding" panose="020B0609020101020101" pitchFamily="49" charset="-127"/>
-                <a:ea typeface="D2Coding" panose="020B0609020101020101" pitchFamily="49" charset="-127"/>
-              </a:rPr>
-              <a:t>낮은 차원의 구조</a:t>
-            </a:r>
-            <a:r>
-              <a:rPr lang="en-US" altLang="ko-KR" sz="1400" dirty="0">
+              <a:rPr lang="en-US" altLang="ko-KR" sz="1600" dirty="0">
+                <a:latin typeface="D2Coding" panose="020B0609020101020101" pitchFamily="49" charset="-127"/>
+                <a:ea typeface="D2Coding" panose="020B0609020101020101" pitchFamily="49" charset="-127"/>
+              </a:rPr>
+              <a:t>W</a:t>
+            </a:r>
+            <a:r>
+              <a:rPr lang="ko-KR" altLang="en-US" sz="1600" dirty="0" err="1">
+                <a:latin typeface="D2Coding" panose="020B0609020101020101" pitchFamily="49" charset="-127"/>
+                <a:ea typeface="D2Coding" panose="020B0609020101020101" pitchFamily="49" charset="-127"/>
+              </a:rPr>
+              <a:t>hite</a:t>
+            </a:r>
+            <a:r>
+              <a:rPr lang="ko-KR" altLang="en-US" sz="1600" dirty="0">
+                <a:latin typeface="D2Coding" panose="020B0609020101020101" pitchFamily="49" charset="-127"/>
+                <a:ea typeface="D2Coding" panose="020B0609020101020101" pitchFamily="49" charset="-127"/>
+              </a:rPr>
+              <a:t> </a:t>
+            </a:r>
+            <a:r>
+              <a:rPr lang="ko-KR" altLang="en-US" sz="1600" dirty="0" err="1">
+                <a:latin typeface="D2Coding" panose="020B0609020101020101" pitchFamily="49" charset="-127"/>
+                <a:ea typeface="D2Coding" panose="020B0609020101020101" pitchFamily="49" charset="-127"/>
+              </a:rPr>
+              <a:t>noise는</a:t>
+            </a:r>
+            <a:r>
+              <a:rPr lang="ko-KR" altLang="en-US" sz="1600" dirty="0">
+                <a:latin typeface="D2Coding" panose="020B0609020101020101" pitchFamily="49" charset="-127"/>
+                <a:ea typeface="D2Coding" panose="020B0609020101020101" pitchFamily="49" charset="-127"/>
+              </a:rPr>
+              <a:t> 상관관계(</a:t>
+            </a:r>
+            <a:r>
+              <a:rPr lang="ko-KR" altLang="en-US" sz="1600" dirty="0" err="1">
+                <a:latin typeface="D2Coding" panose="020B0609020101020101" pitchFamily="49" charset="-127"/>
+                <a:ea typeface="D2Coding" panose="020B0609020101020101" pitchFamily="49" charset="-127"/>
+              </a:rPr>
+              <a:t>spurious</a:t>
+            </a:r>
+            <a:r>
+              <a:rPr lang="ko-KR" altLang="en-US" sz="1600" dirty="0">
+                <a:latin typeface="D2Coding" panose="020B0609020101020101" pitchFamily="49" charset="-127"/>
+                <a:ea typeface="D2Coding" panose="020B0609020101020101" pitchFamily="49" charset="-127"/>
+              </a:rPr>
+              <a:t> </a:t>
+            </a:r>
+            <a:r>
+              <a:rPr lang="ko-KR" altLang="en-US" sz="1600" dirty="0" err="1">
+                <a:latin typeface="D2Coding" panose="020B0609020101020101" pitchFamily="49" charset="-127"/>
+                <a:ea typeface="D2Coding" panose="020B0609020101020101" pitchFamily="49" charset="-127"/>
+              </a:rPr>
+              <a:t>correlation</a:t>
+            </a:r>
+            <a:r>
+              <a:rPr lang="ko-KR" altLang="en-US" sz="1600" dirty="0">
+                <a:latin typeface="D2Coding" panose="020B0609020101020101" pitchFamily="49" charset="-127"/>
+                <a:ea typeface="D2Coding" panose="020B0609020101020101" pitchFamily="49" charset="-127"/>
+              </a:rPr>
+              <a:t>)를 만들어 모델이 이를 학습하여 훈련 데이터에는 잘 맞지만 새로운 검증 데이터에서는 성능이 떨어지는 </a:t>
+            </a:r>
+            <a:r>
+              <a:rPr lang="ko-KR" altLang="en-US" sz="1600" dirty="0" err="1">
+                <a:latin typeface="D2Coding" panose="020B0609020101020101" pitchFamily="49" charset="-127"/>
+                <a:ea typeface="D2Coding" panose="020B0609020101020101" pitchFamily="49" charset="-127"/>
+              </a:rPr>
+              <a:t>과적합</a:t>
+            </a:r>
+            <a:r>
+              <a:rPr lang="ko-KR" altLang="en-US" sz="1600" dirty="0">
                 <a:latin typeface="D2Coding" panose="020B0609020101020101" pitchFamily="49" charset="-127"/>
                 <a:ea typeface="D2Coding" panose="020B0609020101020101" pitchFamily="49" charset="-127"/>
               </a:rPr>
               <a:t>(</a:t>
             </a:r>
             <a:r>
-              <a:rPr lang="ko-KR" altLang="en-US" sz="1400" dirty="0">
-                <a:latin typeface="D2Coding" panose="020B0609020101020101" pitchFamily="49" charset="-127"/>
-                <a:ea typeface="D2Coding" panose="020B0609020101020101" pitchFamily="49" charset="-127"/>
-              </a:rPr>
-              <a:t>종이</a:t>
-            </a:r>
-            <a:r>
-              <a:rPr lang="en-US" altLang="ko-KR" sz="1400" dirty="0">
-                <a:latin typeface="D2Coding" panose="020B0609020101020101" pitchFamily="49" charset="-127"/>
-                <a:ea typeface="D2Coding" panose="020B0609020101020101" pitchFamily="49" charset="-127"/>
-              </a:rPr>
-              <a:t>)</a:t>
-            </a:r>
-            <a:r>
-              <a:rPr lang="ko-KR" altLang="en-US" sz="1400" dirty="0">
-                <a:latin typeface="D2Coding" panose="020B0609020101020101" pitchFamily="49" charset="-127"/>
-                <a:ea typeface="D2Coding" panose="020B0609020101020101" pitchFamily="49" charset="-127"/>
-              </a:rPr>
-              <a:t>가 더 높은 차원의 공간</a:t>
-            </a:r>
-            <a:r>
-              <a:rPr lang="en-US" altLang="ko-KR" sz="1400" dirty="0">
-                <a:latin typeface="D2Coding" panose="020B0609020101020101" pitchFamily="49" charset="-127"/>
-                <a:ea typeface="D2Coding" panose="020B0609020101020101" pitchFamily="49" charset="-127"/>
-              </a:rPr>
-              <a:t>(3</a:t>
-            </a:r>
-            <a:r>
-              <a:rPr lang="ko-KR" altLang="en-US" sz="1400" dirty="0">
-                <a:latin typeface="D2Coding" panose="020B0609020101020101" pitchFamily="49" charset="-127"/>
-                <a:ea typeface="D2Coding" panose="020B0609020101020101" pitchFamily="49" charset="-127"/>
-              </a:rPr>
-              <a:t>차원</a:t>
-            </a:r>
-            <a:r>
-              <a:rPr lang="en-US" altLang="ko-KR" sz="1400" dirty="0">
-                <a:latin typeface="D2Coding" panose="020B0609020101020101" pitchFamily="49" charset="-127"/>
-                <a:ea typeface="D2Coding" panose="020B0609020101020101" pitchFamily="49" charset="-127"/>
-              </a:rPr>
-              <a:t>)</a:t>
-            </a:r>
-            <a:r>
-              <a:rPr lang="ko-KR" altLang="en-US" sz="1400" dirty="0">
-                <a:latin typeface="D2Coding" panose="020B0609020101020101" pitchFamily="49" charset="-127"/>
-                <a:ea typeface="D2Coding" panose="020B0609020101020101" pitchFamily="49" charset="-127"/>
-              </a:rPr>
-              <a:t>에 놓여 있음</a:t>
-            </a:r>
-            <a:r>
-              <a:rPr lang="en-US" altLang="ko-KR" sz="1400" dirty="0">
-                <a:latin typeface="D2Coding" panose="020B0609020101020101" pitchFamily="49" charset="-127"/>
-                <a:ea typeface="D2Coding" panose="020B0609020101020101" pitchFamily="49" charset="-127"/>
-              </a:rPr>
-              <a:t>(Embedded)</a:t>
-            </a:r>
-            <a:endParaRPr lang="ko-KR" altLang="en-US" sz="1400" dirty="0">
+              <a:rPr lang="ko-KR" altLang="en-US" sz="1600" dirty="0" err="1">
+                <a:latin typeface="D2Coding" panose="020B0609020101020101" pitchFamily="49" charset="-127"/>
+                <a:ea typeface="D2Coding" panose="020B0609020101020101" pitchFamily="49" charset="-127"/>
+              </a:rPr>
+              <a:t>overfitting</a:t>
+            </a:r>
+            <a:r>
+              <a:rPr lang="ko-KR" altLang="en-US" sz="1600" dirty="0">
+                <a:latin typeface="D2Coding" panose="020B0609020101020101" pitchFamily="49" charset="-127"/>
+                <a:ea typeface="D2Coding" panose="020B0609020101020101" pitchFamily="49" charset="-127"/>
+              </a:rPr>
+              <a:t>)이 발생</a:t>
+            </a:r>
+            <a:endParaRPr lang="en-US" altLang="ko-KR" sz="1600" dirty="0">
               <a:latin typeface="D2Coding" panose="020B0609020101020101" pitchFamily="49" charset="-127"/>
               <a:ea typeface="D2Coding" panose="020B0609020101020101" pitchFamily="49" charset="-127"/>
             </a:endParaRPr>
@@ -8790,204 +10535,144 @@
           <a:p>
             <a:pPr marL="285750" indent="-285750">
               <a:buFont typeface="Wingdings" panose="05000000000000000000" pitchFamily="2" charset="2"/>
-              <a:buChar char="§"/>
+              <a:buChar char="v"/>
             </a:pPr>
-            <a:r>
-              <a:rPr lang="ko-KR" altLang="en-US" sz="1400" dirty="0" err="1">
-                <a:latin typeface="D2Coding" panose="020B0609020101020101" pitchFamily="49" charset="-127"/>
-                <a:ea typeface="D2Coding" panose="020B0609020101020101" pitchFamily="49" charset="-127"/>
-              </a:rPr>
-              <a:t>매니폴드</a:t>
-            </a:r>
-            <a:r>
-              <a:rPr lang="en-US" altLang="ko-KR" sz="1400" dirty="0">
-                <a:latin typeface="D2Coding" panose="020B0609020101020101" pitchFamily="49" charset="-127"/>
-                <a:ea typeface="D2Coding" panose="020B0609020101020101" pitchFamily="49" charset="-127"/>
-              </a:rPr>
-              <a:t>(Manifold): </a:t>
-            </a:r>
-            <a:r>
-              <a:rPr lang="ko-KR" altLang="en-US" sz="1400" dirty="0">
-                <a:latin typeface="D2Coding" panose="020B0609020101020101" pitchFamily="49" charset="-127"/>
-                <a:ea typeface="D2Coding" panose="020B0609020101020101" pitchFamily="49" charset="-127"/>
-              </a:rPr>
-              <a:t>작은 영역에서는 평평한 공간</a:t>
-            </a:r>
-            <a:r>
-              <a:rPr lang="en-US" altLang="ko-KR" sz="1400" dirty="0">
-                <a:latin typeface="D2Coding" panose="020B0609020101020101" pitchFamily="49" charset="-127"/>
-                <a:ea typeface="D2Coding" panose="020B0609020101020101" pitchFamily="49" charset="-127"/>
-              </a:rPr>
-              <a:t>(</a:t>
-            </a:r>
-            <a:r>
-              <a:rPr lang="ko-KR" altLang="en-US" sz="1400" dirty="0">
-                <a:latin typeface="D2Coding" panose="020B0609020101020101" pitchFamily="49" charset="-127"/>
-                <a:ea typeface="D2Coding" panose="020B0609020101020101" pitchFamily="49" charset="-127"/>
-              </a:rPr>
-              <a:t>유클리드 공간</a:t>
-            </a:r>
-            <a:r>
-              <a:rPr lang="en-US" altLang="ko-KR" sz="1400" dirty="0">
-                <a:latin typeface="D2Coding" panose="020B0609020101020101" pitchFamily="49" charset="-127"/>
-                <a:ea typeface="D2Coding" panose="020B0609020101020101" pitchFamily="49" charset="-127"/>
-              </a:rPr>
-              <a:t>, Locally</a:t>
-            </a:r>
-            <a:r>
-              <a:rPr lang="ko-KR" altLang="en-US" sz="1400" dirty="0">
-                <a:latin typeface="D2Coding" panose="020B0609020101020101" pitchFamily="49" charset="-127"/>
-                <a:ea typeface="D2Coding" panose="020B0609020101020101" pitchFamily="49" charset="-127"/>
-              </a:rPr>
-              <a:t> </a:t>
-            </a:r>
-            <a:r>
-              <a:rPr lang="en-US" altLang="ko-KR" sz="1400" dirty="0">
-                <a:latin typeface="D2Coding" panose="020B0609020101020101" pitchFamily="49" charset="-127"/>
-                <a:ea typeface="D2Coding" panose="020B0609020101020101" pitchFamily="49" charset="-127"/>
-              </a:rPr>
-              <a:t>Linear)</a:t>
-            </a:r>
-            <a:r>
-              <a:rPr lang="ko-KR" altLang="en-US" sz="1400" dirty="0">
-                <a:latin typeface="D2Coding" panose="020B0609020101020101" pitchFamily="49" charset="-127"/>
-                <a:ea typeface="D2Coding" panose="020B0609020101020101" pitchFamily="49" charset="-127"/>
-              </a:rPr>
-              <a:t>처럼 보이지만</a:t>
-            </a:r>
-            <a:r>
-              <a:rPr lang="en-US" altLang="ko-KR" sz="1400" dirty="0">
-                <a:latin typeface="D2Coding" panose="020B0609020101020101" pitchFamily="49" charset="-127"/>
-                <a:ea typeface="D2Coding" panose="020B0609020101020101" pitchFamily="49" charset="-127"/>
-              </a:rPr>
-              <a:t>, </a:t>
-            </a:r>
-            <a:r>
-              <a:rPr lang="ko-KR" altLang="en-US" sz="1400" dirty="0">
-                <a:latin typeface="D2Coding" panose="020B0609020101020101" pitchFamily="49" charset="-127"/>
-                <a:ea typeface="D2Coding" panose="020B0609020101020101" pitchFamily="49" charset="-127"/>
-              </a:rPr>
-              <a:t>전체적으로는 구부러질 수 있는 </a:t>
-            </a:r>
-            <a:r>
-              <a:rPr lang="ko-KR" altLang="en-US" sz="1400" dirty="0" err="1">
-                <a:latin typeface="D2Coding" panose="020B0609020101020101" pitchFamily="49" charset="-127"/>
-                <a:ea typeface="D2Coding" panose="020B0609020101020101" pitchFamily="49" charset="-127"/>
-              </a:rPr>
-              <a:t>저차원</a:t>
-            </a:r>
-            <a:r>
-              <a:rPr lang="ko-KR" altLang="en-US" sz="1400" dirty="0">
-                <a:latin typeface="D2Coding" panose="020B0609020101020101" pitchFamily="49" charset="-127"/>
-                <a:ea typeface="D2Coding" panose="020B0609020101020101" pitchFamily="49" charset="-127"/>
-              </a:rPr>
-              <a:t> 구조 </a:t>
-            </a:r>
-          </a:p>
-          <a:p>
-            <a:endParaRPr lang="en-US" altLang="ko-KR" sz="1400" dirty="0">
+            <a:endParaRPr lang="ko-KR" altLang="en-US" sz="1600" dirty="0">
               <a:latin typeface="D2Coding" panose="020B0609020101020101" pitchFamily="49" charset="-127"/>
               <a:ea typeface="D2Coding" panose="020B0609020101020101" pitchFamily="49" charset="-127"/>
             </a:endParaRPr>
           </a:p>
           <a:p>
-            <a:pPr>
-              <a:lnSpc>
-                <a:spcPct val="150000"/>
-              </a:lnSpc>
+            <a:pPr marL="285750" indent="-285750">
+              <a:buFont typeface="Wingdings" panose="05000000000000000000" pitchFamily="2" charset="2"/>
+              <a:buChar char="v"/>
             </a:pPr>
             <a:r>
-              <a:rPr lang="ko-KR" altLang="en-US" sz="1400" dirty="0">
-                <a:latin typeface="D2Coding" panose="020B0609020101020101" pitchFamily="49" charset="-127"/>
-                <a:ea typeface="D2Coding" panose="020B0609020101020101" pitchFamily="49" charset="-127"/>
-              </a:rPr>
-              <a:t>데이터가 매우 높은 차원의 공간에 존재하더라도</a:t>
-            </a:r>
-            <a:r>
-              <a:rPr lang="en-US" altLang="ko-KR" sz="1400" dirty="0">
-                <a:latin typeface="D2Coding" panose="020B0609020101020101" pitchFamily="49" charset="-127"/>
-                <a:ea typeface="D2Coding" panose="020B0609020101020101" pitchFamily="49" charset="-127"/>
-              </a:rPr>
-              <a:t>, </a:t>
-            </a:r>
-            <a:r>
-              <a:rPr lang="ko-KR" altLang="en-US" sz="1400" dirty="0">
-                <a:latin typeface="D2Coding" panose="020B0609020101020101" pitchFamily="49" charset="-127"/>
-                <a:ea typeface="D2Coding" panose="020B0609020101020101" pitchFamily="49" charset="-127"/>
-              </a:rPr>
-              <a:t>실제로는 그 안의 훨씬 낮은 차원의 구조</a:t>
-            </a:r>
-            <a:r>
-              <a:rPr lang="en-US" altLang="ko-KR" sz="1400" dirty="0">
+              <a:rPr lang="ko-KR" altLang="en-US" sz="1600" dirty="0" err="1">
+                <a:latin typeface="D2Coding" panose="020B0609020101020101" pitchFamily="49" charset="-127"/>
+                <a:ea typeface="D2Coding" panose="020B0609020101020101" pitchFamily="49" charset="-127"/>
+              </a:rPr>
+              <a:t>Zero</a:t>
+            </a:r>
+            <a:r>
+              <a:rPr lang="ko-KR" altLang="en-US" sz="1600" dirty="0">
+                <a:latin typeface="D2Coding" panose="020B0609020101020101" pitchFamily="49" charset="-127"/>
+                <a:ea typeface="D2Coding" panose="020B0609020101020101" pitchFamily="49" charset="-127"/>
+              </a:rPr>
+              <a:t> </a:t>
+            </a:r>
+            <a:r>
+              <a:rPr lang="ko-KR" altLang="en-US" sz="1600" dirty="0" err="1">
+                <a:latin typeface="D2Coding" panose="020B0609020101020101" pitchFamily="49" charset="-127"/>
+                <a:ea typeface="D2Coding" panose="020B0609020101020101" pitchFamily="49" charset="-127"/>
+              </a:rPr>
+              <a:t>feature도</a:t>
+            </a:r>
+            <a:r>
+              <a:rPr lang="ko-KR" altLang="en-US" sz="1600" dirty="0">
+                <a:latin typeface="D2Coding" panose="020B0609020101020101" pitchFamily="49" charset="-127"/>
+                <a:ea typeface="D2Coding" panose="020B0609020101020101" pitchFamily="49" charset="-127"/>
+              </a:rPr>
+              <a:t> 정보는 없지만 항상 일정하므로</a:t>
+            </a:r>
+            <a:r>
+              <a:rPr lang="en-US" altLang="ko-KR" sz="1600" dirty="0">
                 <a:latin typeface="D2Coding" panose="020B0609020101020101" pitchFamily="49" charset="-127"/>
                 <a:ea typeface="D2Coding" panose="020B0609020101020101" pitchFamily="49" charset="-127"/>
               </a:rPr>
               <a:t>(</a:t>
             </a:r>
             <a:r>
-              <a:rPr lang="ko-KR" altLang="en-US" sz="1400" dirty="0" err="1">
-                <a:latin typeface="D2Coding" panose="020B0609020101020101" pitchFamily="49" charset="-127"/>
-                <a:ea typeface="D2Coding" panose="020B0609020101020101" pitchFamily="49" charset="-127"/>
-              </a:rPr>
-              <a:t>매니폴드</a:t>
-            </a:r>
-            <a:r>
-              <a:rPr lang="en-US" altLang="ko-KR" sz="1400" dirty="0">
-                <a:latin typeface="D2Coding" panose="020B0609020101020101" pitchFamily="49" charset="-127"/>
-                <a:ea typeface="D2Coding" panose="020B0609020101020101" pitchFamily="49" charset="-127"/>
-              </a:rPr>
-              <a:t>) </a:t>
-            </a:r>
-            <a:r>
-              <a:rPr lang="ko-KR" altLang="en-US" sz="1400" dirty="0">
-                <a:latin typeface="D2Coding" panose="020B0609020101020101" pitchFamily="49" charset="-127"/>
-                <a:ea typeface="D2Coding" panose="020B0609020101020101" pitchFamily="49" charset="-127"/>
-              </a:rPr>
-              <a:t>위에 분포할 수 있음 </a:t>
-            </a:r>
-            <a:r>
-              <a:rPr lang="en-US" altLang="ko-KR" sz="1400" dirty="0">
-                <a:latin typeface="D2Coding" panose="020B0609020101020101" pitchFamily="49" charset="-127"/>
-                <a:ea typeface="D2Coding" panose="020B0609020101020101" pitchFamily="49" charset="-127"/>
-              </a:rPr>
-              <a:t>(</a:t>
-            </a:r>
-            <a:r>
-              <a:rPr lang="ko-KR" altLang="en-US" sz="1400" dirty="0" err="1">
-                <a:latin typeface="D2Coding" panose="020B0609020101020101" pitchFamily="49" charset="-127"/>
-                <a:ea typeface="D2Coding" panose="020B0609020101020101" pitchFamily="49" charset="-127"/>
-              </a:rPr>
-              <a:t>딥러닝은</a:t>
-            </a:r>
-            <a:r>
-              <a:rPr lang="ko-KR" altLang="en-US" sz="1400" dirty="0">
-                <a:latin typeface="D2Coding" panose="020B0609020101020101" pitchFamily="49" charset="-127"/>
-                <a:ea typeface="D2Coding" panose="020B0609020101020101" pitchFamily="49" charset="-127"/>
-              </a:rPr>
-              <a:t> 이 </a:t>
-            </a:r>
-            <a:r>
-              <a:rPr lang="ko-KR" altLang="en-US" sz="1400" dirty="0" err="1">
-                <a:latin typeface="D2Coding" panose="020B0609020101020101" pitchFamily="49" charset="-127"/>
-                <a:ea typeface="D2Coding" panose="020B0609020101020101" pitchFamily="49" charset="-127"/>
-              </a:rPr>
-              <a:t>매니폴드의</a:t>
-            </a:r>
-            <a:r>
-              <a:rPr lang="ko-KR" altLang="en-US" sz="1400" dirty="0">
-                <a:latin typeface="D2Coding" panose="020B0609020101020101" pitchFamily="49" charset="-127"/>
-                <a:ea typeface="D2Coding" panose="020B0609020101020101" pitchFamily="49" charset="-127"/>
-              </a:rPr>
-              <a:t> 구조를 찾아냄</a:t>
-            </a:r>
-            <a:r>
-              <a:rPr lang="en-US" altLang="ko-KR" sz="1400" dirty="0">
-                <a:latin typeface="D2Coding" panose="020B0609020101020101" pitchFamily="49" charset="-127"/>
-                <a:ea typeface="D2Coding" panose="020B0609020101020101" pitchFamily="49" charset="-127"/>
-              </a:rPr>
-              <a:t>)</a:t>
-            </a:r>
-            <a:endParaRPr lang="ko-KR" altLang="en-US" sz="1400" dirty="0">
+              <a:rPr lang="ko-KR" altLang="en-US" sz="1600" dirty="0">
+                <a:latin typeface="D2Coding" panose="020B0609020101020101" pitchFamily="49" charset="-127"/>
+                <a:ea typeface="D2Coding" panose="020B0609020101020101" pitchFamily="49" charset="-127"/>
+              </a:rPr>
+              <a:t>분산</a:t>
+            </a:r>
+            <a:r>
+              <a:rPr lang="en-US" altLang="ko-KR" sz="1600" dirty="0">
+                <a:latin typeface="D2Coding" panose="020B0609020101020101" pitchFamily="49" charset="-127"/>
+                <a:ea typeface="D2Coding" panose="020B0609020101020101" pitchFamily="49" charset="-127"/>
+              </a:rPr>
+              <a:t> 0)</a:t>
+            </a:r>
+            <a:r>
+              <a:rPr lang="ko-KR" altLang="en-US" sz="1600" dirty="0">
+                <a:latin typeface="D2Coding" panose="020B0609020101020101" pitchFamily="49" charset="-127"/>
+                <a:ea typeface="D2Coding" panose="020B0609020101020101" pitchFamily="49" charset="-127"/>
+              </a:rPr>
+              <a:t> 모델이 완전히 무시</a:t>
+            </a:r>
+            <a:endParaRPr lang="en-US" altLang="ko-KR" sz="1600" dirty="0">
+              <a:latin typeface="D2Coding" panose="020B0609020101020101" pitchFamily="49" charset="-127"/>
+              <a:ea typeface="D2Coding" panose="020B0609020101020101" pitchFamily="49" charset="-127"/>
+            </a:endParaRPr>
+          </a:p>
+          <a:p>
+            <a:pPr marL="285750" indent="-285750">
+              <a:buFont typeface="Wingdings" panose="05000000000000000000" pitchFamily="2" charset="2"/>
+              <a:buChar char="v"/>
+            </a:pPr>
+            <a:endParaRPr lang="en-US" altLang="ko-KR" sz="1600" dirty="0">
+              <a:latin typeface="D2Coding" panose="020B0609020101020101" pitchFamily="49" charset="-127"/>
+              <a:ea typeface="D2Coding" panose="020B0609020101020101" pitchFamily="49" charset="-127"/>
+            </a:endParaRPr>
+          </a:p>
+          <a:p>
+            <a:pPr marL="285750" indent="-285750">
+              <a:buFont typeface="Wingdings" panose="05000000000000000000" pitchFamily="2" charset="2"/>
+              <a:buChar char="v"/>
+            </a:pPr>
+            <a:r>
+              <a:rPr lang="ko-KR" altLang="en-US" sz="1600" dirty="0">
+                <a:latin typeface="D2Coding" panose="020B0609020101020101" pitchFamily="49" charset="-127"/>
+                <a:ea typeface="D2Coding" panose="020B0609020101020101" pitchFamily="49" charset="-127"/>
+              </a:rPr>
+              <a:t>따라서 의미 없는 특징(</a:t>
+            </a:r>
+            <a:r>
+              <a:rPr lang="ko-KR" altLang="en-US" sz="1600" dirty="0" err="1">
+                <a:latin typeface="D2Coding" panose="020B0609020101020101" pitchFamily="49" charset="-127"/>
+                <a:ea typeface="D2Coding" panose="020B0609020101020101" pitchFamily="49" charset="-127"/>
+              </a:rPr>
+              <a:t>feature</a:t>
+            </a:r>
+            <a:r>
+              <a:rPr lang="ko-KR" altLang="en-US" sz="1600" dirty="0">
+                <a:latin typeface="D2Coding" panose="020B0609020101020101" pitchFamily="49" charset="-127"/>
+                <a:ea typeface="D2Coding" panose="020B0609020101020101" pitchFamily="49" charset="-127"/>
+              </a:rPr>
+              <a:t>)이 많을수록 일반화 성능은 악화될 수 있으며, 이를 줄이기 위해 </a:t>
+            </a:r>
+            <a:r>
+              <a:rPr lang="ko-KR" altLang="en-US" sz="1600" dirty="0" err="1">
+                <a:latin typeface="D2Coding" panose="020B0609020101020101" pitchFamily="49" charset="-127"/>
+                <a:ea typeface="D2Coding" panose="020B0609020101020101" pitchFamily="49" charset="-127"/>
+              </a:rPr>
+              <a:t>Feature</a:t>
+            </a:r>
+            <a:r>
+              <a:rPr lang="ko-KR" altLang="en-US" sz="1600" dirty="0">
+                <a:latin typeface="D2Coding" panose="020B0609020101020101" pitchFamily="49" charset="-127"/>
+                <a:ea typeface="D2Coding" panose="020B0609020101020101" pitchFamily="49" charset="-127"/>
+              </a:rPr>
+              <a:t> </a:t>
+            </a:r>
+            <a:r>
+              <a:rPr lang="ko-KR" altLang="en-US" sz="1600" dirty="0" err="1">
+                <a:latin typeface="D2Coding" panose="020B0609020101020101" pitchFamily="49" charset="-127"/>
+                <a:ea typeface="D2Coding" panose="020B0609020101020101" pitchFamily="49" charset="-127"/>
+              </a:rPr>
+              <a:t>Selection이</a:t>
+            </a:r>
+            <a:r>
+              <a:rPr lang="ko-KR" altLang="en-US" sz="1600" dirty="0">
+                <a:latin typeface="D2Coding" panose="020B0609020101020101" pitchFamily="49" charset="-127"/>
+                <a:ea typeface="D2Coding" panose="020B0609020101020101" pitchFamily="49" charset="-127"/>
+              </a:rPr>
+              <a:t> 중요</a:t>
+            </a:r>
+            <a:endParaRPr lang="en-US" altLang="ko-KR" sz="1600" dirty="0">
               <a:latin typeface="D2Coding" panose="020B0609020101020101" pitchFamily="49" charset="-127"/>
               <a:ea typeface="D2Coding" panose="020B0609020101020101" pitchFamily="49" charset="-127"/>
             </a:endParaRPr>
@@ -8997,7 +10682,7 @@
     </p:spTree>
     <p:extLst>
       <p:ext uri="{BB962C8B-B14F-4D97-AF65-F5344CB8AC3E}">
-        <p14:creationId xmlns:p14="http://schemas.microsoft.com/office/powerpoint/2010/main" val="3844273402"/>
+        <p14:creationId xmlns:p14="http://schemas.microsoft.com/office/powerpoint/2010/main" val="65908905"/>
       </p:ext>
     </p:extLst>
   </p:cSld>
